--- a/slides/Business Users/S3_PowerPoint_Executive.pptx
+++ b/slides/Business Users/S3_PowerPoint_Executive.pptx
@@ -42,6 +42,10 @@
     <p:sldId id="290" r:id="rId42"/>
     <p:sldId id="291" r:id="rId43"/>
     <p:sldId id="292" r:id="rId44"/>
+    <p:sldId id="293" r:id="rId45"/>
+    <p:sldId id="294" r:id="rId46"/>
+    <p:sldId id="295" r:id="rId47"/>
+    <p:sldId id="296" r:id="rId48"/>
   </p:sldIdLst>
   <p:sldSz cx="12191695" cy="6858000" type="screen4x3"/>
   <p:notesSz cx="6858000" cy="9144000"/>
@@ -2529,7 +2533,7 @@
           <a:lstStyle/>
           <a:p>
             <a:r>
-              <a:t>TIME: 1 min</a:t>
+              <a:t>TIME: 4 min</a:t>
             </a:r>
           </a:p>
           <a:p/>
@@ -2540,18 +2544,49 @@
           </a:p>
           <a:p>
             <a:r>
-              <a:t>   Section four. You've got content on slides. Now we make it sharp, clear, and perfectly tuned for your audience. This is where good decks become great decks.</a:t>
+              <a:t>   After working with hundreds of professionals using AI for presentations, these are the five mistakes I see constantly. They're why most people think AI presentation tools aren't useful, while power users are saving 3 to 4 hours per deck.</a:t>
             </a:r>
           </a:p>
           <a:p/>
           <a:p>
             <a:r>
+              <a:t>KEY POINTS:</a:t>
+            </a:r>
+          </a:p>
+          <a:p>
+            <a:r>
+              <a:t>   * Mistake one: vague prompts. 'Make a presentation about marketing' gets you generic slides that need 90 percent rewrite. Compare that to: 'Create a 10-slide B2B marketing strategy for SaaS companies selling to enterprises with 500-plus employees. Cover market analysis, buyer personas for CIO and CMO, content strategy, lead generation tactics, and measurement KPIs. Professional tone for executives expecting ROI justification.' Same tool, wildly different results.</a:t>
+            </a:r>
+          </a:p>
+          <a:p>
+            <a:r>
+              <a:t>   * Mistake two: not reviewing output. AI is brilliant at structure and mediocre at facts. A real example — a banking client's AI-generated slide confidently stated 'European fintech funding increased 43 percent in Q3.' Impressive. Also completely fabricated. The actual number was 12 percent. If they'd presented that to investors, their credibility would have been destroyed.</a:t>
+            </a:r>
+          </a:p>
+          <a:p>
+            <a:r>
+              <a:t>   * Mistake three: treating the first draft as final. The people who complain that AI creates generic content are the ones using first drafts. Power users iterate. One example: first draft said 'Improve productivity and save time.' After three iterations: 'Reduce proposal creation time from 4 hours to 45 minutes, letting enterprise sales teams handle 3X more opportunities without adding headcount.' That's the difference between forgettable and compelling.</a:t>
+            </a:r>
+          </a:p>
+          <a:p>
+            <a:r>
+              <a:t>   * Mistake four: ignoring brand guidelines. AI creates generic professional designs by default. That's fine for internal meetings, unacceptable for client-facing work. Create a branded template once, then use it as your starting point every time.</a:t>
+            </a:r>
+          </a:p>
+          <a:p>
+            <a:r>
+              <a:t>   * Mistake five: over-relying on AI. It accelerates creation but doesn't replace your strategic thinking, industry expertise, or understanding of the audience. AI is your assistant, not your strategist. It executes brilliantly. It doesn't strategize.</a:t>
+            </a:r>
+          </a:p>
+          <a:p/>
+          <a:p>
+            <a:r>
               <a:t>TRANSITION:</a:t>
             </a:r>
           </a:p>
           <a:p>
             <a:r>
-              <a:t>   Let's start with the biggest lever: audience-specific framing.</a:t>
+              <a:t>   Now that you know what NOT to do, let me show you the workflow that consistently produces great results.</a:t>
             </a:r>
           </a:p>
         </p:txBody>
@@ -2621,7 +2656,7 @@
           <a:lstStyle/>
           <a:p>
             <a:r>
-              <a:t>TIME: 4 min</a:t>
+              <a:t>TIME: 3 min</a:t>
             </a:r>
           </a:p>
           <a:p/>
@@ -2632,7 +2667,7 @@
           </a:p>
           <a:p>
             <a:r>
-              <a:t>   The same content needs to be framed completely differently depending on who's in the room. Claude can do this reframing instantly — but you need to tell it who the audience is.</a:t>
+              <a:t>   Here's the exact workflow that turns a 4-hour deck into a 25-minute deck. This isn't theoretical — it's tested on real client presentations.</a:t>
             </a:r>
           </a:p>
           <a:p/>
@@ -2643,65 +2678,49 @@
           </a:p>
           <a:p>
             <a:r>
-              <a:t>   * C-Suite cares about: Will this make us money? Will this lose us money? What decision do you need from me?</a:t>
-            </a:r>
-          </a:p>
-          <a:p>
-            <a:r>
-              <a:t>   * VPs care about: How does this affect my team? What resources do I need? What's the timeline?</a:t>
-            </a:r>
-          </a:p>
-          <a:p>
-            <a:r>
-              <a:t>   * ICs care about: What changes for me day-to-day? Why are we doing this? What's the technical detail?</a:t>
-            </a:r>
-          </a:p>
-          <a:p>
-            <a:r>
-              <a:t>   * Claude prompt for reframing: 'Rewrite this slide for a [C-Suite] audience. Focus on strategic impact and financial implications. Remove operational detail.'</a:t>
-            </a:r>
-          </a:p>
-          <a:p>
-            <a:r>
-              <a:t>   * You can have Claude generate three versions of the same deck for different audiences in minutes</a:t>
+              <a:t>   * Step 1: Generate. One detailed prompt with audience, length, topics, tone, and context. Claude produces a complete deck structure in about 30 seconds. You're not starting from zero — you're starting from 60 to 70 percent complete.</a:t>
+            </a:r>
+          </a:p>
+          <a:p>
+            <a:r>
+              <a:t>   * Step 2: Review. Go through each slide checking data accuracy, logical flow, missing context, and audience alignment. This takes about 5 minutes and is non-negotiable. Structure is usually solid. Data needs verification. Narrative often lacks your strategic insights.</a:t>
+            </a:r>
+          </a:p>
+          <a:p>
+            <a:r>
+              <a:t>   * Step 3: Refine. This is where the magic happens. Use targeted prompts to upgrade the most important slides. 'Add a Q3 to Q4 comparison highlighting our 34 percent pipeline increase.' 'Transform this into a before-and-after visual.' 'Add specific recommendations with budget numbers.' Test multiple versions and pick the strongest.</a:t>
+            </a:r>
+          </a:p>
+          <a:p>
+            <a:r>
+              <a:t>   * Step 4: Brand. Apply your corporate template, update logos, replace generic images, verify color consistency. With a pre-built template this takes about 5 minutes.</a:t>
+            </a:r>
+          </a:p>
+          <a:p>
+            <a:r>
+              <a:t>   * Step 5: Speaker notes. Ask Claude to write talking points for each slide, including likely questions from your specific audience. Refine the most critical slides manually.</a:t>
             </a:r>
           </a:p>
           <a:p/>
           <a:p>
             <a:r>
-              <a:t>ASK THE CLASS:</a:t>
-            </a:r>
-          </a:p>
-          <a:p>
-            <a:r>
-              <a:t>   "Have you ever presented the same deck to a board and an engineering team? How did that go?"</a:t>
-            </a:r>
-          </a:p>
-          <a:p>
-            <a:r>
-              <a:t>   [PAUSE for 30-60 seconds]</a:t>
+              <a:t>REAL-WORLD EXAMPLE:</a:t>
+            </a:r>
+          </a:p>
+          <a:p>
+            <a:r>
+              <a:t>   A marketing director used this exact workflow for a Q4 performance review. Previous method: 4 hours. With this workflow: 25 minutes. Because it took 25 minutes instead of 4 hours, she had time to actually rehearse and anticipate questions. The presentation went flawlessly.</a:t>
             </a:r>
           </a:p>
           <a:p/>
           <a:p>
             <a:r>
-              <a:t>REAL-WORLD EXAMPLE:</a:t>
-            </a:r>
-          </a:p>
-          <a:p>
-            <a:r>
-              <a:t>   A director presented a cloud migration plan to the CTO (technical detail, risk mitigation) and then to the CFO (cost savings, ROI timeline) — same project, completely different decks. Claude generated both versions from the same source material.</a:t>
-            </a:r>
-          </a:p>
-          <a:p/>
-          <a:p>
-            <a:r>
               <a:t>TRANSITION:</a:t>
             </a:r>
           </a:p>
           <a:p>
             <a:r>
-              <a:t>   Let's talk about tone and clarity refinement.</a:t>
+              <a:t>   Now let's talk about refining your messaging — the step that separates good decks from great ones.</a:t>
             </a:r>
           </a:p>
         </p:txBody>
@@ -2771,7 +2790,7 @@
           <a:lstStyle/>
           <a:p>
             <a:r>
-              <a:t>TIME: 4 min</a:t>
+              <a:t>TIME: 3 min</a:t>
             </a:r>
           </a:p>
           <a:p/>
@@ -2782,7 +2801,7 @@
           </a:p>
           <a:p>
             <a:r>
-              <a:t>   Great executive communication is about what you remove, not what you add. Let's talk about the techniques that make slides crisp and clear.</a:t>
+              <a:t>   Here's one of the highest-value techniques: don't rebuild presentations for different audiences. Adapt them.</a:t>
             </a:r>
           </a:p>
           <a:p/>
@@ -2793,38 +2812,38 @@
           </a:p>
           <a:p>
             <a:r>
-              <a:t>   * The 6-word test is brutal but effective — force every bullet to its essence</a:t>
-            </a:r>
-          </a:p>
-          <a:p>
-            <a:r>
-              <a:t>   * Hedge words signal uncertainty. In executive presentations, uncertainty should be explicit and quantified, not hedged.</a:t>
-            </a:r>
-          </a:p>
-          <a:p>
-            <a:r>
-              <a:t>   * Active voice makes slides 30% shorter and 100% more direct</a:t>
-            </a:r>
-          </a:p>
-          <a:p>
-            <a:r>
-              <a:t>   * The 'one number per slide' rule is counterintuitive but powerful — it focuses attention</a:t>
-            </a:r>
-          </a:p>
-          <a:p>
-            <a:r>
-              <a:t>   * Claude is exceptional at this kind of editing. It can take verbose, hedging prose and make it punchy and direct.</a:t>
+              <a:t>   * Most professionals recreate decks from scratch when the audience changes. That's 2 to 3 hours of work that Claude can do in 5 to 10 minutes.</a:t>
+            </a:r>
+          </a:p>
+          <a:p>
+            <a:r>
+              <a:t>   * The key prompt pattern is: 'Convert this [source format] into [target format] for [specific audience] who care about [their priorities].' Be specific about what the new audience values.</a:t>
+            </a:r>
+          </a:p>
+          <a:p>
+            <a:r>
+              <a:t>   * Important distinction: 'simplify' doesn't mean 'dumb down.' It means removing jargon while maintaining strategic value. Tell Claude exactly what to preserve and what to cut.</a:t>
+            </a:r>
+          </a:p>
+          <a:p>
+            <a:r>
+              <a:t>   * A biotech client had a 47-slide technical regulatory submission. They needed an investor version. Claude created a 12-slide exec-friendly version that preserved the science while eliminating the jargon. Time: 6 minutes.</a:t>
             </a:r>
           </a:p>
           <a:p/>
           <a:p>
             <a:r>
-              <a:t>REAL-WORLD EXAMPLE:</a:t>
-            </a:r>
-          </a:p>
-          <a:p>
-            <a:r>
-              <a:t>   Before: 'It appears that customer satisfaction metrics have shown somewhat of an improvement over the past quarter, potentially as a result of the new onboarding experience.' After: 'NPS jumped 12 points after the new onboarding launch.' Same information, 80% fewer words.</a:t>
+              <a:t>ASK THE CLASS:</a:t>
+            </a:r>
+          </a:p>
+          <a:p>
+            <a:r>
+              <a:t>   "How many times in the last month have you recreated a presentation for a different audience? What if each adaptation took 5 minutes instead of 2 hours?"</a:t>
+            </a:r>
+          </a:p>
+          <a:p>
+            <a:r>
+              <a:t>   [PAUSE for 30-60 seconds]</a:t>
             </a:r>
           </a:p>
           <a:p/>
@@ -2835,7 +2854,7 @@
           </a:p>
           <a:p>
             <a:r>
-              <a:t>   Let's look at strategic tone adjustments.</a:t>
+              <a:t>   Let's practice these techniques in the lab.</a:t>
             </a:r>
           </a:p>
         </p:txBody>
@@ -2905,7 +2924,7 @@
           <a:lstStyle/>
           <a:p>
             <a:r>
-              <a:t>TIME: 3 min</a:t>
+              <a:t>TIME: 1 min</a:t>
             </a:r>
           </a:p>
           <a:p/>
@@ -2916,49 +2935,18 @@
           </a:p>
           <a:p>
             <a:r>
-              <a:t>   Tone is the invisible hand of executive communication. The same content can inspire or alarm depending on tone. Claude gives you a tone dial you can adjust instantly.</a:t>
+              <a:t>   Section four. You've got content on slides. Now we make it sharp, clear, and perfectly tuned for your audience. This is where good decks become great decks.</a:t>
             </a:r>
           </a:p>
           <a:p/>
           <a:p>
             <a:r>
-              <a:t>KEY POINTS:</a:t>
-            </a:r>
-          </a:p>
-          <a:p>
-            <a:r>
-              <a:t>   * Every presentation has a tone that should match the context — growth presentations are confident, crisis presentations are measured</a:t>
-            </a:r>
-          </a:p>
-          <a:p>
-            <a:r>
-              <a:t>   * Claude can shift tone across an entire deck with a single prompt — incredibly powerful</a:t>
-            </a:r>
-          </a:p>
-          <a:p>
-            <a:r>
-              <a:t>   * The most common mistake is inconsistent tone — mixing urgency with casualness</a:t>
-            </a:r>
-          </a:p>
-          <a:p>
-            <a:r>
-              <a:t>   * Prompt pattern: 'Review this entire deck for tone consistency. Flag any slides that don't match a [confident, forward-looking] tone.'</a:t>
-            </a:r>
-          </a:p>
-          <a:p>
-            <a:r>
-              <a:t>   * This is where the PowerPoint sidebar excels — select a slide, ask for a tone adjustment, see it immediately</a:t>
-            </a:r>
-          </a:p>
-          <a:p/>
-          <a:p>
-            <a:r>
               <a:t>TRANSITION:</a:t>
             </a:r>
           </a:p>
           <a:p>
             <a:r>
-              <a:t>   Let me show you one more demo — live refinement of a draft deck.</a:t>
+              <a:t>   Let's start with the biggest lever: audience-specific framing.</a:t>
             </a:r>
           </a:p>
         </p:txBody>
@@ -3028,7 +3016,7 @@
           <a:lstStyle/>
           <a:p>
             <a:r>
-              <a:t>TIME: 8 min</a:t>
+              <a:t>TIME: 4 min</a:t>
             </a:r>
           </a:p>
           <a:p/>
@@ -3039,7 +3027,7 @@
           </a:p>
           <a:p>
             <a:r>
-              <a:t>   This is where Claude really shines. I'm going to take a rough, wordy, hedge-filled draft deck and turn it into a crisp executive presentation in about five minutes.</a:t>
+              <a:t>   The same content needs to be framed completely differently depending on who's in the room. Claude can do this reframing instantly — but you need to tell it who the audience is.</a:t>
             </a:r>
           </a:p>
           <a:p/>
@@ -3050,55 +3038,65 @@
           </a:p>
           <a:p>
             <a:r>
-              <a:t>   * Watch the headlines transform from labels to stories</a:t>
-            </a:r>
-          </a:p>
-          <a:p>
-            <a:r>
-              <a:t>   * Count the words removed — usually 40-60% of text is eliminated</a:t>
-            </a:r>
-          </a:p>
-          <a:p>
-            <a:r>
-              <a:t>   * Tone consistency check catches slides that feel 'off' — Claude explains why</a:t>
-            </a:r>
-          </a:p>
-          <a:p>
-            <a:r>
-              <a:t>   * Speaker notes generation is the cherry on top — instant presentation prep</a:t>
+              <a:t>   * C-Suite cares about: Will this make us money? Will this lose us money? What decision do you need from me?</a:t>
+            </a:r>
+          </a:p>
+          <a:p>
+            <a:r>
+              <a:t>   * VPs care about: How does this affect my team? What resources do I need? What's the timeline?</a:t>
+            </a:r>
+          </a:p>
+          <a:p>
+            <a:r>
+              <a:t>   * ICs care about: What changes for me day-to-day? Why are we doing this? What's the technical detail?</a:t>
+            </a:r>
+          </a:p>
+          <a:p>
+            <a:r>
+              <a:t>   * Claude prompt for reframing: 'Rewrite this slide for a [C-Suite] audience. Focus on strategic impact and financial implications. Remove operational detail.'</a:t>
+            </a:r>
+          </a:p>
+          <a:p>
+            <a:r>
+              <a:t>   * You can have Claude generate three versions of the same deck for different audiences in minutes</a:t>
             </a:r>
           </a:p>
           <a:p/>
           <a:p>
             <a:r>
+              <a:t>ASK THE CLASS:</a:t>
+            </a:r>
+          </a:p>
+          <a:p>
+            <a:r>
+              <a:t>   "Have you ever presented the same deck to a board and an engineering team? How did that go?"</a:t>
+            </a:r>
+          </a:p>
+          <a:p>
+            <a:r>
+              <a:t>   [PAUSE for 30-60 seconds]</a:t>
+            </a:r>
+          </a:p>
+          <a:p/>
+          <a:p>
+            <a:r>
               <a:t>REAL-WORLD EXAMPLE:</a:t>
             </a:r>
           </a:p>
           <a:p>
             <a:r>
-              <a:t>   A VP of Sales took her 25-slide quarterly review through this exact refinement process. Her CEO said it was 'the best QBR deck I've seen in three years.' The content was the same — the packaging was completely different.</a:t>
+              <a:t>   A director presented a cloud migration plan to the CTO (technical detail, risk mitigation) and then to the CFO (cost savings, ROI timeline) — same project, completely different decks. Claude generated both versions from the same source material.</a:t>
             </a:r>
           </a:p>
           <a:p/>
           <a:p>
             <a:r>
-              <a:t>DEMO:</a:t>
-            </a:r>
-          </a:p>
-          <a:p>
-            <a:r>
-              <a:t>   Prepare a deliberately rough 8-10 slide deck with common problems: descriptive headlines, verbose bullets, hedge words, inconsistent tone. Open in PowerPoint with the Claude sidebar. Walk through each refinement step, showing the before and after for each slide. Highlight the speed — this kind of editing typically takes 2-3 hours manually. Emphasize that Claude preserves the strategic content while improving the packaging.</a:t>
-            </a:r>
-          </a:p>
-          <a:p/>
-          <a:p>
-            <a:r>
               <a:t>TRANSITION:</a:t>
             </a:r>
           </a:p>
           <a:p>
             <a:r>
-              <a:t>   One more section, and it's the best one — you're going to build a deck yourself.</a:t>
+              <a:t>   Let's talk about tone and clarity refinement.</a:t>
             </a:r>
           </a:p>
         </p:txBody>
@@ -3168,7 +3166,7 @@
           <a:lstStyle/>
           <a:p>
             <a:r>
-              <a:t>TIME: 15 min</a:t>
+              <a:t>TIME: 4 min</a:t>
             </a:r>
           </a:p>
           <a:p/>
@@ -3179,7 +3177,60 @@
           </a:p>
           <a:p>
             <a:r>
-              <a:t>   Take 15. When you come back, you'll be building a complete executive deck from scratch. Think about a real presentation you need to create — you're going to start it in the lab.</a:t>
+              <a:t>   Great executive communication is about what you remove, not what you add. Let's talk about the techniques that make slides crisp and clear.</a:t>
+            </a:r>
+          </a:p>
+          <a:p/>
+          <a:p>
+            <a:r>
+              <a:t>KEY POINTS:</a:t>
+            </a:r>
+          </a:p>
+          <a:p>
+            <a:r>
+              <a:t>   * The 6-word test is brutal but effective — force every bullet to its essence</a:t>
+            </a:r>
+          </a:p>
+          <a:p>
+            <a:r>
+              <a:t>   * Hedge words signal uncertainty. In executive presentations, uncertainty should be explicit and quantified, not hedged.</a:t>
+            </a:r>
+          </a:p>
+          <a:p>
+            <a:r>
+              <a:t>   * Active voice makes slides 30% shorter and 100% more direct</a:t>
+            </a:r>
+          </a:p>
+          <a:p>
+            <a:r>
+              <a:t>   * The 'one number per slide' rule is counterintuitive but powerful — it focuses attention</a:t>
+            </a:r>
+          </a:p>
+          <a:p>
+            <a:r>
+              <a:t>   * Claude is exceptional at this kind of editing. It can take verbose, hedging prose and make it punchy and direct.</a:t>
+            </a:r>
+          </a:p>
+          <a:p/>
+          <a:p>
+            <a:r>
+              <a:t>REAL-WORLD EXAMPLE:</a:t>
+            </a:r>
+          </a:p>
+          <a:p>
+            <a:r>
+              <a:t>   Before: 'It appears that customer satisfaction metrics have shown somewhat of an improvement over the past quarter, potentially as a result of the new onboarding experience.' After: 'NPS jumped 12 points after the new onboarding launch.' Same information, 80% fewer words.</a:t>
+            </a:r>
+          </a:p>
+          <a:p/>
+          <a:p>
+            <a:r>
+              <a:t>TRANSITION:</a:t>
+            </a:r>
+          </a:p>
+          <a:p>
+            <a:r>
+              <a:t>   Let's look at strategic tone adjustments.</a:t>
             </a:r>
           </a:p>
         </p:txBody>
@@ -3383,7 +3434,7 @@
           <a:lstStyle/>
           <a:p>
             <a:r>
-              <a:t>TIME: 1 min</a:t>
+              <a:t>TIME: 3 min</a:t>
             </a:r>
           </a:p>
           <a:p/>
@@ -3394,18 +3445,49 @@
           </a:p>
           <a:p>
             <a:r>
-              <a:t>   Section five. This is where it all comes together. For the next 55 minutes, you're going to build a complete executive deck using everything we've covered today.</a:t>
+              <a:t>   Tone is the invisible hand of executive communication. The same content can inspire or alarm depending on tone. Claude gives you a tone dial you can adjust instantly.</a:t>
             </a:r>
           </a:p>
           <a:p/>
           <a:p>
             <a:r>
+              <a:t>KEY POINTS:</a:t>
+            </a:r>
+          </a:p>
+          <a:p>
+            <a:r>
+              <a:t>   * Every presentation has a tone that should match the context — growth presentations are confident, crisis presentations are measured</a:t>
+            </a:r>
+          </a:p>
+          <a:p>
+            <a:r>
+              <a:t>   * Claude can shift tone across an entire deck with a single prompt — incredibly powerful</a:t>
+            </a:r>
+          </a:p>
+          <a:p>
+            <a:r>
+              <a:t>   * The most common mistake is inconsistent tone — mixing urgency with casualness</a:t>
+            </a:r>
+          </a:p>
+          <a:p>
+            <a:r>
+              <a:t>   * Prompt pattern: 'Review this entire deck for tone consistency. Flag any slides that don't match a [confident, forward-looking] tone.'</a:t>
+            </a:r>
+          </a:p>
+          <a:p>
+            <a:r>
+              <a:t>   * This is where the PowerPoint sidebar excels — select a slide, ask for a tone adjustment, see it immediately</a:t>
+            </a:r>
+          </a:p>
+          <a:p/>
+          <a:p>
+            <a:r>
               <a:t>TRANSITION:</a:t>
             </a:r>
           </a:p>
           <a:p>
             <a:r>
-              <a:t>   Here's the exercise.</a:t>
+              <a:t>   Let me show you one more demo — live refinement of a draft deck.</a:t>
             </a:r>
           </a:p>
         </p:txBody>
@@ -3475,7 +3557,7 @@
           <a:lstStyle/>
           <a:p>
             <a:r>
-              <a:t>TIME: 55 min</a:t>
+              <a:t>TIME: 8 min</a:t>
             </a:r>
           </a:p>
           <a:p/>
@@ -3486,7 +3568,7 @@
           </a:p>
           <a:p>
             <a:r>
-              <a:t>   This is the real test. You're building a complete deck from scratch, using every framework and technique we've covered. If you have a real presentation coming up, use that — you'll leave with actual work done.</a:t>
+              <a:t>   This is where Claude really shines. I'm going to take a rough, wordy, hedge-filled draft deck and turn it into a crisp executive presentation in about five minutes.</a:t>
             </a:r>
           </a:p>
           <a:p/>
@@ -3497,65 +3579,55 @@
           </a:p>
           <a:p>
             <a:r>
-              <a:t>   * Option C is strongly encouraged — you'll leave with work product you actually need</a:t>
-            </a:r>
-          </a:p>
-          <a:p>
-            <a:r>
-              <a:t>   * Start with structure (SCQA or Pyramid), not with opening PowerPoint</a:t>
-            </a:r>
-          </a:p>
-          <a:p>
-            <a:r>
-              <a:t>   * The three-prompt method is your secret weapon — don't try to do it in one prompt</a:t>
-            </a:r>
-          </a:p>
-          <a:p>
-            <a:r>
-              <a:t>   * If you get stuck, start with the headline: what is the ONE thing this slide needs to say?</a:t>
-            </a:r>
-          </a:p>
-          <a:p>
-            <a:r>
-              <a:t>   * Speaker notes are not optional — they're what make the deck presentable by anyone on your team</a:t>
+              <a:t>   * Watch the headlines transform from labels to stories</a:t>
+            </a:r>
+          </a:p>
+          <a:p>
+            <a:r>
+              <a:t>   * Count the words removed — usually 40-60% of text is eliminated</a:t>
+            </a:r>
+          </a:p>
+          <a:p>
+            <a:r>
+              <a:t>   * Tone consistency check catches slides that feel 'off' — Claude explains why</a:t>
+            </a:r>
+          </a:p>
+          <a:p>
+            <a:r>
+              <a:t>   * Speaker notes generation is the cherry on top — instant presentation prep</a:t>
             </a:r>
           </a:p>
           <a:p/>
           <a:p>
             <a:r>
-              <a:t>ASK THE CLASS:</a:t>
-            </a:r>
-          </a:p>
-          <a:p>
-            <a:r>
-              <a:t>   "Before you start: what is the single most important message your deck needs to deliver? Write it in one sentence."</a:t>
-            </a:r>
-          </a:p>
-          <a:p>
-            <a:r>
-              <a:t>   [PAUSE for 30-60 seconds]</a:t>
+              <a:t>REAL-WORLD EXAMPLE:</a:t>
+            </a:r>
+          </a:p>
+          <a:p>
+            <a:r>
+              <a:t>   A VP of Sales took her 25-slide quarterly review through this exact refinement process. Her CEO said it was 'the best QBR deck I've seen in three years.' The content was the same — the packaging was completely different.</a:t>
             </a:r>
           </a:p>
           <a:p/>
           <a:p>
             <a:r>
-              <a:t>REAL-WORLD EXAMPLE:</a:t>
-            </a:r>
-          </a:p>
-          <a:p>
-            <a:r>
-              <a:t>   In our last session, a participant used Option C and built an actual board presentation she was dreading. She said it would have taken her 6-8 hours. She finished a polished draft in 55 minutes.</a:t>
+              <a:t>DEMO:</a:t>
+            </a:r>
+          </a:p>
+          <a:p>
+            <a:r>
+              <a:t>   Prepare a deliberately rough 8-10 slide deck with common problems: descriptive headlines, verbose bullets, hedge words, inconsistent tone. Open in PowerPoint with the Claude sidebar. Walk through each refinement step, showing the before and after for each slide. Highlight the speed — this kind of editing typically takes 2-3 hours manually. Emphasize that Claude preserves the strategic content while improving the packaging.</a:t>
             </a:r>
           </a:p>
           <a:p/>
           <a:p>
             <a:r>
-              <a:t>DEMO:</a:t>
-            </a:r>
-          </a:p>
-          <a:p>
-            <a:r>
-              <a:t>   Circulate the room during the lab. Help participants choose their scenario. Encourage them to use the three-prompt method and not skip the insight extraction step. Check that headlines are action-oriented. At the 30-minute mark, do a quick checkpoint — ask a few people to share their headlines-only story. At the 45-minute mark, remind them to do the refinement pass.</a:t>
+              <a:t>TRANSITION:</a:t>
+            </a:r>
+          </a:p>
+          <a:p>
+            <a:r>
+              <a:t>   One more section, and it's the best one — you're going to build a deck yourself.</a:t>
             </a:r>
           </a:p>
         </p:txBody>
@@ -3625,7 +3697,7 @@
           <a:lstStyle/>
           <a:p>
             <a:r>
-              <a:t>TIME: 1 min</a:t>
+              <a:t>TIME: 15 min</a:t>
             </a:r>
           </a:p>
           <a:p/>
@@ -3636,39 +3708,7 @@
           </a:p>
           <a:p>
             <a:r>
-              <a:t>   Keep this slide up as reference during the lab. These are the five prompts you'll use most.</a:t>
-            </a:r>
-          </a:p>
-          <a:p/>
-          <a:p>
-            <a:r>
-              <a:t>KEY POINTS:</a:t>
-            </a:r>
-          </a:p>
-          <a:p>
-            <a:r>
-              <a:t>   * These templates are starting points — customize them with your specific audience, context, and framework</a:t>
-            </a:r>
-          </a:p>
-          <a:p>
-            <a:r>
-              <a:t>   * You can copy these prompts directly into Claude.ai or the PowerPoint sidebar</a:t>
-            </a:r>
-          </a:p>
-          <a:p>
-            <a:r>
-              <a:t>   * Start at the top and work down — structure before content, content before refinement</a:t>
-            </a:r>
-          </a:p>
-          <a:p/>
-          <a:p>
-            <a:r>
-              <a:t>TRANSITION:</a:t>
-            </a:r>
-          </a:p>
-          <a:p>
-            <a:r>
-              <a:t>   Let's get started. I'll be walking around to help.</a:t>
+              <a:t>   Take 15. When you come back, you'll be building a complete executive deck from scratch. Think about a real presentation you need to create — you're going to start it in the lab.</a:t>
             </a:r>
           </a:p>
         </p:txBody>
@@ -3749,7 +3789,7 @@
           </a:p>
           <a:p>
             <a:r>
-              <a:t>   Let's bring it all together. You've learned frameworks, practiced workflows, and built a real deck. Here are the key takeaways.</a:t>
+              <a:t>   Section five. This is where it all comes together. For the next 55 minutes, you're going to build a complete executive deck using everything we've covered today.</a:t>
             </a:r>
           </a:p>
           <a:p/>
@@ -3760,7 +3800,7 @@
           </a:p>
           <a:p>
             <a:r>
-              <a:t>   The executive communication toolkit.</a:t>
+              <a:t>   Here's the exercise.</a:t>
             </a:r>
           </a:p>
         </p:txBody>
@@ -3830,7 +3870,7 @@
           <a:lstStyle/>
           <a:p>
             <a:r>
-              <a:t>TIME: 3 min</a:t>
+              <a:t>TIME: 55 min</a:t>
             </a:r>
           </a:p>
           <a:p/>
@@ -3841,7 +3881,7 @@
           </a:p>
           <a:p>
             <a:r>
-              <a:t>   Seven tools in your new toolkit. Each one individually makes your decks better. Combined, they transform your executive communication.</a:t>
+              <a:t>   This is the real test. You're building a complete deck from scratch, using every framework and technique we've covered. If you have a real presentation coming up, use that — you'll leave with actual work done.</a:t>
             </a:r>
           </a:p>
           <a:p/>
@@ -3852,27 +3892,27 @@
           </a:p>
           <a:p>
             <a:r>
-              <a:t>   * The Pyramid Principle alone will make your decks 50% more effective</a:t>
-            </a:r>
-          </a:p>
-          <a:p>
-            <a:r>
-              <a:t>   * Action headlines are the fastest win — you can start using them today</a:t>
-            </a:r>
-          </a:p>
-          <a:p>
-            <a:r>
-              <a:t>   * The three-prompt method prevents the most common mistake: asking Claude to do too much at once</a:t>
-            </a:r>
-          </a:p>
-          <a:p>
-            <a:r>
-              <a:t>   * Audience framing is the advanced move — same content, three different decks, each tailored perfectly</a:t>
-            </a:r>
-          </a:p>
-          <a:p>
-            <a:r>
-              <a:t>   * Claude makes all of this 3-5x faster than doing it manually — but the frameworks are what make it good</a:t>
+              <a:t>   * Option C is strongly encouraged — you'll leave with work product you actually need</a:t>
+            </a:r>
+          </a:p>
+          <a:p>
+            <a:r>
+              <a:t>   * Start with structure (SCQA or Pyramid), not with opening PowerPoint</a:t>
+            </a:r>
+          </a:p>
+          <a:p>
+            <a:r>
+              <a:t>   * The three-prompt method is your secret weapon — don't try to do it in one prompt</a:t>
+            </a:r>
+          </a:p>
+          <a:p>
+            <a:r>
+              <a:t>   * If you get stuck, start with the headline: what is the ONE thing this slide needs to say?</a:t>
+            </a:r>
+          </a:p>
+          <a:p>
+            <a:r>
+              <a:t>   * Speaker notes are not optional — they're what make the deck presentable by anyone on your team</a:t>
             </a:r>
           </a:p>
           <a:p/>
@@ -3883,7 +3923,7 @@
           </a:p>
           <a:p>
             <a:r>
-              <a:t>   "Which of these seven techniques will you use first in your next presentation?"</a:t>
+              <a:t>   "Before you start: what is the single most important message your deck needs to deliver? Write it in one sentence."</a:t>
             </a:r>
           </a:p>
           <a:p>
@@ -3894,12 +3934,23 @@
           <a:p/>
           <a:p>
             <a:r>
-              <a:t>TRANSITION:</a:t>
-            </a:r>
-          </a:p>
-          <a:p>
-            <a:r>
-              <a:t>   Let's look at what to do after today.</a:t>
+              <a:t>REAL-WORLD EXAMPLE:</a:t>
+            </a:r>
+          </a:p>
+          <a:p>
+            <a:r>
+              <a:t>   In our last session, a participant used Option C and built an actual board presentation she was dreading. She said it would have taken her 6-8 hours. She finished a polished draft in 55 minutes.</a:t>
+            </a:r>
+          </a:p>
+          <a:p/>
+          <a:p>
+            <a:r>
+              <a:t>DEMO:</a:t>
+            </a:r>
+          </a:p>
+          <a:p>
+            <a:r>
+              <a:t>   Circulate the room during the lab. Help participants choose their scenario. Encourage them to use the three-prompt method and not skip the insight extraction step. Check that headlines are action-oriented. At the 30-minute mark, do a quick checkpoint — ask a few people to share their headlines-only story. At the 45-minute mark, remind them to do the refinement pass.</a:t>
             </a:r>
           </a:p>
         </p:txBody>
@@ -3969,7 +4020,7 @@
           <a:lstStyle/>
           <a:p>
             <a:r>
-              <a:t>TIME: 3 min</a:t>
+              <a:t>TIME: 1 min</a:t>
             </a:r>
           </a:p>
           <a:p/>
@@ -3980,7 +4031,7 @@
           </a:p>
           <a:p>
             <a:r>
-              <a:t>   Knowledge without action is just entertainment. Here's your implementation plan.</a:t>
+              <a:t>   Keep this slide up as reference during the lab. These are the five prompts you'll use most.</a:t>
             </a:r>
           </a:p>
           <a:p/>
@@ -3991,49 +4042,28 @@
           </a:p>
           <a:p>
             <a:r>
-              <a:t>   * This week is about the quick win — action headlines transform any deck immediately</a:t>
-            </a:r>
-          </a:p>
-          <a:p>
-            <a:r>
-              <a:t>   * This month is about building the muscle — the three-prompt method becomes second nature after 3-4 decks</a:t>
-            </a:r>
-          </a:p>
-          <a:p>
-            <a:r>
-              <a:t>   * This quarter is about team impact — when the whole team uses these frameworks, communication quality across the org improves dramatically</a:t>
-            </a:r>
-          </a:p>
-          <a:p>
-            <a:r>
-              <a:t>   * Save your best Claude prompts in a team document — they become organizational assets</a:t>
-            </a:r>
-          </a:p>
-          <a:p>
-            <a:r>
-              <a:t>   * The PowerPoint sidebar will continue improving — as it does, your workflow gets even faster</a:t>
+              <a:t>   * These templates are starting points — customize them with your specific audience, context, and framework</a:t>
+            </a:r>
+          </a:p>
+          <a:p>
+            <a:r>
+              <a:t>   * You can copy these prompts directly into Claude.ai or the PowerPoint sidebar</a:t>
+            </a:r>
+          </a:p>
+          <a:p>
+            <a:r>
+              <a:t>   * Start at the top and work down — structure before content, content before refinement</a:t>
             </a:r>
           </a:p>
           <a:p/>
           <a:p>
             <a:r>
-              <a:t>REAL-WORLD EXAMPLE:</a:t>
-            </a:r>
-          </a:p>
-          <a:p>
-            <a:r>
-              <a:t>   A marketing team we trained created a shared 'Claude Prompt Library' in Notion. Within a month, their average deck creation time dropped from 8 hours to 2 hours. The CMO noticed the quality improvement before anyone told her about the AI tools.</a:t>
-            </a:r>
-          </a:p>
-          <a:p/>
-          <a:p>
-            <a:r>
               <a:t>TRANSITION:</a:t>
             </a:r>
           </a:p>
           <a:p>
             <a:r>
-              <a:t>   One final thought.</a:t>
+              <a:t>   Let's get started. I'll be walking around to help.</a:t>
             </a:r>
           </a:p>
         </p:txBody>
@@ -4103,7 +4133,7 @@
           <a:lstStyle/>
           <a:p>
             <a:r>
-              <a:t>TIME: 2 min</a:t>
+              <a:t>TIME: 3 min</a:t>
             </a:r>
           </a:p>
           <a:p/>
@@ -4114,7 +4144,7 @@
           </a:p>
           <a:p>
             <a:r>
-              <a:t>   I want to leave you with this. The tools are powerful. The frameworks are proven. But the reason your presentations will improve isn't because of Claude or PowerPoint. It's because you now have a structured way to think about executive communication. Claude just makes that thinking visible faster.</a:t>
+              <a:t>   Everyone focuses on the time savings. '3 hours saved per deck!' But that's not actually the real value.</a:t>
             </a:r>
           </a:p>
           <a:p/>
@@ -4125,22 +4155,22 @@
           </a:p>
           <a:p>
             <a:r>
-              <a:t>   * The frameworks we learned today pre-date AI by decades — they work because they're about human communication</a:t>
-            </a:r>
-          </a:p>
-          <a:p>
-            <a:r>
-              <a:t>   * Claude removes the friction between having a good idea and expressing it clearly</a:t>
-            </a:r>
-          </a:p>
-          <a:p>
-            <a:r>
-              <a:t>   * Your competitive advantage isn't the tool — it's knowing how to think about communication strategically</a:t>
-            </a:r>
-          </a:p>
-          <a:p>
-            <a:r>
-              <a:t>   * The best presenters aren't the ones with the prettiest slides — they're the ones with the clearest thinking</a:t>
+              <a:t>   * The numbers are impressive on their own. A 4-hour deck becomes 30 minutes. If you create 2 presentations a week, that's over 300 hours per year — worth $45,000 or more at professional billing rates.</a:t>
+            </a:r>
+          </a:p>
+          <a:p>
+            <a:r>
+              <a:t>   * But the hidden value is what changes your behavior. When you know you can generate a decent first draft in 2 minutes, you're more willing to iterate. You try different structures. You test alternative narratives. You experiment with different openings. Before AI, restructuring a deck was a 2-hour commitment. Now it's 5 minutes.</a:t>
+            </a:r>
+          </a:p>
+          <a:p>
+            <a:r>
+              <a:t>   * A sales director described it perfectly: 'Before, I'd create one version of a pitch and stick with it because reworking felt like starting over. Now I create 3 to 4 variations and pick the strongest. My close rate went up 28 percent.' That's not just time savings. That's strategic advantage.</a:t>
+            </a:r>
+          </a:p>
+          <a:p>
+            <a:r>
+              <a:t>   * And the quality improvement from having time to actually rehearse — that's where presentations go from good to career-defining.</a:t>
             </a:r>
           </a:p>
           <a:p/>
@@ -4151,7 +4181,7 @@
           </a:p>
           <a:p>
             <a:r>
-              <a:t>   Thank you for four hours of focused work. Go build decks that change decisions.</a:t>
+              <a:t>   Let's recap what you've learned and your action plan going forward.</a:t>
             </a:r>
           </a:p>
         </p:txBody>
@@ -4232,28 +4262,291 @@
           </a:p>
           <a:p>
             <a:r>
-              <a:t>   That's a wrap on Session 3. You now have the frameworks, the tools, and the hands-on experience to build executive presentations in a fraction of the time. See you in Session 4.</a:t>
+              <a:t>   Let's bring it all together. You've learned frameworks, practiced workflows, and built a real deck. Here are the key takeaways.</a:t>
             </a:r>
           </a:p>
           <a:p/>
           <a:p>
             <a:r>
+              <a:t>TRANSITION:</a:t>
+            </a:r>
+          </a:p>
+          <a:p>
+            <a:r>
+              <a:t>   The executive communication toolkit.</a:t>
+            </a:r>
+          </a:p>
+        </p:txBody>
+      </p:sp>
+      <p:sp>
+        <p:nvSpPr>
+          <p:cNvPr id="4" name="Slide Number Placeholder 3"/>
+          <p:cNvSpPr>
+            <a:spLocks noGrp="1"/>
+          </p:cNvSpPr>
+          <p:nvPr>
+            <p:ph type="sldNum" idx="5" sz="quarter"/>
+          </p:nvPr>
+        </p:nvSpPr>
+        <p:spPr/>
+      </p:sp>
+    </p:spTree>
+  </p:cSld>
+  <p:clrMapOvr>
+    <a:masterClrMapping/>
+  </p:clrMapOvr>
+</p:notes>
+</file>
+
+<file path=ppt/notesSlides/notesSlide38.xml><?xml version="1.0" encoding="utf-8"?>
+<p:notes xmlns:a="http://schemas.openxmlformats.org/drawingml/2006/main" xmlns:p="http://schemas.openxmlformats.org/presentationml/2006/main" xmlns:r="http://schemas.openxmlformats.org/officeDocument/2006/relationships">
+  <p:cSld>
+    <p:spTree>
+      <p:nvGrpSpPr>
+        <p:cNvPr id="1" name=""/>
+        <p:cNvGrpSpPr/>
+        <p:nvPr/>
+      </p:nvGrpSpPr>
+      <p:grpSpPr>
+        <a:xfrm>
+          <a:off x="0" y="0"/>
+          <a:ext cx="0" cy="0"/>
+          <a:chOff x="0" y="0"/>
+          <a:chExt cx="0" cy="0"/>
+        </a:xfrm>
+      </p:grpSpPr>
+      <p:sp>
+        <p:nvSpPr>
+          <p:cNvPr id="2" name="Slide Image Placeholder 1"/>
+          <p:cNvSpPr>
+            <a:spLocks noGrp="1"/>
+          </p:cNvSpPr>
+          <p:nvPr>
+            <p:ph type="sldImg" idx="2"/>
+          </p:nvPr>
+        </p:nvSpPr>
+        <p:spPr/>
+      </p:sp>
+      <p:sp>
+        <p:nvSpPr>
+          <p:cNvPr id="3" name="Notes Placeholder 2"/>
+          <p:cNvSpPr>
+            <a:spLocks noGrp="1"/>
+          </p:cNvSpPr>
+          <p:nvPr>
+            <p:ph type="body" idx="3" sz="quarter"/>
+          </p:nvPr>
+        </p:nvSpPr>
+        <p:spPr/>
+        <p:txBody>
+          <a:bodyPr/>
+          <a:lstStyle/>
+          <a:p>
+            <a:r>
+              <a:t>TIME: 3 min</a:t>
+            </a:r>
+          </a:p>
+          <a:p/>
+          <a:p>
+            <a:r>
+              <a:t>OPEN WITH:</a:t>
+            </a:r>
+          </a:p>
+          <a:p>
+            <a:r>
+              <a:t>   Seven tools in your new toolkit. Each one individually makes your decks better. Combined, they transform your executive communication.</a:t>
+            </a:r>
+          </a:p>
+          <a:p/>
+          <a:p>
+            <a:r>
               <a:t>KEY POINTS:</a:t>
             </a:r>
           </a:p>
           <a:p>
             <a:r>
-              <a:t>   * Session 4 will cover advanced Claude workflows — multi-step analysis, team collaboration, and enterprise deployment</a:t>
-            </a:r>
-          </a:p>
-          <a:p>
-            <a:r>
-              <a:t>   * Take your lab deck and finish it this week — real practice cements the learning</a:t>
-            </a:r>
-          </a:p>
-          <a:p>
-            <a:r>
-              <a:t>   * Questions? I'm available after the session for one-on-one help.</a:t>
+              <a:t>   * The Pyramid Principle alone will make your decks 50% more effective</a:t>
+            </a:r>
+          </a:p>
+          <a:p>
+            <a:r>
+              <a:t>   * Action headlines are the fastest win — you can start using them today</a:t>
+            </a:r>
+          </a:p>
+          <a:p>
+            <a:r>
+              <a:t>   * The three-prompt method prevents the most common mistake: asking Claude to do too much at once</a:t>
+            </a:r>
+          </a:p>
+          <a:p>
+            <a:r>
+              <a:t>   * Audience framing is the advanced move — same content, three different decks, each tailored perfectly</a:t>
+            </a:r>
+          </a:p>
+          <a:p>
+            <a:r>
+              <a:t>   * Claude makes all of this 3-5x faster than doing it manually — but the frameworks are what make it good</a:t>
+            </a:r>
+          </a:p>
+          <a:p/>
+          <a:p>
+            <a:r>
+              <a:t>ASK THE CLASS:</a:t>
+            </a:r>
+          </a:p>
+          <a:p>
+            <a:r>
+              <a:t>   "Which of these seven techniques will you use first in your next presentation?"</a:t>
+            </a:r>
+          </a:p>
+          <a:p>
+            <a:r>
+              <a:t>   [PAUSE for 30-60 seconds]</a:t>
+            </a:r>
+          </a:p>
+          <a:p/>
+          <a:p>
+            <a:r>
+              <a:t>TRANSITION:</a:t>
+            </a:r>
+          </a:p>
+          <a:p>
+            <a:r>
+              <a:t>   Let's look at what to do after today.</a:t>
+            </a:r>
+          </a:p>
+        </p:txBody>
+      </p:sp>
+      <p:sp>
+        <p:nvSpPr>
+          <p:cNvPr id="4" name="Slide Number Placeholder 3"/>
+          <p:cNvSpPr>
+            <a:spLocks noGrp="1"/>
+          </p:cNvSpPr>
+          <p:nvPr>
+            <p:ph type="sldNum" idx="5" sz="quarter"/>
+          </p:nvPr>
+        </p:nvSpPr>
+        <p:spPr/>
+      </p:sp>
+    </p:spTree>
+  </p:cSld>
+  <p:clrMapOvr>
+    <a:masterClrMapping/>
+  </p:clrMapOvr>
+</p:notes>
+</file>
+
+<file path=ppt/notesSlides/notesSlide39.xml><?xml version="1.0" encoding="utf-8"?>
+<p:notes xmlns:a="http://schemas.openxmlformats.org/drawingml/2006/main" xmlns:p="http://schemas.openxmlformats.org/presentationml/2006/main" xmlns:r="http://schemas.openxmlformats.org/officeDocument/2006/relationships">
+  <p:cSld>
+    <p:spTree>
+      <p:nvGrpSpPr>
+        <p:cNvPr id="1" name=""/>
+        <p:cNvGrpSpPr/>
+        <p:nvPr/>
+      </p:nvGrpSpPr>
+      <p:grpSpPr>
+        <a:xfrm>
+          <a:off x="0" y="0"/>
+          <a:ext cx="0" cy="0"/>
+          <a:chOff x="0" y="0"/>
+          <a:chExt cx="0" cy="0"/>
+        </a:xfrm>
+      </p:grpSpPr>
+      <p:sp>
+        <p:nvSpPr>
+          <p:cNvPr id="2" name="Slide Image Placeholder 1"/>
+          <p:cNvSpPr>
+            <a:spLocks noGrp="1"/>
+          </p:cNvSpPr>
+          <p:nvPr>
+            <p:ph type="sldImg" idx="2"/>
+          </p:nvPr>
+        </p:nvSpPr>
+        <p:spPr/>
+      </p:sp>
+      <p:sp>
+        <p:nvSpPr>
+          <p:cNvPr id="3" name="Notes Placeholder 2"/>
+          <p:cNvSpPr>
+            <a:spLocks noGrp="1"/>
+          </p:cNvSpPr>
+          <p:nvPr>
+            <p:ph type="body" idx="3" sz="quarter"/>
+          </p:nvPr>
+        </p:nvSpPr>
+        <p:spPr/>
+        <p:txBody>
+          <a:bodyPr/>
+          <a:lstStyle/>
+          <a:p>
+            <a:r>
+              <a:t>TIME: 3 min</a:t>
+            </a:r>
+          </a:p>
+          <a:p/>
+          <a:p>
+            <a:r>
+              <a:t>OPEN WITH:</a:t>
+            </a:r>
+          </a:p>
+          <a:p>
+            <a:r>
+              <a:t>   Knowledge without action is just entertainment. Here's your implementation plan.</a:t>
+            </a:r>
+          </a:p>
+          <a:p/>
+          <a:p>
+            <a:r>
+              <a:t>KEY POINTS:</a:t>
+            </a:r>
+          </a:p>
+          <a:p>
+            <a:r>
+              <a:t>   * This week is about the quick win — action headlines transform any deck immediately</a:t>
+            </a:r>
+          </a:p>
+          <a:p>
+            <a:r>
+              <a:t>   * This month is about building the muscle — the three-prompt method becomes second nature after 3-4 decks</a:t>
+            </a:r>
+          </a:p>
+          <a:p>
+            <a:r>
+              <a:t>   * This quarter is about team impact — when the whole team uses these frameworks, communication quality across the org improves dramatically</a:t>
+            </a:r>
+          </a:p>
+          <a:p>
+            <a:r>
+              <a:t>   * Save your best Claude prompts in a team document — they become organizational assets</a:t>
+            </a:r>
+          </a:p>
+          <a:p>
+            <a:r>
+              <a:t>   * The PowerPoint sidebar will continue improving — as it does, your workflow gets even faster</a:t>
+            </a:r>
+          </a:p>
+          <a:p/>
+          <a:p>
+            <a:r>
+              <a:t>REAL-WORLD EXAMPLE:</a:t>
+            </a:r>
+          </a:p>
+          <a:p>
+            <a:r>
+              <a:t>   A marketing team we trained created a shared 'Claude Prompt Library' in Notion. Within a month, their average deck creation time dropped from 8 hours to 2 hours. The CMO noticed the quality improvement before anyone told her about the AI tools.</a:t>
+            </a:r>
+          </a:p>
+          <a:p/>
+          <a:p>
+            <a:r>
+              <a:t>TRANSITION:</a:t>
+            </a:r>
+          </a:p>
+          <a:p>
+            <a:r>
+              <a:t>   One final thought.</a:t>
             </a:r>
           </a:p>
         </p:txBody>
@@ -4370,6 +4663,226 @@
 </p:notes>
 </file>
 
+<file path=ppt/notesSlides/notesSlide40.xml><?xml version="1.0" encoding="utf-8"?>
+<p:notes xmlns:a="http://schemas.openxmlformats.org/drawingml/2006/main" xmlns:p="http://schemas.openxmlformats.org/presentationml/2006/main" xmlns:r="http://schemas.openxmlformats.org/officeDocument/2006/relationships">
+  <p:cSld>
+    <p:spTree>
+      <p:nvGrpSpPr>
+        <p:cNvPr id="1" name=""/>
+        <p:cNvGrpSpPr/>
+        <p:nvPr/>
+      </p:nvGrpSpPr>
+      <p:grpSpPr>
+        <a:xfrm>
+          <a:off x="0" y="0"/>
+          <a:ext cx="0" cy="0"/>
+          <a:chOff x="0" y="0"/>
+          <a:chExt cx="0" cy="0"/>
+        </a:xfrm>
+      </p:grpSpPr>
+      <p:sp>
+        <p:nvSpPr>
+          <p:cNvPr id="2" name="Slide Image Placeholder 1"/>
+          <p:cNvSpPr>
+            <a:spLocks noGrp="1"/>
+          </p:cNvSpPr>
+          <p:nvPr>
+            <p:ph type="sldImg" idx="2"/>
+          </p:nvPr>
+        </p:nvSpPr>
+        <p:spPr/>
+      </p:sp>
+      <p:sp>
+        <p:nvSpPr>
+          <p:cNvPr id="3" name="Notes Placeholder 2"/>
+          <p:cNvSpPr>
+            <a:spLocks noGrp="1"/>
+          </p:cNvSpPr>
+          <p:nvPr>
+            <p:ph type="body" idx="3" sz="quarter"/>
+          </p:nvPr>
+        </p:nvSpPr>
+        <p:spPr/>
+        <p:txBody>
+          <a:bodyPr/>
+          <a:lstStyle/>
+          <a:p>
+            <a:r>
+              <a:t>TIME: 2 min</a:t>
+            </a:r>
+          </a:p>
+          <a:p/>
+          <a:p>
+            <a:r>
+              <a:t>OPEN WITH:</a:t>
+            </a:r>
+          </a:p>
+          <a:p>
+            <a:r>
+              <a:t>   I want to leave you with this. The tools are powerful. The frameworks are proven. But the reason your presentations will improve isn't because of Claude or PowerPoint. It's because you now have a structured way to think about executive communication. Claude just makes that thinking visible faster.</a:t>
+            </a:r>
+          </a:p>
+          <a:p/>
+          <a:p>
+            <a:r>
+              <a:t>KEY POINTS:</a:t>
+            </a:r>
+          </a:p>
+          <a:p>
+            <a:r>
+              <a:t>   * The frameworks we learned today pre-date AI by decades — they work because they're about human communication</a:t>
+            </a:r>
+          </a:p>
+          <a:p>
+            <a:r>
+              <a:t>   * Claude removes the friction between having a good idea and expressing it clearly</a:t>
+            </a:r>
+          </a:p>
+          <a:p>
+            <a:r>
+              <a:t>   * Your competitive advantage isn't the tool — it's knowing how to think about communication strategically</a:t>
+            </a:r>
+          </a:p>
+          <a:p>
+            <a:r>
+              <a:t>   * The best presenters aren't the ones with the prettiest slides — they're the ones with the clearest thinking</a:t>
+            </a:r>
+          </a:p>
+          <a:p/>
+          <a:p>
+            <a:r>
+              <a:t>TRANSITION:</a:t>
+            </a:r>
+          </a:p>
+          <a:p>
+            <a:r>
+              <a:t>   Thank you for four hours of focused work. Go build decks that change decisions.</a:t>
+            </a:r>
+          </a:p>
+        </p:txBody>
+      </p:sp>
+      <p:sp>
+        <p:nvSpPr>
+          <p:cNvPr id="4" name="Slide Number Placeholder 3"/>
+          <p:cNvSpPr>
+            <a:spLocks noGrp="1"/>
+          </p:cNvSpPr>
+          <p:nvPr>
+            <p:ph type="sldNum" idx="5" sz="quarter"/>
+          </p:nvPr>
+        </p:nvSpPr>
+        <p:spPr/>
+      </p:sp>
+    </p:spTree>
+  </p:cSld>
+  <p:clrMapOvr>
+    <a:masterClrMapping/>
+  </p:clrMapOvr>
+</p:notes>
+</file>
+
+<file path=ppt/notesSlides/notesSlide41.xml><?xml version="1.0" encoding="utf-8"?>
+<p:notes xmlns:a="http://schemas.openxmlformats.org/drawingml/2006/main" xmlns:p="http://schemas.openxmlformats.org/presentationml/2006/main" xmlns:r="http://schemas.openxmlformats.org/officeDocument/2006/relationships">
+  <p:cSld>
+    <p:spTree>
+      <p:nvGrpSpPr>
+        <p:cNvPr id="1" name=""/>
+        <p:cNvGrpSpPr/>
+        <p:nvPr/>
+      </p:nvGrpSpPr>
+      <p:grpSpPr>
+        <a:xfrm>
+          <a:off x="0" y="0"/>
+          <a:ext cx="0" cy="0"/>
+          <a:chOff x="0" y="0"/>
+          <a:chExt cx="0" cy="0"/>
+        </a:xfrm>
+      </p:grpSpPr>
+      <p:sp>
+        <p:nvSpPr>
+          <p:cNvPr id="2" name="Slide Image Placeholder 1"/>
+          <p:cNvSpPr>
+            <a:spLocks noGrp="1"/>
+          </p:cNvSpPr>
+          <p:nvPr>
+            <p:ph type="sldImg" idx="2"/>
+          </p:nvPr>
+        </p:nvSpPr>
+        <p:spPr/>
+      </p:sp>
+      <p:sp>
+        <p:nvSpPr>
+          <p:cNvPr id="3" name="Notes Placeholder 2"/>
+          <p:cNvSpPr>
+            <a:spLocks noGrp="1"/>
+          </p:cNvSpPr>
+          <p:nvPr>
+            <p:ph type="body" idx="3" sz="quarter"/>
+          </p:nvPr>
+        </p:nvSpPr>
+        <p:spPr/>
+        <p:txBody>
+          <a:bodyPr/>
+          <a:lstStyle/>
+          <a:p>
+            <a:r>
+              <a:t>TIME: 1 min</a:t>
+            </a:r>
+          </a:p>
+          <a:p/>
+          <a:p>
+            <a:r>
+              <a:t>OPEN WITH:</a:t>
+            </a:r>
+          </a:p>
+          <a:p>
+            <a:r>
+              <a:t>   That's a wrap on Session 3. You now have the frameworks, the tools, and the hands-on experience to build executive presentations in a fraction of the time. See you in Session 4.</a:t>
+            </a:r>
+          </a:p>
+          <a:p/>
+          <a:p>
+            <a:r>
+              <a:t>KEY POINTS:</a:t>
+            </a:r>
+          </a:p>
+          <a:p>
+            <a:r>
+              <a:t>   * Session 4 will cover advanced Claude workflows — multi-step analysis, team collaboration, and enterprise deployment</a:t>
+            </a:r>
+          </a:p>
+          <a:p>
+            <a:r>
+              <a:t>   * Take your lab deck and finish it this week — real practice cements the learning</a:t>
+            </a:r>
+          </a:p>
+          <a:p>
+            <a:r>
+              <a:t>   * Questions? I'm available after the session for one-on-one help.</a:t>
+            </a:r>
+          </a:p>
+        </p:txBody>
+      </p:sp>
+      <p:sp>
+        <p:nvSpPr>
+          <p:cNvPr id="4" name="Slide Number Placeholder 3"/>
+          <p:cNvSpPr>
+            <a:spLocks noGrp="1"/>
+          </p:cNvSpPr>
+          <p:nvPr>
+            <p:ph type="sldNum" idx="5" sz="quarter"/>
+          </p:nvPr>
+        </p:nvSpPr>
+        <p:spPr/>
+      </p:sp>
+    </p:spTree>
+  </p:cSld>
+  <p:clrMapOvr>
+    <a:masterClrMapping/>
+  </p:clrMapOvr>
+</p:notes>
+</file>
+
 <file path=ppt/notesSlides/notesSlide5.xml><?xml version="1.0" encoding="utf-8"?>
 <p:notes xmlns:a="http://schemas.openxmlformats.org/drawingml/2006/main" xmlns:p="http://schemas.openxmlformats.org/presentationml/2006/main" xmlns:r="http://schemas.openxmlformats.org/officeDocument/2006/relationships">
   <p:cSld>
@@ -4426,7 +4939,7 @@
           </a:p>
           <a:p>
             <a:r>
-              <a:t>   There are three distinct ways to use Claude for presentation work, and the best practitioners use all three depending on the task.</a:t>
+              <a:t>   There are three fundamental workflows for creating presentations with Claude, and knowing which one to use is half the battle.</a:t>
             </a:r>
           </a:p>
           <a:p/>
@@ -4437,38 +4950,44 @@
           </a:p>
           <a:p>
             <a:r>
-              <a:t>   * The PowerPoint sidebar is a Research Preview as of February 2026 — it's powered by Claude Opus and lives right inside PowerPoint</a:t>
-            </a:r>
-          </a:p>
-          <a:p>
-            <a:r>
-              <a:t>   * You can select slides, ask Claude to rewrite headlines, restructure content, generate new slides from a brief</a:t>
-            </a:r>
-          </a:p>
-          <a:p>
-            <a:r>
-              <a:t>   * Claude.ai artifacts let you draft full slide outlines, talking points, and structured content outside PowerPoint — great for strategic thinking</a:t>
-            </a:r>
-          </a:p>
-          <a:p>
-            <a:r>
-              <a:t>   * The hybrid workflow is the power move: think and structure in Claude.ai, then execute in PowerPoint with the sidebar</a:t>
-            </a:r>
-          </a:p>
-          <a:p>
-            <a:r>
-              <a:t>   * Most executives we train settle on the hybrid approach within a week</a:t>
+              <a:t>   * From Scratch is your fastest path. You describe what you need — audience, length, key topics, tone — and Claude generates a complete deck structure. This is perfect when you're starting from nothing and need momentum. The key insight: you're not starting from zero anymore, you're starting from 60 to 70 percent complete.</a:t>
+            </a:r>
+          </a:p>
+          <a:p>
+            <a:r>
+              <a:t>   * From Documents is the single most underrated workflow. If you already have content in a report, brief, email, or analysis — why recreate it? Upload the document and tell Claude to convert it into a presentation. A consulting client converted a 28-page strategy document into a 12-slide board presentation in under a minute. The traditional workflow would have been 2 to 3 hours minimum.</a:t>
+            </a:r>
+          </a:p>
+          <a:p>
+            <a:r>
+              <a:t>   * Slide-by-Slide is for high-stakes situations. Instead of generating everything at once, you build progressively with targeted prompts: 'Create an agenda slide for our digital transformation project,' then 'Add a slide showing top 3 benefits with supporting data,' then 'Add a timeline from Q1 to Q4.' You stay in control of the narrative while Claude handles the execution.</a:t>
             </a:r>
           </a:p>
           <a:p/>
           <a:p>
             <a:r>
+              <a:t>ASK THE CLASS:</a:t>
+            </a:r>
+          </a:p>
+          <a:p>
+            <a:r>
+              <a:t>   "Which of these three workflows matches how you typically create presentations? And which one would save you the most time?"</a:t>
+            </a:r>
+          </a:p>
+          <a:p>
+            <a:r>
+              <a:t>   [PAUSE for 30-60 seconds]</a:t>
+            </a:r>
+          </a:p>
+          <a:p/>
+          <a:p>
+            <a:r>
               <a:t>REAL-WORLD EXAMPLE:</a:t>
             </a:r>
           </a:p>
           <a:p>
             <a:r>
-              <a:t>   A consulting partner drafts the narrative arc in Claude.ai — 'Here's our situation, complication, and resolution for the board.' Then opens PowerPoint and uses the sidebar to generate slides that follow that structure. Total time: 45 minutes for a 20-slide deck.</a:t>
+              <a:t>   A presentation consultant tested all three methods on real client work. From Scratch saved 75 percent of creation time. From Documents was the biggest surprise — professionals who already have content in documents are recreating work that already exists. Slide-by-Slide was essential for a 12 million pound banking pitch where generic output would have been unacceptable.</a:t>
             </a:r>
           </a:p>
           <a:p/>
@@ -4479,7 +4998,7 @@
           </a:p>
           <a:p>
             <a:r>
-              <a:t>   Let's look at the PowerPoint sidebar in detail.</a:t>
+              <a:t>   Let's look at how Claude's PowerPoint integration works in practice.</a:t>
             </a:r>
           </a:p>
         </p:txBody>
@@ -13593,16 +14112,96 @@
       <p:grpSpPr/>
       <p:sp>
         <p:nvSpPr>
-          <p:cNvPr id="2" name="Rectangle 1"/>
+          <p:cNvPr id="2" name="TextBox 1"/>
+          <p:cNvSpPr txBox="1"/>
+          <p:nvPr/>
+        </p:nvSpPr>
+        <p:spPr>
+          <a:xfrm>
+            <a:off x="457200" y="731520"/>
+            <a:ext cx="11277295" cy="914400"/>
+          </a:xfrm>
+          <a:prstGeom prst="rect">
+            <a:avLst/>
+          </a:prstGeom>
+          <a:noFill/>
+        </p:spPr>
+        <p:txBody>
+          <a:bodyPr wrap="none">
+            <a:spAutoFit/>
+          </a:bodyPr>
+          <a:lstStyle/>
+          <a:p>
+            <a:pPr algn="ctr">
+              <a:defRPr sz="4000" b="1">
+                <a:solidFill>
+                  <a:srgbClr val="FFFFFF"/>
+                </a:solidFill>
+              </a:defRPr>
+            </a:pPr>
+            <a:r>
+              <a:t>Five AI Presentation Mistakes to Avoid</a:t>
+            </a:r>
+          </a:p>
+        </p:txBody>
+      </p:sp>
+      <p:sp>
+        <p:nvSpPr>
+          <p:cNvPr id="3" name="Rounded Rectangle 2"/>
           <p:cNvSpPr/>
           <p:nvPr/>
         </p:nvSpPr>
         <p:spPr>
           <a:xfrm>
-            <a:off x="0" y="1828800"/>
-            <a:ext cx="137160" cy="3200400"/>
-          </a:xfrm>
-          <a:prstGeom prst="rect">
+            <a:off x="2301087" y="2011680"/>
+            <a:ext cx="2286000" cy="3200400"/>
+          </a:xfrm>
+          <a:prstGeom prst="roundRect">
+            <a:avLst/>
+          </a:prstGeom>
+          <a:solidFill>
+            <a:srgbClr val="141A26"/>
+          </a:solidFill>
+          <a:ln w="25400">
+            <a:solidFill>
+              <a:srgbClr val="00D4AA"/>
+            </a:solidFill>
+          </a:ln>
+        </p:spPr>
+        <p:style>
+          <a:lnRef idx="1">
+            <a:schemeClr val="accent1"/>
+          </a:lnRef>
+          <a:fillRef idx="3">
+            <a:schemeClr val="accent1"/>
+          </a:fillRef>
+          <a:effectRef idx="2">
+            <a:schemeClr val="accent1"/>
+          </a:effectRef>
+          <a:fontRef idx="minor">
+            <a:schemeClr val="lt1"/>
+          </a:fontRef>
+        </p:style>
+        <p:txBody>
+          <a:bodyPr rtlCol="0" anchor="ctr"/>
+          <a:lstStyle/>
+          <a:p>
+            <a:pPr algn="ctr"/>
+          </a:p>
+        </p:txBody>
+      </p:sp>
+      <p:sp>
+        <p:nvSpPr>
+          <p:cNvPr id="4" name="Oval 3"/>
+          <p:cNvSpPr/>
+          <p:nvPr/>
+        </p:nvSpPr>
+        <p:spPr>
+          <a:xfrm>
+            <a:off x="2986887" y="2468880"/>
+            <a:ext cx="914400" cy="914400"/>
+          </a:xfrm>
+          <a:prstGeom prst="ellipse">
             <a:avLst/>
           </a:prstGeom>
           <a:solidFill>
@@ -13636,14 +14235,14 @@
       </p:sp>
       <p:sp>
         <p:nvSpPr>
-          <p:cNvPr id="3" name="TextBox 2"/>
+          <p:cNvPr id="5" name="TextBox 4"/>
           <p:cNvSpPr txBox="1"/>
           <p:nvPr/>
         </p:nvSpPr>
         <p:spPr>
           <a:xfrm>
-            <a:off x="457200" y="2286000"/>
-            <a:ext cx="11277295" cy="1371600"/>
+            <a:off x="2986887" y="2468880"/>
+            <a:ext cx="914400" cy="914400"/>
           </a:xfrm>
           <a:prstGeom prst="rect">
             <a:avLst/>
@@ -13651,34 +14250,154 @@
           <a:noFill/>
         </p:spPr>
         <p:txBody>
-          <a:bodyPr wrap="square">
+          <a:bodyPr wrap="none" anchor="ctr">
             <a:spAutoFit/>
           </a:bodyPr>
           <a:lstStyle/>
           <a:p>
-            <a:pPr>
-              <a:defRPr sz="5600" b="1">
+            <a:pPr algn="ctr">
+              <a:defRPr sz="3600" b="1">
+                <a:solidFill>
+                  <a:srgbClr val="0B0F1A"/>
+                </a:solidFill>
+              </a:defRPr>
+            </a:pPr>
+            <a:r>
+              <a:t>❌</a:t>
+            </a:r>
+          </a:p>
+        </p:txBody>
+      </p:sp>
+      <p:sp>
+        <p:nvSpPr>
+          <p:cNvPr id="6" name="TextBox 5"/>
+          <p:cNvSpPr txBox="1"/>
+          <p:nvPr/>
+        </p:nvSpPr>
+        <p:spPr>
+          <a:xfrm>
+            <a:off x="2392527" y="3657600"/>
+            <a:ext cx="2103120" cy="1371600"/>
+          </a:xfrm>
+          <a:prstGeom prst="rect">
+            <a:avLst/>
+          </a:prstGeom>
+          <a:noFill/>
+        </p:spPr>
+        <p:txBody>
+          <a:bodyPr wrap="square">
+            <a:normAutofit/>
+          </a:bodyPr>
+          <a:lstStyle/>
+          <a:p>
+            <a:pPr algn="ctr">
+              <a:defRPr sz="2000" b="1">
                 <a:solidFill>
                   <a:srgbClr val="FFFFFF"/>
                 </a:solidFill>
               </a:defRPr>
             </a:pPr>
-            <a:r>
-              <a:t>Refinement &amp; Messaging</a:t>
-            </a:r>
-          </a:p>
-        </p:txBody>
-      </p:sp>
-      <p:sp>
-        <p:nvSpPr>
-          <p:cNvPr id="4" name="TextBox 3"/>
+          </a:p>
+        </p:txBody>
+      </p:sp>
+      <p:sp>
+        <p:nvSpPr>
+          <p:cNvPr id="7" name="Rounded Rectangle 6"/>
+          <p:cNvSpPr/>
+          <p:nvPr/>
+        </p:nvSpPr>
+        <p:spPr>
+          <a:xfrm>
+            <a:off x="4952847" y="2011680"/>
+            <a:ext cx="2286000" cy="3200400"/>
+          </a:xfrm>
+          <a:prstGeom prst="roundRect">
+            <a:avLst/>
+          </a:prstGeom>
+          <a:solidFill>
+            <a:srgbClr val="141A26"/>
+          </a:solidFill>
+          <a:ln w="25400">
+            <a:solidFill>
+              <a:srgbClr val="00D4AA"/>
+            </a:solidFill>
+          </a:ln>
+        </p:spPr>
+        <p:style>
+          <a:lnRef idx="1">
+            <a:schemeClr val="accent1"/>
+          </a:lnRef>
+          <a:fillRef idx="3">
+            <a:schemeClr val="accent1"/>
+          </a:fillRef>
+          <a:effectRef idx="2">
+            <a:schemeClr val="accent1"/>
+          </a:effectRef>
+          <a:fontRef idx="minor">
+            <a:schemeClr val="lt1"/>
+          </a:fontRef>
+        </p:style>
+        <p:txBody>
+          <a:bodyPr rtlCol="0" anchor="ctr"/>
+          <a:lstStyle/>
+          <a:p>
+            <a:pPr algn="ctr"/>
+          </a:p>
+        </p:txBody>
+      </p:sp>
+      <p:sp>
+        <p:nvSpPr>
+          <p:cNvPr id="8" name="Oval 7"/>
+          <p:cNvSpPr/>
+          <p:nvPr/>
+        </p:nvSpPr>
+        <p:spPr>
+          <a:xfrm>
+            <a:off x="5638647" y="2468880"/>
+            <a:ext cx="914400" cy="914400"/>
+          </a:xfrm>
+          <a:prstGeom prst="ellipse">
+            <a:avLst/>
+          </a:prstGeom>
+          <a:solidFill>
+            <a:srgbClr val="00D4AA"/>
+          </a:solidFill>
+          <a:ln>
+            <a:noFill/>
+          </a:ln>
+        </p:spPr>
+        <p:style>
+          <a:lnRef idx="1">
+            <a:schemeClr val="accent1"/>
+          </a:lnRef>
+          <a:fillRef idx="3">
+            <a:schemeClr val="accent1"/>
+          </a:fillRef>
+          <a:effectRef idx="2">
+            <a:schemeClr val="accent1"/>
+          </a:effectRef>
+          <a:fontRef idx="minor">
+            <a:schemeClr val="lt1"/>
+          </a:fontRef>
+        </p:style>
+        <p:txBody>
+          <a:bodyPr rtlCol="0" anchor="ctr"/>
+          <a:lstStyle/>
+          <a:p>
+            <a:pPr algn="ctr"/>
+          </a:p>
+        </p:txBody>
+      </p:sp>
+      <p:sp>
+        <p:nvSpPr>
+          <p:cNvPr id="9" name="TextBox 8"/>
           <p:cNvSpPr txBox="1"/>
           <p:nvPr/>
         </p:nvSpPr>
         <p:spPr>
           <a:xfrm>
-            <a:off x="457200" y="3840480"/>
-            <a:ext cx="11277295" cy="914400"/>
+            <a:off x="5638647" y="2468880"/>
+            <a:ext cx="914400" cy="914400"/>
           </a:xfrm>
           <a:prstGeom prst="rect">
             <a:avLst/>
@@ -13686,21 +14405,208 @@
           <a:noFill/>
         </p:spPr>
         <p:txBody>
-          <a:bodyPr wrap="square">
+          <a:bodyPr wrap="none" anchor="ctr">
             <a:spAutoFit/>
           </a:bodyPr>
           <a:lstStyle/>
           <a:p>
-            <a:pPr>
-              <a:defRPr sz="2400">
+            <a:pPr algn="ctr">
+              <a:defRPr sz="3600" b="1">
                 <a:solidFill>
-                  <a:srgbClr val="8B95A5"/>
+                  <a:srgbClr val="0B0F1A"/>
                 </a:solidFill>
               </a:defRPr>
             </a:pPr>
             <a:r>
-              <a:t>Improving Clarity, Tone, and Strategic Framing</a:t>
-            </a:r>
+              <a:t>❌</a:t>
+            </a:r>
+          </a:p>
+        </p:txBody>
+      </p:sp>
+      <p:sp>
+        <p:nvSpPr>
+          <p:cNvPr id="10" name="TextBox 9"/>
+          <p:cNvSpPr txBox="1"/>
+          <p:nvPr/>
+        </p:nvSpPr>
+        <p:spPr>
+          <a:xfrm>
+            <a:off x="5044287" y="3657600"/>
+            <a:ext cx="2103120" cy="1371600"/>
+          </a:xfrm>
+          <a:prstGeom prst="rect">
+            <a:avLst/>
+          </a:prstGeom>
+          <a:noFill/>
+        </p:spPr>
+        <p:txBody>
+          <a:bodyPr wrap="square">
+            <a:normAutofit/>
+          </a:bodyPr>
+          <a:lstStyle/>
+          <a:p>
+            <a:pPr algn="ctr">
+              <a:defRPr sz="2000" b="1">
+                <a:solidFill>
+                  <a:srgbClr val="FFFFFF"/>
+                </a:solidFill>
+              </a:defRPr>
+            </a:pPr>
+          </a:p>
+        </p:txBody>
+      </p:sp>
+      <p:sp>
+        <p:nvSpPr>
+          <p:cNvPr id="11" name="Rounded Rectangle 10"/>
+          <p:cNvSpPr/>
+          <p:nvPr/>
+        </p:nvSpPr>
+        <p:spPr>
+          <a:xfrm>
+            <a:off x="7604607" y="2011680"/>
+            <a:ext cx="2286000" cy="3200400"/>
+          </a:xfrm>
+          <a:prstGeom prst="roundRect">
+            <a:avLst/>
+          </a:prstGeom>
+          <a:solidFill>
+            <a:srgbClr val="141A26"/>
+          </a:solidFill>
+          <a:ln w="25400">
+            <a:solidFill>
+              <a:srgbClr val="00D4AA"/>
+            </a:solidFill>
+          </a:ln>
+        </p:spPr>
+        <p:style>
+          <a:lnRef idx="1">
+            <a:schemeClr val="accent1"/>
+          </a:lnRef>
+          <a:fillRef idx="3">
+            <a:schemeClr val="accent1"/>
+          </a:fillRef>
+          <a:effectRef idx="2">
+            <a:schemeClr val="accent1"/>
+          </a:effectRef>
+          <a:fontRef idx="minor">
+            <a:schemeClr val="lt1"/>
+          </a:fontRef>
+        </p:style>
+        <p:txBody>
+          <a:bodyPr rtlCol="0" anchor="ctr"/>
+          <a:lstStyle/>
+          <a:p>
+            <a:pPr algn="ctr"/>
+          </a:p>
+        </p:txBody>
+      </p:sp>
+      <p:sp>
+        <p:nvSpPr>
+          <p:cNvPr id="12" name="Oval 11"/>
+          <p:cNvSpPr/>
+          <p:nvPr/>
+        </p:nvSpPr>
+        <p:spPr>
+          <a:xfrm>
+            <a:off x="8290407" y="2468880"/>
+            <a:ext cx="914400" cy="914400"/>
+          </a:xfrm>
+          <a:prstGeom prst="ellipse">
+            <a:avLst/>
+          </a:prstGeom>
+          <a:solidFill>
+            <a:srgbClr val="00D4AA"/>
+          </a:solidFill>
+          <a:ln>
+            <a:noFill/>
+          </a:ln>
+        </p:spPr>
+        <p:style>
+          <a:lnRef idx="1">
+            <a:schemeClr val="accent1"/>
+          </a:lnRef>
+          <a:fillRef idx="3">
+            <a:schemeClr val="accent1"/>
+          </a:fillRef>
+          <a:effectRef idx="2">
+            <a:schemeClr val="accent1"/>
+          </a:effectRef>
+          <a:fontRef idx="minor">
+            <a:schemeClr val="lt1"/>
+          </a:fontRef>
+        </p:style>
+        <p:txBody>
+          <a:bodyPr rtlCol="0" anchor="ctr"/>
+          <a:lstStyle/>
+          <a:p>
+            <a:pPr algn="ctr"/>
+          </a:p>
+        </p:txBody>
+      </p:sp>
+      <p:sp>
+        <p:nvSpPr>
+          <p:cNvPr id="13" name="TextBox 12"/>
+          <p:cNvSpPr txBox="1"/>
+          <p:nvPr/>
+        </p:nvSpPr>
+        <p:spPr>
+          <a:xfrm>
+            <a:off x="8290407" y="2468880"/>
+            <a:ext cx="914400" cy="914400"/>
+          </a:xfrm>
+          <a:prstGeom prst="rect">
+            <a:avLst/>
+          </a:prstGeom>
+          <a:noFill/>
+        </p:spPr>
+        <p:txBody>
+          <a:bodyPr wrap="none" anchor="ctr">
+            <a:spAutoFit/>
+          </a:bodyPr>
+          <a:lstStyle/>
+          <a:p>
+            <a:pPr algn="ctr">
+              <a:defRPr sz="3600" b="1">
+                <a:solidFill>
+                  <a:srgbClr val="0B0F1A"/>
+                </a:solidFill>
+              </a:defRPr>
+            </a:pPr>
+            <a:r>
+              <a:t>❌</a:t>
+            </a:r>
+          </a:p>
+        </p:txBody>
+      </p:sp>
+      <p:sp>
+        <p:nvSpPr>
+          <p:cNvPr id="14" name="TextBox 13"/>
+          <p:cNvSpPr txBox="1"/>
+          <p:nvPr/>
+        </p:nvSpPr>
+        <p:spPr>
+          <a:xfrm>
+            <a:off x="7696047" y="3657600"/>
+            <a:ext cx="2103120" cy="1371600"/>
+          </a:xfrm>
+          <a:prstGeom prst="rect">
+            <a:avLst/>
+          </a:prstGeom>
+          <a:noFill/>
+        </p:spPr>
+        <p:txBody>
+          <a:bodyPr wrap="square">
+            <a:normAutofit/>
+          </a:bodyPr>
+          <a:lstStyle/>
+          <a:p>
+            <a:pPr algn="ctr">
+              <a:defRPr sz="2000" b="1">
+                <a:solidFill>
+                  <a:srgbClr val="FFFFFF"/>
+                </a:solidFill>
+              </a:defRPr>
+            </a:pPr>
           </a:p>
         </p:txBody>
       </p:sp>
@@ -13738,8 +14644,8 @@
         </p:nvSpPr>
         <p:spPr>
           <a:xfrm>
-            <a:off x="457200" y="731520"/>
-            <a:ext cx="11277295" cy="914400"/>
+            <a:off x="457200" y="365760"/>
+            <a:ext cx="11277295" cy="731520"/>
           </a:xfrm>
           <a:prstGeom prst="rect">
             <a:avLst/>
@@ -13753,14 +14659,14 @@
           <a:lstStyle/>
           <a:p>
             <a:pPr algn="ctr">
-              <a:defRPr sz="4000" b="1">
+              <a:defRPr sz="3600" b="1">
                 <a:solidFill>
                   <a:srgbClr val="FFFFFF"/>
                 </a:solidFill>
               </a:defRPr>
             </a:pPr>
             <a:r>
-              <a:t>Audience-Specific Framing</a:t>
+              <a:t>The 25-Minute Deck: A Proven Workflow</a:t>
             </a:r>
           </a:p>
         </p:txBody>
@@ -13773,163 +14679,8 @@
         </p:nvSpPr>
         <p:spPr>
           <a:xfrm>
-            <a:off x="2301087" y="2011680"/>
-            <a:ext cx="2286000" cy="3200400"/>
-          </a:xfrm>
-          <a:prstGeom prst="roundRect">
-            <a:avLst/>
-          </a:prstGeom>
-          <a:solidFill>
-            <a:srgbClr val="141A26"/>
-          </a:solidFill>
-          <a:ln w="25400">
-            <a:solidFill>
-              <a:srgbClr val="E86B4A"/>
-            </a:solidFill>
-          </a:ln>
-        </p:spPr>
-        <p:style>
-          <a:lnRef idx="1">
-            <a:schemeClr val="accent1"/>
-          </a:lnRef>
-          <a:fillRef idx="3">
-            <a:schemeClr val="accent1"/>
-          </a:fillRef>
-          <a:effectRef idx="2">
-            <a:schemeClr val="accent1"/>
-          </a:effectRef>
-          <a:fontRef idx="minor">
-            <a:schemeClr val="lt1"/>
-          </a:fontRef>
-        </p:style>
-        <p:txBody>
-          <a:bodyPr rtlCol="0" anchor="ctr"/>
-          <a:lstStyle/>
-          <a:p>
-            <a:pPr algn="ctr"/>
-          </a:p>
-        </p:txBody>
-      </p:sp>
-      <p:sp>
-        <p:nvSpPr>
-          <p:cNvPr id="4" name="Oval 3"/>
-          <p:cNvSpPr/>
-          <p:nvPr/>
-        </p:nvSpPr>
-        <p:spPr>
-          <a:xfrm>
-            <a:off x="2986887" y="2468880"/>
-            <a:ext cx="914400" cy="914400"/>
-          </a:xfrm>
-          <a:prstGeom prst="ellipse">
-            <a:avLst/>
-          </a:prstGeom>
-          <a:solidFill>
-            <a:srgbClr val="E86B4A"/>
-          </a:solidFill>
-          <a:ln>
-            <a:noFill/>
-          </a:ln>
-        </p:spPr>
-        <p:style>
-          <a:lnRef idx="1">
-            <a:schemeClr val="accent1"/>
-          </a:lnRef>
-          <a:fillRef idx="3">
-            <a:schemeClr val="accent1"/>
-          </a:fillRef>
-          <a:effectRef idx="2">
-            <a:schemeClr val="accent1"/>
-          </a:effectRef>
-          <a:fontRef idx="minor">
-            <a:schemeClr val="lt1"/>
-          </a:fontRef>
-        </p:style>
-        <p:txBody>
-          <a:bodyPr rtlCol="0" anchor="ctr"/>
-          <a:lstStyle/>
-          <a:p>
-            <a:pPr algn="ctr"/>
-          </a:p>
-        </p:txBody>
-      </p:sp>
-      <p:sp>
-        <p:nvSpPr>
-          <p:cNvPr id="5" name="TextBox 4"/>
-          <p:cNvSpPr txBox="1"/>
-          <p:nvPr/>
-        </p:nvSpPr>
-        <p:spPr>
-          <a:xfrm>
-            <a:off x="2986887" y="2468880"/>
-            <a:ext cx="914400" cy="914400"/>
-          </a:xfrm>
-          <a:prstGeom prst="rect">
-            <a:avLst/>
-          </a:prstGeom>
-          <a:noFill/>
-        </p:spPr>
-        <p:txBody>
-          <a:bodyPr wrap="none" anchor="ctr">
-            <a:spAutoFit/>
-          </a:bodyPr>
-          <a:lstStyle/>
-          <a:p>
-            <a:pPr algn="ctr">
-              <a:defRPr sz="3600" b="1">
-                <a:solidFill>
-                  <a:srgbClr val="0B0F1A"/>
-                </a:solidFill>
-              </a:defRPr>
-            </a:pPr>
-            <a:r>
-              <a:t>👔</a:t>
-            </a:r>
-          </a:p>
-        </p:txBody>
-      </p:sp>
-      <p:sp>
-        <p:nvSpPr>
-          <p:cNvPr id="6" name="TextBox 5"/>
-          <p:cNvSpPr txBox="1"/>
-          <p:nvPr/>
-        </p:nvSpPr>
-        <p:spPr>
-          <a:xfrm>
-            <a:off x="2392527" y="3657600"/>
-            <a:ext cx="2103120" cy="1371600"/>
-          </a:xfrm>
-          <a:prstGeom prst="rect">
-            <a:avLst/>
-          </a:prstGeom>
-          <a:noFill/>
-        </p:spPr>
-        <p:txBody>
-          <a:bodyPr wrap="square">
-            <a:normAutofit/>
-          </a:bodyPr>
-          <a:lstStyle/>
-          <a:p>
-            <a:pPr algn="ctr">
-              <a:defRPr sz="2000" b="1">
-                <a:solidFill>
-                  <a:srgbClr val="FFFFFF"/>
-                </a:solidFill>
-              </a:defRPr>
-            </a:pPr>
-          </a:p>
-        </p:txBody>
-      </p:sp>
-      <p:sp>
-        <p:nvSpPr>
-          <p:cNvPr id="7" name="Rounded Rectangle 6"/>
-          <p:cNvSpPr/>
-          <p:nvPr/>
-        </p:nvSpPr>
-        <p:spPr>
-          <a:xfrm>
-            <a:off x="4952847" y="2011680"/>
-            <a:ext cx="2286000" cy="3200400"/>
+            <a:off x="2941167" y="1371600"/>
+            <a:ext cx="822960" cy="822960"/>
           </a:xfrm>
           <a:prstGeom prst="roundRect">
             <a:avLst/>
@@ -13967,14 +14718,14 @@
       </p:sp>
       <p:sp>
         <p:nvSpPr>
-          <p:cNvPr id="8" name="Oval 7"/>
+          <p:cNvPr id="4" name="Oval 3"/>
           <p:cNvSpPr/>
           <p:nvPr/>
         </p:nvSpPr>
         <p:spPr>
           <a:xfrm>
-            <a:off x="5638647" y="2468880"/>
-            <a:ext cx="914400" cy="914400"/>
+            <a:off x="3604107" y="1211580"/>
+            <a:ext cx="320040" cy="320040"/>
           </a:xfrm>
           <a:prstGeom prst="ellipse">
             <a:avLst/>
@@ -14010,14 +14761,14 @@
       </p:sp>
       <p:sp>
         <p:nvSpPr>
-          <p:cNvPr id="9" name="TextBox 8"/>
+          <p:cNvPr id="5" name="TextBox 4"/>
           <p:cNvSpPr txBox="1"/>
           <p:nvPr/>
         </p:nvSpPr>
         <p:spPr>
           <a:xfrm>
-            <a:off x="5638647" y="2468880"/>
-            <a:ext cx="914400" cy="914400"/>
+            <a:off x="3604107" y="1211580"/>
+            <a:ext cx="320040" cy="320040"/>
           </a:xfrm>
           <a:prstGeom prst="rect">
             <a:avLst/>
@@ -14031,28 +14782,159 @@
           <a:lstStyle/>
           <a:p>
             <a:pPr algn="ctr">
-              <a:defRPr sz="3600" b="1">
+              <a:defRPr sz="1400" b="1">
                 <a:solidFill>
                   <a:srgbClr val="0B0F1A"/>
                 </a:solidFill>
               </a:defRPr>
             </a:pPr>
             <a:r>
-              <a:t>📋</a:t>
-            </a:r>
-          </a:p>
-        </p:txBody>
-      </p:sp>
-      <p:sp>
-        <p:nvSpPr>
-          <p:cNvPr id="10" name="TextBox 9"/>
+              <a:t>1</a:t>
+            </a:r>
+          </a:p>
+        </p:txBody>
+      </p:sp>
+      <p:sp>
+        <p:nvSpPr>
+          <p:cNvPr id="6" name="Right Arrow 5"/>
+          <p:cNvSpPr/>
+          <p:nvPr/>
+        </p:nvSpPr>
+        <p:spPr>
+          <a:xfrm>
+            <a:off x="3855567" y="1645920"/>
+            <a:ext cx="365760" cy="274320"/>
+          </a:xfrm>
+          <a:prstGeom prst="rightArrow">
+            <a:avLst/>
+          </a:prstGeom>
+          <a:solidFill>
+            <a:srgbClr val="8B95A5"/>
+          </a:solidFill>
+          <a:ln>
+            <a:noFill/>
+          </a:ln>
+        </p:spPr>
+        <p:style>
+          <a:lnRef idx="1">
+            <a:schemeClr val="accent1"/>
+          </a:lnRef>
+          <a:fillRef idx="3">
+            <a:schemeClr val="accent1"/>
+          </a:fillRef>
+          <a:effectRef idx="2">
+            <a:schemeClr val="accent1"/>
+          </a:effectRef>
+          <a:fontRef idx="minor">
+            <a:schemeClr val="lt1"/>
+          </a:fontRef>
+        </p:style>
+        <p:txBody>
+          <a:bodyPr rtlCol="0" anchor="ctr"/>
+          <a:lstStyle/>
+          <a:p>
+            <a:pPr algn="ctr"/>
+          </a:p>
+        </p:txBody>
+      </p:sp>
+      <p:sp>
+        <p:nvSpPr>
+          <p:cNvPr id="7" name="Rounded Rectangle 6"/>
+          <p:cNvSpPr/>
+          <p:nvPr/>
+        </p:nvSpPr>
+        <p:spPr>
+          <a:xfrm>
+            <a:off x="4312767" y="1371600"/>
+            <a:ext cx="822960" cy="822960"/>
+          </a:xfrm>
+          <a:prstGeom prst="roundRect">
+            <a:avLst/>
+          </a:prstGeom>
+          <a:solidFill>
+            <a:srgbClr val="141A26"/>
+          </a:solidFill>
+          <a:ln w="25400">
+            <a:solidFill>
+              <a:srgbClr val="00D4AA"/>
+            </a:solidFill>
+          </a:ln>
+        </p:spPr>
+        <p:style>
+          <a:lnRef idx="1">
+            <a:schemeClr val="accent1"/>
+          </a:lnRef>
+          <a:fillRef idx="3">
+            <a:schemeClr val="accent1"/>
+          </a:fillRef>
+          <a:effectRef idx="2">
+            <a:schemeClr val="accent1"/>
+          </a:effectRef>
+          <a:fontRef idx="minor">
+            <a:schemeClr val="lt1"/>
+          </a:fontRef>
+        </p:style>
+        <p:txBody>
+          <a:bodyPr rtlCol="0" anchor="ctr"/>
+          <a:lstStyle/>
+          <a:p>
+            <a:pPr algn="ctr"/>
+          </a:p>
+        </p:txBody>
+      </p:sp>
+      <p:sp>
+        <p:nvSpPr>
+          <p:cNvPr id="8" name="Oval 7"/>
+          <p:cNvSpPr/>
+          <p:nvPr/>
+        </p:nvSpPr>
+        <p:spPr>
+          <a:xfrm>
+            <a:off x="4975707" y="1211580"/>
+            <a:ext cx="320040" cy="320040"/>
+          </a:xfrm>
+          <a:prstGeom prst="ellipse">
+            <a:avLst/>
+          </a:prstGeom>
+          <a:solidFill>
+            <a:srgbClr val="00D4AA"/>
+          </a:solidFill>
+          <a:ln>
+            <a:noFill/>
+          </a:ln>
+        </p:spPr>
+        <p:style>
+          <a:lnRef idx="1">
+            <a:schemeClr val="accent1"/>
+          </a:lnRef>
+          <a:fillRef idx="3">
+            <a:schemeClr val="accent1"/>
+          </a:fillRef>
+          <a:effectRef idx="2">
+            <a:schemeClr val="accent1"/>
+          </a:effectRef>
+          <a:fontRef idx="minor">
+            <a:schemeClr val="lt1"/>
+          </a:fontRef>
+        </p:style>
+        <p:txBody>
+          <a:bodyPr rtlCol="0" anchor="ctr"/>
+          <a:lstStyle/>
+          <a:p>
+            <a:pPr algn="ctr"/>
+          </a:p>
+        </p:txBody>
+      </p:sp>
+      <p:sp>
+        <p:nvSpPr>
+          <p:cNvPr id="9" name="TextBox 8"/>
           <p:cNvSpPr txBox="1"/>
           <p:nvPr/>
         </p:nvSpPr>
         <p:spPr>
           <a:xfrm>
-            <a:off x="5044287" y="3657600"/>
-            <a:ext cx="2103120" cy="1371600"/>
+            <a:off x="4975707" y="1211580"/>
+            <a:ext cx="320040" cy="320040"/>
           </a:xfrm>
           <a:prstGeom prst="rect">
             <a:avLst/>
@@ -14060,119 +14942,602 @@
           <a:noFill/>
         </p:spPr>
         <p:txBody>
+          <a:bodyPr wrap="none" anchor="ctr">
+            <a:spAutoFit/>
+          </a:bodyPr>
+          <a:lstStyle/>
+          <a:p>
+            <a:pPr algn="ctr">
+              <a:defRPr sz="1400" b="1">
+                <a:solidFill>
+                  <a:srgbClr val="0B0F1A"/>
+                </a:solidFill>
+              </a:defRPr>
+            </a:pPr>
+            <a:r>
+              <a:t>2</a:t>
+            </a:r>
+          </a:p>
+        </p:txBody>
+      </p:sp>
+      <p:sp>
+        <p:nvSpPr>
+          <p:cNvPr id="10" name="Right Arrow 9"/>
+          <p:cNvSpPr/>
+          <p:nvPr/>
+        </p:nvSpPr>
+        <p:spPr>
+          <a:xfrm>
+            <a:off x="5227167" y="1645920"/>
+            <a:ext cx="365760" cy="274320"/>
+          </a:xfrm>
+          <a:prstGeom prst="rightArrow">
+            <a:avLst/>
+          </a:prstGeom>
+          <a:solidFill>
+            <a:srgbClr val="8B95A5"/>
+          </a:solidFill>
+          <a:ln>
+            <a:noFill/>
+          </a:ln>
+        </p:spPr>
+        <p:style>
+          <a:lnRef idx="1">
+            <a:schemeClr val="accent1"/>
+          </a:lnRef>
+          <a:fillRef idx="3">
+            <a:schemeClr val="accent1"/>
+          </a:fillRef>
+          <a:effectRef idx="2">
+            <a:schemeClr val="accent1"/>
+          </a:effectRef>
+          <a:fontRef idx="minor">
+            <a:schemeClr val="lt1"/>
+          </a:fontRef>
+        </p:style>
+        <p:txBody>
+          <a:bodyPr rtlCol="0" anchor="ctr"/>
+          <a:lstStyle/>
+          <a:p>
+            <a:pPr algn="ctr"/>
+          </a:p>
+        </p:txBody>
+      </p:sp>
+      <p:sp>
+        <p:nvSpPr>
+          <p:cNvPr id="11" name="Rounded Rectangle 10"/>
+          <p:cNvSpPr/>
+          <p:nvPr/>
+        </p:nvSpPr>
+        <p:spPr>
+          <a:xfrm>
+            <a:off x="5684367" y="1371600"/>
+            <a:ext cx="822960" cy="822960"/>
+          </a:xfrm>
+          <a:prstGeom prst="roundRect">
+            <a:avLst/>
+          </a:prstGeom>
+          <a:solidFill>
+            <a:srgbClr val="141A26"/>
+          </a:solidFill>
+          <a:ln w="25400">
+            <a:solidFill>
+              <a:srgbClr val="00D4AA"/>
+            </a:solidFill>
+          </a:ln>
+        </p:spPr>
+        <p:style>
+          <a:lnRef idx="1">
+            <a:schemeClr val="accent1"/>
+          </a:lnRef>
+          <a:fillRef idx="3">
+            <a:schemeClr val="accent1"/>
+          </a:fillRef>
+          <a:effectRef idx="2">
+            <a:schemeClr val="accent1"/>
+          </a:effectRef>
+          <a:fontRef idx="minor">
+            <a:schemeClr val="lt1"/>
+          </a:fontRef>
+        </p:style>
+        <p:txBody>
+          <a:bodyPr rtlCol="0" anchor="ctr"/>
+          <a:lstStyle/>
+          <a:p>
+            <a:pPr algn="ctr"/>
+          </a:p>
+        </p:txBody>
+      </p:sp>
+      <p:sp>
+        <p:nvSpPr>
+          <p:cNvPr id="12" name="Oval 11"/>
+          <p:cNvSpPr/>
+          <p:nvPr/>
+        </p:nvSpPr>
+        <p:spPr>
+          <a:xfrm>
+            <a:off x="6347307" y="1211580"/>
+            <a:ext cx="320040" cy="320040"/>
+          </a:xfrm>
+          <a:prstGeom prst="ellipse">
+            <a:avLst/>
+          </a:prstGeom>
+          <a:solidFill>
+            <a:srgbClr val="00D4AA"/>
+          </a:solidFill>
+          <a:ln>
+            <a:noFill/>
+          </a:ln>
+        </p:spPr>
+        <p:style>
+          <a:lnRef idx="1">
+            <a:schemeClr val="accent1"/>
+          </a:lnRef>
+          <a:fillRef idx="3">
+            <a:schemeClr val="accent1"/>
+          </a:fillRef>
+          <a:effectRef idx="2">
+            <a:schemeClr val="accent1"/>
+          </a:effectRef>
+          <a:fontRef idx="minor">
+            <a:schemeClr val="lt1"/>
+          </a:fontRef>
+        </p:style>
+        <p:txBody>
+          <a:bodyPr rtlCol="0" anchor="ctr"/>
+          <a:lstStyle/>
+          <a:p>
+            <a:pPr algn="ctr"/>
+          </a:p>
+        </p:txBody>
+      </p:sp>
+      <p:sp>
+        <p:nvSpPr>
+          <p:cNvPr id="13" name="TextBox 12"/>
+          <p:cNvSpPr txBox="1"/>
+          <p:nvPr/>
+        </p:nvSpPr>
+        <p:spPr>
+          <a:xfrm>
+            <a:off x="6347307" y="1211580"/>
+            <a:ext cx="320040" cy="320040"/>
+          </a:xfrm>
+          <a:prstGeom prst="rect">
+            <a:avLst/>
+          </a:prstGeom>
+          <a:noFill/>
+        </p:spPr>
+        <p:txBody>
+          <a:bodyPr wrap="none" anchor="ctr">
+            <a:spAutoFit/>
+          </a:bodyPr>
+          <a:lstStyle/>
+          <a:p>
+            <a:pPr algn="ctr">
+              <a:defRPr sz="1400" b="1">
+                <a:solidFill>
+                  <a:srgbClr val="0B0F1A"/>
+                </a:solidFill>
+              </a:defRPr>
+            </a:pPr>
+            <a:r>
+              <a:t>3</a:t>
+            </a:r>
+          </a:p>
+        </p:txBody>
+      </p:sp>
+      <p:sp>
+        <p:nvSpPr>
+          <p:cNvPr id="14" name="Right Arrow 13"/>
+          <p:cNvSpPr/>
+          <p:nvPr/>
+        </p:nvSpPr>
+        <p:spPr>
+          <a:xfrm>
+            <a:off x="6598767" y="1645920"/>
+            <a:ext cx="365760" cy="274320"/>
+          </a:xfrm>
+          <a:prstGeom prst="rightArrow">
+            <a:avLst/>
+          </a:prstGeom>
+          <a:solidFill>
+            <a:srgbClr val="8B95A5"/>
+          </a:solidFill>
+          <a:ln>
+            <a:noFill/>
+          </a:ln>
+        </p:spPr>
+        <p:style>
+          <a:lnRef idx="1">
+            <a:schemeClr val="accent1"/>
+          </a:lnRef>
+          <a:fillRef idx="3">
+            <a:schemeClr val="accent1"/>
+          </a:fillRef>
+          <a:effectRef idx="2">
+            <a:schemeClr val="accent1"/>
+          </a:effectRef>
+          <a:fontRef idx="minor">
+            <a:schemeClr val="lt1"/>
+          </a:fontRef>
+        </p:style>
+        <p:txBody>
+          <a:bodyPr rtlCol="0" anchor="ctr"/>
+          <a:lstStyle/>
+          <a:p>
+            <a:pPr algn="ctr"/>
+          </a:p>
+        </p:txBody>
+      </p:sp>
+      <p:sp>
+        <p:nvSpPr>
+          <p:cNvPr id="15" name="Rounded Rectangle 14"/>
+          <p:cNvSpPr/>
+          <p:nvPr/>
+        </p:nvSpPr>
+        <p:spPr>
+          <a:xfrm>
+            <a:off x="7055967" y="1371600"/>
+            <a:ext cx="822960" cy="822960"/>
+          </a:xfrm>
+          <a:prstGeom prst="roundRect">
+            <a:avLst/>
+          </a:prstGeom>
+          <a:solidFill>
+            <a:srgbClr val="141A26"/>
+          </a:solidFill>
+          <a:ln w="25400">
+            <a:solidFill>
+              <a:srgbClr val="00D4AA"/>
+            </a:solidFill>
+          </a:ln>
+        </p:spPr>
+        <p:style>
+          <a:lnRef idx="1">
+            <a:schemeClr val="accent1"/>
+          </a:lnRef>
+          <a:fillRef idx="3">
+            <a:schemeClr val="accent1"/>
+          </a:fillRef>
+          <a:effectRef idx="2">
+            <a:schemeClr val="accent1"/>
+          </a:effectRef>
+          <a:fontRef idx="minor">
+            <a:schemeClr val="lt1"/>
+          </a:fontRef>
+        </p:style>
+        <p:txBody>
+          <a:bodyPr rtlCol="0" anchor="ctr"/>
+          <a:lstStyle/>
+          <a:p>
+            <a:pPr algn="ctr"/>
+          </a:p>
+        </p:txBody>
+      </p:sp>
+      <p:sp>
+        <p:nvSpPr>
+          <p:cNvPr id="16" name="Oval 15"/>
+          <p:cNvSpPr/>
+          <p:nvPr/>
+        </p:nvSpPr>
+        <p:spPr>
+          <a:xfrm>
+            <a:off x="7718907" y="1211580"/>
+            <a:ext cx="320040" cy="320040"/>
+          </a:xfrm>
+          <a:prstGeom prst="ellipse">
+            <a:avLst/>
+          </a:prstGeom>
+          <a:solidFill>
+            <a:srgbClr val="00D4AA"/>
+          </a:solidFill>
+          <a:ln>
+            <a:noFill/>
+          </a:ln>
+        </p:spPr>
+        <p:style>
+          <a:lnRef idx="1">
+            <a:schemeClr val="accent1"/>
+          </a:lnRef>
+          <a:fillRef idx="3">
+            <a:schemeClr val="accent1"/>
+          </a:fillRef>
+          <a:effectRef idx="2">
+            <a:schemeClr val="accent1"/>
+          </a:effectRef>
+          <a:fontRef idx="minor">
+            <a:schemeClr val="lt1"/>
+          </a:fontRef>
+        </p:style>
+        <p:txBody>
+          <a:bodyPr rtlCol="0" anchor="ctr"/>
+          <a:lstStyle/>
+          <a:p>
+            <a:pPr algn="ctr"/>
+          </a:p>
+        </p:txBody>
+      </p:sp>
+      <p:sp>
+        <p:nvSpPr>
+          <p:cNvPr id="17" name="TextBox 16"/>
+          <p:cNvSpPr txBox="1"/>
+          <p:nvPr/>
+        </p:nvSpPr>
+        <p:spPr>
+          <a:xfrm>
+            <a:off x="7718907" y="1211580"/>
+            <a:ext cx="320040" cy="320040"/>
+          </a:xfrm>
+          <a:prstGeom prst="rect">
+            <a:avLst/>
+          </a:prstGeom>
+          <a:noFill/>
+        </p:spPr>
+        <p:txBody>
+          <a:bodyPr wrap="none" anchor="ctr">
+            <a:spAutoFit/>
+          </a:bodyPr>
+          <a:lstStyle/>
+          <a:p>
+            <a:pPr algn="ctr">
+              <a:defRPr sz="1400" b="1">
+                <a:solidFill>
+                  <a:srgbClr val="0B0F1A"/>
+                </a:solidFill>
+              </a:defRPr>
+            </a:pPr>
+            <a:r>
+              <a:t>4</a:t>
+            </a:r>
+          </a:p>
+        </p:txBody>
+      </p:sp>
+      <p:sp>
+        <p:nvSpPr>
+          <p:cNvPr id="18" name="Right Arrow 17"/>
+          <p:cNvSpPr/>
+          <p:nvPr/>
+        </p:nvSpPr>
+        <p:spPr>
+          <a:xfrm>
+            <a:off x="7970367" y="1645920"/>
+            <a:ext cx="365760" cy="274320"/>
+          </a:xfrm>
+          <a:prstGeom prst="rightArrow">
+            <a:avLst/>
+          </a:prstGeom>
+          <a:solidFill>
+            <a:srgbClr val="8B95A5"/>
+          </a:solidFill>
+          <a:ln>
+            <a:noFill/>
+          </a:ln>
+        </p:spPr>
+        <p:style>
+          <a:lnRef idx="1">
+            <a:schemeClr val="accent1"/>
+          </a:lnRef>
+          <a:fillRef idx="3">
+            <a:schemeClr val="accent1"/>
+          </a:fillRef>
+          <a:effectRef idx="2">
+            <a:schemeClr val="accent1"/>
+          </a:effectRef>
+          <a:fontRef idx="minor">
+            <a:schemeClr val="lt1"/>
+          </a:fontRef>
+        </p:style>
+        <p:txBody>
+          <a:bodyPr rtlCol="0" anchor="ctr"/>
+          <a:lstStyle/>
+          <a:p>
+            <a:pPr algn="ctr"/>
+          </a:p>
+        </p:txBody>
+      </p:sp>
+      <p:sp>
+        <p:nvSpPr>
+          <p:cNvPr id="19" name="Rounded Rectangle 18"/>
+          <p:cNvSpPr/>
+          <p:nvPr/>
+        </p:nvSpPr>
+        <p:spPr>
+          <a:xfrm>
+            <a:off x="8427567" y="1371600"/>
+            <a:ext cx="822960" cy="822960"/>
+          </a:xfrm>
+          <a:prstGeom prst="roundRect">
+            <a:avLst/>
+          </a:prstGeom>
+          <a:solidFill>
+            <a:srgbClr val="141A26"/>
+          </a:solidFill>
+          <a:ln w="25400">
+            <a:solidFill>
+              <a:srgbClr val="00D4AA"/>
+            </a:solidFill>
+          </a:ln>
+        </p:spPr>
+        <p:style>
+          <a:lnRef idx="1">
+            <a:schemeClr val="accent1"/>
+          </a:lnRef>
+          <a:fillRef idx="3">
+            <a:schemeClr val="accent1"/>
+          </a:fillRef>
+          <a:effectRef idx="2">
+            <a:schemeClr val="accent1"/>
+          </a:effectRef>
+          <a:fontRef idx="minor">
+            <a:schemeClr val="lt1"/>
+          </a:fontRef>
+        </p:style>
+        <p:txBody>
+          <a:bodyPr rtlCol="0" anchor="ctr"/>
+          <a:lstStyle/>
+          <a:p>
+            <a:pPr algn="ctr"/>
+          </a:p>
+        </p:txBody>
+      </p:sp>
+      <p:sp>
+        <p:nvSpPr>
+          <p:cNvPr id="20" name="Oval 19"/>
+          <p:cNvSpPr/>
+          <p:nvPr/>
+        </p:nvSpPr>
+        <p:spPr>
+          <a:xfrm>
+            <a:off x="9090507" y="1211580"/>
+            <a:ext cx="320040" cy="320040"/>
+          </a:xfrm>
+          <a:prstGeom prst="ellipse">
+            <a:avLst/>
+          </a:prstGeom>
+          <a:solidFill>
+            <a:srgbClr val="00D4AA"/>
+          </a:solidFill>
+          <a:ln>
+            <a:noFill/>
+          </a:ln>
+        </p:spPr>
+        <p:style>
+          <a:lnRef idx="1">
+            <a:schemeClr val="accent1"/>
+          </a:lnRef>
+          <a:fillRef idx="3">
+            <a:schemeClr val="accent1"/>
+          </a:fillRef>
+          <a:effectRef idx="2">
+            <a:schemeClr val="accent1"/>
+          </a:effectRef>
+          <a:fontRef idx="minor">
+            <a:schemeClr val="lt1"/>
+          </a:fontRef>
+        </p:style>
+        <p:txBody>
+          <a:bodyPr rtlCol="0" anchor="ctr"/>
+          <a:lstStyle/>
+          <a:p>
+            <a:pPr algn="ctr"/>
+          </a:p>
+        </p:txBody>
+      </p:sp>
+      <p:sp>
+        <p:nvSpPr>
+          <p:cNvPr id="21" name="TextBox 20"/>
+          <p:cNvSpPr txBox="1"/>
+          <p:nvPr/>
+        </p:nvSpPr>
+        <p:spPr>
+          <a:xfrm>
+            <a:off x="9090507" y="1211580"/>
+            <a:ext cx="320040" cy="320040"/>
+          </a:xfrm>
+          <a:prstGeom prst="rect">
+            <a:avLst/>
+          </a:prstGeom>
+          <a:noFill/>
+        </p:spPr>
+        <p:txBody>
+          <a:bodyPr wrap="none" anchor="ctr">
+            <a:spAutoFit/>
+          </a:bodyPr>
+          <a:lstStyle/>
+          <a:p>
+            <a:pPr algn="ctr">
+              <a:defRPr sz="1400" b="1">
+                <a:solidFill>
+                  <a:srgbClr val="0B0F1A"/>
+                </a:solidFill>
+              </a:defRPr>
+            </a:pPr>
+            <a:r>
+              <a:t>5</a:t>
+            </a:r>
+          </a:p>
+        </p:txBody>
+      </p:sp>
+      <p:sp>
+        <p:nvSpPr>
+          <p:cNvPr id="22" name="TextBox 21"/>
+          <p:cNvSpPr txBox="1"/>
+          <p:nvPr/>
+        </p:nvSpPr>
+        <p:spPr>
+          <a:xfrm>
+            <a:off x="1371600" y="2743200"/>
+            <a:ext cx="457200" cy="457200"/>
+          </a:xfrm>
+          <a:prstGeom prst="rect">
+            <a:avLst/>
+          </a:prstGeom>
+          <a:noFill/>
+        </p:spPr>
+        <p:txBody>
+          <a:bodyPr wrap="none">
+            <a:spAutoFit/>
+          </a:bodyPr>
+          <a:lstStyle/>
+          <a:p>
+            <a:pPr>
+              <a:defRPr sz="2000" b="1">
+                <a:solidFill>
+                  <a:srgbClr val="00D4AA"/>
+                </a:solidFill>
+              </a:defRPr>
+            </a:pPr>
+            <a:r>
+              <a:t>1</a:t>
+            </a:r>
+          </a:p>
+        </p:txBody>
+      </p:sp>
+      <p:sp>
+        <p:nvSpPr>
+          <p:cNvPr id="23" name="TextBox 22"/>
+          <p:cNvSpPr txBox="1"/>
+          <p:nvPr/>
+        </p:nvSpPr>
+        <p:spPr>
+          <a:xfrm>
+            <a:off x="1828800" y="2743200"/>
+            <a:ext cx="8991295" cy="548640"/>
+          </a:xfrm>
+          <a:prstGeom prst="rect">
+            <a:avLst/>
+          </a:prstGeom>
+          <a:noFill/>
+        </p:spPr>
+        <p:txBody>
           <a:bodyPr wrap="square">
-            <a:normAutofit/>
+            <a:spAutoFit/>
           </a:bodyPr>
           <a:lstStyle/>
           <a:p>
-            <a:pPr algn="ctr">
-              <a:defRPr sz="2000" b="1">
+            <a:pPr>
+              <a:defRPr sz="1800">
                 <a:solidFill>
                   <a:srgbClr val="FFFFFF"/>
                 </a:solidFill>
               </a:defRPr>
             </a:pPr>
-          </a:p>
-        </p:txBody>
-      </p:sp>
-      <p:sp>
-        <p:nvSpPr>
-          <p:cNvPr id="11" name="Rounded Rectangle 10"/>
-          <p:cNvSpPr/>
-          <p:nvPr/>
-        </p:nvSpPr>
-        <p:spPr>
-          <a:xfrm>
-            <a:off x="7604607" y="2011680"/>
-            <a:ext cx="2286000" cy="3200400"/>
-          </a:xfrm>
-          <a:prstGeom prst="roundRect">
-            <a:avLst/>
-          </a:prstGeom>
-          <a:solidFill>
-            <a:srgbClr val="141A26"/>
-          </a:solidFill>
-          <a:ln w="25400">
-            <a:solidFill>
-              <a:srgbClr val="0078D4"/>
-            </a:solidFill>
-          </a:ln>
-        </p:spPr>
-        <p:style>
-          <a:lnRef idx="1">
-            <a:schemeClr val="accent1"/>
-          </a:lnRef>
-          <a:fillRef idx="3">
-            <a:schemeClr val="accent1"/>
-          </a:fillRef>
-          <a:effectRef idx="2">
-            <a:schemeClr val="accent1"/>
-          </a:effectRef>
-          <a:fontRef idx="minor">
-            <a:schemeClr val="lt1"/>
-          </a:fontRef>
-        </p:style>
-        <p:txBody>
-          <a:bodyPr rtlCol="0" anchor="ctr"/>
-          <a:lstStyle/>
-          <a:p>
-            <a:pPr algn="ctr"/>
-          </a:p>
-        </p:txBody>
-      </p:sp>
-      <p:sp>
-        <p:nvSpPr>
-          <p:cNvPr id="12" name="Oval 11"/>
-          <p:cNvSpPr/>
-          <p:nvPr/>
-        </p:nvSpPr>
-        <p:spPr>
-          <a:xfrm>
-            <a:off x="8290407" y="2468880"/>
-            <a:ext cx="914400" cy="914400"/>
-          </a:xfrm>
-          <a:prstGeom prst="ellipse">
-            <a:avLst/>
-          </a:prstGeom>
-          <a:solidFill>
-            <a:srgbClr val="0078D4"/>
-          </a:solidFill>
-          <a:ln>
-            <a:noFill/>
-          </a:ln>
-        </p:spPr>
-        <p:style>
-          <a:lnRef idx="1">
-            <a:schemeClr val="accent1"/>
-          </a:lnRef>
-          <a:fillRef idx="3">
-            <a:schemeClr val="accent1"/>
-          </a:fillRef>
-          <a:effectRef idx="2">
-            <a:schemeClr val="accent1"/>
-          </a:effectRef>
-          <a:fontRef idx="minor">
-            <a:schemeClr val="lt1"/>
-          </a:fontRef>
-        </p:style>
-        <p:txBody>
-          <a:bodyPr rtlCol="0" anchor="ctr"/>
-          <a:lstStyle/>
-          <a:p>
-            <a:pPr algn="ctr"/>
-          </a:p>
-        </p:txBody>
-      </p:sp>
-      <p:sp>
-        <p:nvSpPr>
-          <p:cNvPr id="13" name="TextBox 12"/>
+            <a:r>
+              <a:t>Generate</a:t>
+            </a:r>
+          </a:p>
+        </p:txBody>
+      </p:sp>
+      <p:sp>
+        <p:nvSpPr>
+          <p:cNvPr id="24" name="TextBox 23"/>
           <p:cNvSpPr txBox="1"/>
           <p:nvPr/>
         </p:nvSpPr>
         <p:spPr>
           <a:xfrm>
-            <a:off x="8290407" y="2468880"/>
-            <a:ext cx="914400" cy="914400"/>
+            <a:off x="1371600" y="3383280"/>
+            <a:ext cx="457200" cy="457200"/>
           </a:xfrm>
           <a:prstGeom prst="rect">
             <a:avLst/>
@@ -14180,34 +15545,34 @@
           <a:noFill/>
         </p:spPr>
         <p:txBody>
-          <a:bodyPr wrap="none" anchor="ctr">
+          <a:bodyPr wrap="none">
             <a:spAutoFit/>
           </a:bodyPr>
           <a:lstStyle/>
           <a:p>
-            <a:pPr algn="ctr">
-              <a:defRPr sz="3600" b="1">
+            <a:pPr>
+              <a:defRPr sz="2000" b="1">
                 <a:solidFill>
-                  <a:srgbClr val="0B0F1A"/>
+                  <a:srgbClr val="00D4AA"/>
                 </a:solidFill>
               </a:defRPr>
             </a:pPr>
             <a:r>
-              <a:t>🔧</a:t>
-            </a:r>
-          </a:p>
-        </p:txBody>
-      </p:sp>
-      <p:sp>
-        <p:nvSpPr>
-          <p:cNvPr id="14" name="TextBox 13"/>
+              <a:t>2</a:t>
+            </a:r>
+          </a:p>
+        </p:txBody>
+      </p:sp>
+      <p:sp>
+        <p:nvSpPr>
+          <p:cNvPr id="25" name="TextBox 24"/>
           <p:cNvSpPr txBox="1"/>
           <p:nvPr/>
         </p:nvSpPr>
         <p:spPr>
           <a:xfrm>
-            <a:off x="7696047" y="3657600"/>
-            <a:ext cx="2103120" cy="1371600"/>
+            <a:off x="1828800" y="3383280"/>
+            <a:ext cx="8991295" cy="548640"/>
           </a:xfrm>
           <a:prstGeom prst="rect">
             <a:avLst/>
@@ -14216,17 +15581,230 @@
         </p:spPr>
         <p:txBody>
           <a:bodyPr wrap="square">
-            <a:normAutofit/>
+            <a:spAutoFit/>
           </a:bodyPr>
           <a:lstStyle/>
           <a:p>
-            <a:pPr algn="ctr">
-              <a:defRPr sz="2000" b="1">
+            <a:pPr>
+              <a:defRPr sz="1800">
                 <a:solidFill>
                   <a:srgbClr val="FFFFFF"/>
                 </a:solidFill>
               </a:defRPr>
             </a:pPr>
+            <a:r>
+              <a:t>Review</a:t>
+            </a:r>
+          </a:p>
+        </p:txBody>
+      </p:sp>
+      <p:sp>
+        <p:nvSpPr>
+          <p:cNvPr id="26" name="TextBox 25"/>
+          <p:cNvSpPr txBox="1"/>
+          <p:nvPr/>
+        </p:nvSpPr>
+        <p:spPr>
+          <a:xfrm>
+            <a:off x="1371600" y="4023360"/>
+            <a:ext cx="457200" cy="457200"/>
+          </a:xfrm>
+          <a:prstGeom prst="rect">
+            <a:avLst/>
+          </a:prstGeom>
+          <a:noFill/>
+        </p:spPr>
+        <p:txBody>
+          <a:bodyPr wrap="none">
+            <a:spAutoFit/>
+          </a:bodyPr>
+          <a:lstStyle/>
+          <a:p>
+            <a:pPr>
+              <a:defRPr sz="2000" b="1">
+                <a:solidFill>
+                  <a:srgbClr val="00D4AA"/>
+                </a:solidFill>
+              </a:defRPr>
+            </a:pPr>
+            <a:r>
+              <a:t>3</a:t>
+            </a:r>
+          </a:p>
+        </p:txBody>
+      </p:sp>
+      <p:sp>
+        <p:nvSpPr>
+          <p:cNvPr id="27" name="TextBox 26"/>
+          <p:cNvSpPr txBox="1"/>
+          <p:nvPr/>
+        </p:nvSpPr>
+        <p:spPr>
+          <a:xfrm>
+            <a:off x="1828800" y="4023360"/>
+            <a:ext cx="8991295" cy="548640"/>
+          </a:xfrm>
+          <a:prstGeom prst="rect">
+            <a:avLst/>
+          </a:prstGeom>
+          <a:noFill/>
+        </p:spPr>
+        <p:txBody>
+          <a:bodyPr wrap="square">
+            <a:spAutoFit/>
+          </a:bodyPr>
+          <a:lstStyle/>
+          <a:p>
+            <a:pPr>
+              <a:defRPr sz="1800">
+                <a:solidFill>
+                  <a:srgbClr val="FFFFFF"/>
+                </a:solidFill>
+              </a:defRPr>
+            </a:pPr>
+            <a:r>
+              <a:t>Refine</a:t>
+            </a:r>
+          </a:p>
+        </p:txBody>
+      </p:sp>
+      <p:sp>
+        <p:nvSpPr>
+          <p:cNvPr id="28" name="TextBox 27"/>
+          <p:cNvSpPr txBox="1"/>
+          <p:nvPr/>
+        </p:nvSpPr>
+        <p:spPr>
+          <a:xfrm>
+            <a:off x="1371600" y="4663440"/>
+            <a:ext cx="457200" cy="457200"/>
+          </a:xfrm>
+          <a:prstGeom prst="rect">
+            <a:avLst/>
+          </a:prstGeom>
+          <a:noFill/>
+        </p:spPr>
+        <p:txBody>
+          <a:bodyPr wrap="none">
+            <a:spAutoFit/>
+          </a:bodyPr>
+          <a:lstStyle/>
+          <a:p>
+            <a:pPr>
+              <a:defRPr sz="2000" b="1">
+                <a:solidFill>
+                  <a:srgbClr val="00D4AA"/>
+                </a:solidFill>
+              </a:defRPr>
+            </a:pPr>
+            <a:r>
+              <a:t>4</a:t>
+            </a:r>
+          </a:p>
+        </p:txBody>
+      </p:sp>
+      <p:sp>
+        <p:nvSpPr>
+          <p:cNvPr id="29" name="TextBox 28"/>
+          <p:cNvSpPr txBox="1"/>
+          <p:nvPr/>
+        </p:nvSpPr>
+        <p:spPr>
+          <a:xfrm>
+            <a:off x="1828800" y="4663440"/>
+            <a:ext cx="8991295" cy="548640"/>
+          </a:xfrm>
+          <a:prstGeom prst="rect">
+            <a:avLst/>
+          </a:prstGeom>
+          <a:noFill/>
+        </p:spPr>
+        <p:txBody>
+          <a:bodyPr wrap="square">
+            <a:spAutoFit/>
+          </a:bodyPr>
+          <a:lstStyle/>
+          <a:p>
+            <a:pPr>
+              <a:defRPr sz="1800">
+                <a:solidFill>
+                  <a:srgbClr val="FFFFFF"/>
+                </a:solidFill>
+              </a:defRPr>
+            </a:pPr>
+            <a:r>
+              <a:t>Brand</a:t>
+            </a:r>
+          </a:p>
+        </p:txBody>
+      </p:sp>
+      <p:sp>
+        <p:nvSpPr>
+          <p:cNvPr id="30" name="TextBox 29"/>
+          <p:cNvSpPr txBox="1"/>
+          <p:nvPr/>
+        </p:nvSpPr>
+        <p:spPr>
+          <a:xfrm>
+            <a:off x="1371600" y="5303520"/>
+            <a:ext cx="457200" cy="457200"/>
+          </a:xfrm>
+          <a:prstGeom prst="rect">
+            <a:avLst/>
+          </a:prstGeom>
+          <a:noFill/>
+        </p:spPr>
+        <p:txBody>
+          <a:bodyPr wrap="none">
+            <a:spAutoFit/>
+          </a:bodyPr>
+          <a:lstStyle/>
+          <a:p>
+            <a:pPr>
+              <a:defRPr sz="2000" b="1">
+                <a:solidFill>
+                  <a:srgbClr val="00D4AA"/>
+                </a:solidFill>
+              </a:defRPr>
+            </a:pPr>
+            <a:r>
+              <a:t>5</a:t>
+            </a:r>
+          </a:p>
+        </p:txBody>
+      </p:sp>
+      <p:sp>
+        <p:nvSpPr>
+          <p:cNvPr id="31" name="TextBox 30"/>
+          <p:cNvSpPr txBox="1"/>
+          <p:nvPr/>
+        </p:nvSpPr>
+        <p:spPr>
+          <a:xfrm>
+            <a:off x="1828800" y="5303520"/>
+            <a:ext cx="8991295" cy="548640"/>
+          </a:xfrm>
+          <a:prstGeom prst="rect">
+            <a:avLst/>
+          </a:prstGeom>
+          <a:noFill/>
+        </p:spPr>
+        <p:txBody>
+          <a:bodyPr wrap="square">
+            <a:spAutoFit/>
+          </a:bodyPr>
+          <a:lstStyle/>
+          <a:p>
+            <a:pPr>
+              <a:defRPr sz="1800">
+                <a:solidFill>
+                  <a:srgbClr val="FFFFFF"/>
+                </a:solidFill>
+              </a:defRPr>
+            </a:pPr>
+            <a:r>
+              <a:t>Notes</a:t>
+            </a:r>
           </a:p>
         </p:txBody>
       </p:sp>
@@ -14264,8 +15842,8 @@
         </p:nvSpPr>
         <p:spPr>
           <a:xfrm>
-            <a:off x="457200" y="365760"/>
-            <a:ext cx="11277295" cy="822960"/>
+            <a:off x="457200" y="457200"/>
+            <a:ext cx="11277295" cy="731520"/>
           </a:xfrm>
           <a:prstGeom prst="rect">
             <a:avLst/>
@@ -14278,15 +15856,15 @@
           </a:bodyPr>
           <a:lstStyle/>
           <a:p>
-            <a:pPr>
-              <a:defRPr sz="4000" b="1">
+            <a:pPr algn="ctr">
+              <a:defRPr sz="3600" b="1">
                 <a:solidFill>
                   <a:srgbClr val="FFFFFF"/>
                 </a:solidFill>
               </a:defRPr>
             </a:pPr>
             <a:r>
-              <a:t>Clarity and Concision Techniques</a:t>
+              <a:t>Adapting One Deck for Multiple Audiences</a:t>
             </a:r>
           </a:p>
         </p:txBody>
@@ -14299,8 +15877,8 @@
         </p:nvSpPr>
         <p:spPr>
           <a:xfrm>
-            <a:off x="457200" y="1234440"/>
-            <a:ext cx="1828800" cy="36576"/>
+            <a:off x="6077559" y="1371600"/>
+            <a:ext cx="36576" cy="4572000"/>
           </a:xfrm>
           <a:prstGeom prst="rect">
             <a:avLst/>
@@ -14331,6 +15909,76 @@
           <a:lstStyle/>
           <a:p>
             <a:pPr algn="ctr"/>
+          </a:p>
+        </p:txBody>
+      </p:sp>
+      <p:sp>
+        <p:nvSpPr>
+          <p:cNvPr id="4" name="TextBox 3"/>
+          <p:cNvSpPr txBox="1"/>
+          <p:nvPr/>
+        </p:nvSpPr>
+        <p:spPr>
+          <a:xfrm>
+            <a:off x="457200" y="1463040"/>
+            <a:ext cx="5364327" cy="731520"/>
+          </a:xfrm>
+          <a:prstGeom prst="rect">
+            <a:avLst/>
+          </a:prstGeom>
+          <a:noFill/>
+        </p:spPr>
+        <p:txBody>
+          <a:bodyPr wrap="none">
+            <a:spAutoFit/>
+          </a:bodyPr>
+          <a:lstStyle/>
+          <a:p>
+            <a:pPr algn="ctr">
+              <a:defRPr sz="2800" b="1">
+                <a:solidFill>
+                  <a:srgbClr val="E86B4A"/>
+                </a:solidFill>
+              </a:defRPr>
+            </a:pPr>
+            <a:r>
+              <a:t>The Problem</a:t>
+            </a:r>
+          </a:p>
+        </p:txBody>
+      </p:sp>
+      <p:sp>
+        <p:nvSpPr>
+          <p:cNvPr id="5" name="TextBox 4"/>
+          <p:cNvSpPr txBox="1"/>
+          <p:nvPr/>
+        </p:nvSpPr>
+        <p:spPr>
+          <a:xfrm>
+            <a:off x="6370167" y="1463040"/>
+            <a:ext cx="5364327" cy="731520"/>
+          </a:xfrm>
+          <a:prstGeom prst="rect">
+            <a:avLst/>
+          </a:prstGeom>
+          <a:noFill/>
+        </p:spPr>
+        <p:txBody>
+          <a:bodyPr wrap="none">
+            <a:spAutoFit/>
+          </a:bodyPr>
+          <a:lstStyle/>
+          <a:p>
+            <a:pPr algn="ctr">
+              <a:defRPr sz="2800" b="1">
+                <a:solidFill>
+                  <a:srgbClr val="00D4AA"/>
+                </a:solidFill>
+              </a:defRPr>
+            </a:pPr>
+            <a:r>
+              <a:t>The Claude Solution</a:t>
+            </a:r>
           </a:p>
         </p:txBody>
       </p:sp>
@@ -14362,49 +16010,14 @@
       <p:grpSpPr/>
       <p:sp>
         <p:nvSpPr>
-          <p:cNvPr id="2" name="TextBox 1"/>
-          <p:cNvSpPr txBox="1"/>
-          <p:nvPr/>
-        </p:nvSpPr>
-        <p:spPr>
-          <a:xfrm>
-            <a:off x="457200" y="457200"/>
-            <a:ext cx="11277295" cy="731520"/>
-          </a:xfrm>
-          <a:prstGeom prst="rect">
-            <a:avLst/>
-          </a:prstGeom>
-          <a:noFill/>
-        </p:spPr>
-        <p:txBody>
-          <a:bodyPr wrap="none">
-            <a:spAutoFit/>
-          </a:bodyPr>
-          <a:lstStyle/>
-          <a:p>
-            <a:pPr algn="ctr">
-              <a:defRPr sz="3600" b="1">
-                <a:solidFill>
-                  <a:srgbClr val="FFFFFF"/>
-                </a:solidFill>
-              </a:defRPr>
-            </a:pPr>
-            <a:r>
-              <a:t>Tone Calibration with Claude</a:t>
-            </a:r>
-          </a:p>
-        </p:txBody>
-      </p:sp>
-      <p:sp>
-        <p:nvSpPr>
-          <p:cNvPr id="3" name="Rectangle 2"/>
+          <p:cNvPr id="2" name="Rectangle 1"/>
           <p:cNvSpPr/>
           <p:nvPr/>
         </p:nvSpPr>
         <p:spPr>
           <a:xfrm>
-            <a:off x="6077559" y="1371600"/>
-            <a:ext cx="36576" cy="4572000"/>
+            <a:off x="0" y="1828800"/>
+            <a:ext cx="137160" cy="3200400"/>
           </a:xfrm>
           <a:prstGeom prst="rect">
             <a:avLst/>
@@ -14440,14 +16053,14 @@
       </p:sp>
       <p:sp>
         <p:nvSpPr>
-          <p:cNvPr id="4" name="TextBox 3"/>
+          <p:cNvPr id="3" name="TextBox 2"/>
           <p:cNvSpPr txBox="1"/>
           <p:nvPr/>
         </p:nvSpPr>
         <p:spPr>
           <a:xfrm>
-            <a:off x="457200" y="1463040"/>
-            <a:ext cx="5364327" cy="731520"/>
+            <a:off x="457200" y="2286000"/>
+            <a:ext cx="11277295" cy="1371600"/>
           </a:xfrm>
           <a:prstGeom prst="rect">
             <a:avLst/>
@@ -14455,34 +16068,34 @@
           <a:noFill/>
         </p:spPr>
         <p:txBody>
-          <a:bodyPr wrap="none">
+          <a:bodyPr wrap="square">
             <a:spAutoFit/>
           </a:bodyPr>
           <a:lstStyle/>
           <a:p>
-            <a:pPr algn="ctr">
-              <a:defRPr sz="2800" b="1">
+            <a:pPr>
+              <a:defRPr sz="5600" b="1">
                 <a:solidFill>
-                  <a:srgbClr val="E86B4A"/>
+                  <a:srgbClr val="FFFFFF"/>
                 </a:solidFill>
               </a:defRPr>
             </a:pPr>
             <a:r>
-              <a:t>Tone Dimensions</a:t>
-            </a:r>
-          </a:p>
-        </p:txBody>
-      </p:sp>
-      <p:sp>
-        <p:nvSpPr>
-          <p:cNvPr id="5" name="TextBox 4"/>
+              <a:t>Refinement &amp; Messaging</a:t>
+            </a:r>
+          </a:p>
+        </p:txBody>
+      </p:sp>
+      <p:sp>
+        <p:nvSpPr>
+          <p:cNvPr id="4" name="TextBox 3"/>
           <p:cNvSpPr txBox="1"/>
           <p:nvPr/>
         </p:nvSpPr>
         <p:spPr>
           <a:xfrm>
-            <a:off x="6370167" y="1463040"/>
-            <a:ext cx="5364327" cy="731520"/>
+            <a:off x="457200" y="3840480"/>
+            <a:ext cx="11277295" cy="914400"/>
           </a:xfrm>
           <a:prstGeom prst="rect">
             <a:avLst/>
@@ -14490,20 +16103,20 @@
           <a:noFill/>
         </p:spPr>
         <p:txBody>
-          <a:bodyPr wrap="none">
+          <a:bodyPr wrap="square">
             <a:spAutoFit/>
           </a:bodyPr>
           <a:lstStyle/>
           <a:p>
-            <a:pPr algn="ctr">
-              <a:defRPr sz="2800" b="1">
+            <a:pPr>
+              <a:defRPr sz="2400">
                 <a:solidFill>
-                  <a:srgbClr val="00D4AA"/>
+                  <a:srgbClr val="8B95A5"/>
                 </a:solidFill>
               </a:defRPr>
             </a:pPr>
             <a:r>
-              <a:t>Claude Tone Prompts</a:t>
+              <a:t>Improving Clarity, Tone, and Strategic Framing</a:t>
             </a:r>
           </a:p>
         </p:txBody>
@@ -14542,8 +16155,8 @@
         </p:nvSpPr>
         <p:spPr>
           <a:xfrm>
-            <a:off x="457200" y="1828800"/>
-            <a:ext cx="11277295" cy="1371600"/>
+            <a:off x="457200" y="731520"/>
+            <a:ext cx="11277295" cy="914400"/>
           </a:xfrm>
           <a:prstGeom prst="rect">
             <a:avLst/>
@@ -14557,30 +16170,230 @@
           <a:lstStyle/>
           <a:p>
             <a:pPr algn="ctr">
-              <a:defRPr sz="9600" b="1">
+              <a:defRPr sz="4000" b="1">
                 <a:solidFill>
-                  <a:srgbClr val="00D4AA"/>
+                  <a:srgbClr val="FFFFFF"/>
                 </a:solidFill>
               </a:defRPr>
             </a:pPr>
             <a:r>
-              <a:t>DEMO</a:t>
-            </a:r>
-          </a:p>
-        </p:txBody>
-      </p:sp>
-      <p:sp>
-        <p:nvSpPr>
-          <p:cNvPr id="3" name="Rectangle 2"/>
+              <a:t>Audience-Specific Framing</a:t>
+            </a:r>
+          </a:p>
+        </p:txBody>
+      </p:sp>
+      <p:sp>
+        <p:nvSpPr>
+          <p:cNvPr id="3" name="Rounded Rectangle 2"/>
           <p:cNvSpPr/>
           <p:nvPr/>
         </p:nvSpPr>
         <p:spPr>
           <a:xfrm>
-            <a:off x="4724247" y="3474720"/>
-            <a:ext cx="2743200" cy="54864"/>
+            <a:off x="2301087" y="2011680"/>
+            <a:ext cx="2286000" cy="3200400"/>
+          </a:xfrm>
+          <a:prstGeom prst="roundRect">
+            <a:avLst/>
+          </a:prstGeom>
+          <a:solidFill>
+            <a:srgbClr val="141A26"/>
+          </a:solidFill>
+          <a:ln w="25400">
+            <a:solidFill>
+              <a:srgbClr val="E86B4A"/>
+            </a:solidFill>
+          </a:ln>
+        </p:spPr>
+        <p:style>
+          <a:lnRef idx="1">
+            <a:schemeClr val="accent1"/>
+          </a:lnRef>
+          <a:fillRef idx="3">
+            <a:schemeClr val="accent1"/>
+          </a:fillRef>
+          <a:effectRef idx="2">
+            <a:schemeClr val="accent1"/>
+          </a:effectRef>
+          <a:fontRef idx="minor">
+            <a:schemeClr val="lt1"/>
+          </a:fontRef>
+        </p:style>
+        <p:txBody>
+          <a:bodyPr rtlCol="0" anchor="ctr"/>
+          <a:lstStyle/>
+          <a:p>
+            <a:pPr algn="ctr"/>
+          </a:p>
+        </p:txBody>
+      </p:sp>
+      <p:sp>
+        <p:nvSpPr>
+          <p:cNvPr id="4" name="Oval 3"/>
+          <p:cNvSpPr/>
+          <p:nvPr/>
+        </p:nvSpPr>
+        <p:spPr>
+          <a:xfrm>
+            <a:off x="2986887" y="2468880"/>
+            <a:ext cx="914400" cy="914400"/>
+          </a:xfrm>
+          <a:prstGeom prst="ellipse">
+            <a:avLst/>
+          </a:prstGeom>
+          <a:solidFill>
+            <a:srgbClr val="E86B4A"/>
+          </a:solidFill>
+          <a:ln>
+            <a:noFill/>
+          </a:ln>
+        </p:spPr>
+        <p:style>
+          <a:lnRef idx="1">
+            <a:schemeClr val="accent1"/>
+          </a:lnRef>
+          <a:fillRef idx="3">
+            <a:schemeClr val="accent1"/>
+          </a:fillRef>
+          <a:effectRef idx="2">
+            <a:schemeClr val="accent1"/>
+          </a:effectRef>
+          <a:fontRef idx="minor">
+            <a:schemeClr val="lt1"/>
+          </a:fontRef>
+        </p:style>
+        <p:txBody>
+          <a:bodyPr rtlCol="0" anchor="ctr"/>
+          <a:lstStyle/>
+          <a:p>
+            <a:pPr algn="ctr"/>
+          </a:p>
+        </p:txBody>
+      </p:sp>
+      <p:sp>
+        <p:nvSpPr>
+          <p:cNvPr id="5" name="TextBox 4"/>
+          <p:cNvSpPr txBox="1"/>
+          <p:nvPr/>
+        </p:nvSpPr>
+        <p:spPr>
+          <a:xfrm>
+            <a:off x="2986887" y="2468880"/>
+            <a:ext cx="914400" cy="914400"/>
           </a:xfrm>
           <a:prstGeom prst="rect">
+            <a:avLst/>
+          </a:prstGeom>
+          <a:noFill/>
+        </p:spPr>
+        <p:txBody>
+          <a:bodyPr wrap="none" anchor="ctr">
+            <a:spAutoFit/>
+          </a:bodyPr>
+          <a:lstStyle/>
+          <a:p>
+            <a:pPr algn="ctr">
+              <a:defRPr sz="3600" b="1">
+                <a:solidFill>
+                  <a:srgbClr val="0B0F1A"/>
+                </a:solidFill>
+              </a:defRPr>
+            </a:pPr>
+            <a:r>
+              <a:t>👔</a:t>
+            </a:r>
+          </a:p>
+        </p:txBody>
+      </p:sp>
+      <p:sp>
+        <p:nvSpPr>
+          <p:cNvPr id="6" name="TextBox 5"/>
+          <p:cNvSpPr txBox="1"/>
+          <p:nvPr/>
+        </p:nvSpPr>
+        <p:spPr>
+          <a:xfrm>
+            <a:off x="2392527" y="3657600"/>
+            <a:ext cx="2103120" cy="1371600"/>
+          </a:xfrm>
+          <a:prstGeom prst="rect">
+            <a:avLst/>
+          </a:prstGeom>
+          <a:noFill/>
+        </p:spPr>
+        <p:txBody>
+          <a:bodyPr wrap="square">
+            <a:normAutofit/>
+          </a:bodyPr>
+          <a:lstStyle/>
+          <a:p>
+            <a:pPr algn="ctr">
+              <a:defRPr sz="2000" b="1">
+                <a:solidFill>
+                  <a:srgbClr val="FFFFFF"/>
+                </a:solidFill>
+              </a:defRPr>
+            </a:pPr>
+          </a:p>
+        </p:txBody>
+      </p:sp>
+      <p:sp>
+        <p:nvSpPr>
+          <p:cNvPr id="7" name="Rounded Rectangle 6"/>
+          <p:cNvSpPr/>
+          <p:nvPr/>
+        </p:nvSpPr>
+        <p:spPr>
+          <a:xfrm>
+            <a:off x="4952847" y="2011680"/>
+            <a:ext cx="2286000" cy="3200400"/>
+          </a:xfrm>
+          <a:prstGeom prst="roundRect">
+            <a:avLst/>
+          </a:prstGeom>
+          <a:solidFill>
+            <a:srgbClr val="141A26"/>
+          </a:solidFill>
+          <a:ln w="25400">
+            <a:solidFill>
+              <a:srgbClr val="00D4AA"/>
+            </a:solidFill>
+          </a:ln>
+        </p:spPr>
+        <p:style>
+          <a:lnRef idx="1">
+            <a:schemeClr val="accent1"/>
+          </a:lnRef>
+          <a:fillRef idx="3">
+            <a:schemeClr val="accent1"/>
+          </a:fillRef>
+          <a:effectRef idx="2">
+            <a:schemeClr val="accent1"/>
+          </a:effectRef>
+          <a:fontRef idx="minor">
+            <a:schemeClr val="lt1"/>
+          </a:fontRef>
+        </p:style>
+        <p:txBody>
+          <a:bodyPr rtlCol="0" anchor="ctr"/>
+          <a:lstStyle/>
+          <a:p>
+            <a:pPr algn="ctr"/>
+          </a:p>
+        </p:txBody>
+      </p:sp>
+      <p:sp>
+        <p:nvSpPr>
+          <p:cNvPr id="8" name="Oval 7"/>
+          <p:cNvSpPr/>
+          <p:nvPr/>
+        </p:nvSpPr>
+        <p:spPr>
+          <a:xfrm>
+            <a:off x="5638647" y="2468880"/>
+            <a:ext cx="914400" cy="914400"/>
+          </a:xfrm>
+          <a:prstGeom prst="ellipse">
             <a:avLst/>
           </a:prstGeom>
           <a:solidFill>
@@ -14614,14 +16427,14 @@
       </p:sp>
       <p:sp>
         <p:nvSpPr>
-          <p:cNvPr id="4" name="TextBox 3"/>
+          <p:cNvPr id="9" name="TextBox 8"/>
           <p:cNvSpPr txBox="1"/>
           <p:nvPr/>
         </p:nvSpPr>
         <p:spPr>
           <a:xfrm>
-            <a:off x="457200" y="3840480"/>
-            <a:ext cx="11277295" cy="914400"/>
+            <a:off x="5638647" y="2468880"/>
+            <a:ext cx="914400" cy="914400"/>
           </a:xfrm>
           <a:prstGeom prst="rect">
             <a:avLst/>
@@ -14629,21 +16442,208 @@
           <a:noFill/>
         </p:spPr>
         <p:txBody>
-          <a:bodyPr wrap="square">
+          <a:bodyPr wrap="none" anchor="ctr">
             <a:spAutoFit/>
           </a:bodyPr>
           <a:lstStyle/>
           <a:p>
             <a:pPr algn="ctr">
-              <a:defRPr sz="3200" b="1">
+              <a:defRPr sz="3600" b="1">
+                <a:solidFill>
+                  <a:srgbClr val="0B0F1A"/>
+                </a:solidFill>
+              </a:defRPr>
+            </a:pPr>
+            <a:r>
+              <a:t>📋</a:t>
+            </a:r>
+          </a:p>
+        </p:txBody>
+      </p:sp>
+      <p:sp>
+        <p:nvSpPr>
+          <p:cNvPr id="10" name="TextBox 9"/>
+          <p:cNvSpPr txBox="1"/>
+          <p:nvPr/>
+        </p:nvSpPr>
+        <p:spPr>
+          <a:xfrm>
+            <a:off x="5044287" y="3657600"/>
+            <a:ext cx="2103120" cy="1371600"/>
+          </a:xfrm>
+          <a:prstGeom prst="rect">
+            <a:avLst/>
+          </a:prstGeom>
+          <a:noFill/>
+        </p:spPr>
+        <p:txBody>
+          <a:bodyPr wrap="square">
+            <a:normAutofit/>
+          </a:bodyPr>
+          <a:lstStyle/>
+          <a:p>
+            <a:pPr algn="ctr">
+              <a:defRPr sz="2000" b="1">
                 <a:solidFill>
                   <a:srgbClr val="FFFFFF"/>
                 </a:solidFill>
               </a:defRPr>
             </a:pPr>
-            <a:r>
-              <a:t>Demo: Refining a Draft Deck</a:t>
-            </a:r>
+          </a:p>
+        </p:txBody>
+      </p:sp>
+      <p:sp>
+        <p:nvSpPr>
+          <p:cNvPr id="11" name="Rounded Rectangle 10"/>
+          <p:cNvSpPr/>
+          <p:nvPr/>
+        </p:nvSpPr>
+        <p:spPr>
+          <a:xfrm>
+            <a:off x="7604607" y="2011680"/>
+            <a:ext cx="2286000" cy="3200400"/>
+          </a:xfrm>
+          <a:prstGeom prst="roundRect">
+            <a:avLst/>
+          </a:prstGeom>
+          <a:solidFill>
+            <a:srgbClr val="141A26"/>
+          </a:solidFill>
+          <a:ln w="25400">
+            <a:solidFill>
+              <a:srgbClr val="0078D4"/>
+            </a:solidFill>
+          </a:ln>
+        </p:spPr>
+        <p:style>
+          <a:lnRef idx="1">
+            <a:schemeClr val="accent1"/>
+          </a:lnRef>
+          <a:fillRef idx="3">
+            <a:schemeClr val="accent1"/>
+          </a:fillRef>
+          <a:effectRef idx="2">
+            <a:schemeClr val="accent1"/>
+          </a:effectRef>
+          <a:fontRef idx="minor">
+            <a:schemeClr val="lt1"/>
+          </a:fontRef>
+        </p:style>
+        <p:txBody>
+          <a:bodyPr rtlCol="0" anchor="ctr"/>
+          <a:lstStyle/>
+          <a:p>
+            <a:pPr algn="ctr"/>
+          </a:p>
+        </p:txBody>
+      </p:sp>
+      <p:sp>
+        <p:nvSpPr>
+          <p:cNvPr id="12" name="Oval 11"/>
+          <p:cNvSpPr/>
+          <p:nvPr/>
+        </p:nvSpPr>
+        <p:spPr>
+          <a:xfrm>
+            <a:off x="8290407" y="2468880"/>
+            <a:ext cx="914400" cy="914400"/>
+          </a:xfrm>
+          <a:prstGeom prst="ellipse">
+            <a:avLst/>
+          </a:prstGeom>
+          <a:solidFill>
+            <a:srgbClr val="0078D4"/>
+          </a:solidFill>
+          <a:ln>
+            <a:noFill/>
+          </a:ln>
+        </p:spPr>
+        <p:style>
+          <a:lnRef idx="1">
+            <a:schemeClr val="accent1"/>
+          </a:lnRef>
+          <a:fillRef idx="3">
+            <a:schemeClr val="accent1"/>
+          </a:fillRef>
+          <a:effectRef idx="2">
+            <a:schemeClr val="accent1"/>
+          </a:effectRef>
+          <a:fontRef idx="minor">
+            <a:schemeClr val="lt1"/>
+          </a:fontRef>
+        </p:style>
+        <p:txBody>
+          <a:bodyPr rtlCol="0" anchor="ctr"/>
+          <a:lstStyle/>
+          <a:p>
+            <a:pPr algn="ctr"/>
+          </a:p>
+        </p:txBody>
+      </p:sp>
+      <p:sp>
+        <p:nvSpPr>
+          <p:cNvPr id="13" name="TextBox 12"/>
+          <p:cNvSpPr txBox="1"/>
+          <p:nvPr/>
+        </p:nvSpPr>
+        <p:spPr>
+          <a:xfrm>
+            <a:off x="8290407" y="2468880"/>
+            <a:ext cx="914400" cy="914400"/>
+          </a:xfrm>
+          <a:prstGeom prst="rect">
+            <a:avLst/>
+          </a:prstGeom>
+          <a:noFill/>
+        </p:spPr>
+        <p:txBody>
+          <a:bodyPr wrap="none" anchor="ctr">
+            <a:spAutoFit/>
+          </a:bodyPr>
+          <a:lstStyle/>
+          <a:p>
+            <a:pPr algn="ctr">
+              <a:defRPr sz="3600" b="1">
+                <a:solidFill>
+                  <a:srgbClr val="0B0F1A"/>
+                </a:solidFill>
+              </a:defRPr>
+            </a:pPr>
+            <a:r>
+              <a:t>🔧</a:t>
+            </a:r>
+          </a:p>
+        </p:txBody>
+      </p:sp>
+      <p:sp>
+        <p:nvSpPr>
+          <p:cNvPr id="14" name="TextBox 13"/>
+          <p:cNvSpPr txBox="1"/>
+          <p:nvPr/>
+        </p:nvSpPr>
+        <p:spPr>
+          <a:xfrm>
+            <a:off x="7696047" y="3657600"/>
+            <a:ext cx="2103120" cy="1371600"/>
+          </a:xfrm>
+          <a:prstGeom prst="rect">
+            <a:avLst/>
+          </a:prstGeom>
+          <a:noFill/>
+        </p:spPr>
+        <p:txBody>
+          <a:bodyPr wrap="square">
+            <a:normAutofit/>
+          </a:bodyPr>
+          <a:lstStyle/>
+          <a:p>
+            <a:pPr algn="ctr">
+              <a:defRPr sz="2000" b="1">
+                <a:solidFill>
+                  <a:srgbClr val="FFFFFF"/>
+                </a:solidFill>
+              </a:defRPr>
+            </a:pPr>
           </a:p>
         </p:txBody>
       </p:sp>
@@ -14681,8 +16681,8 @@
         </p:nvSpPr>
         <p:spPr>
           <a:xfrm>
-            <a:off x="914400" y="1371600"/>
-            <a:ext cx="914400" cy="914400"/>
+            <a:off x="457200" y="365760"/>
+            <a:ext cx="11277295" cy="822960"/>
           </a:xfrm>
           <a:prstGeom prst="rect">
             <a:avLst/>
@@ -14696,50 +16696,58 @@
           <a:lstStyle/>
           <a:p>
             <a:pPr>
-              <a:defRPr sz="12000">
-                <a:solidFill>
-                  <a:srgbClr val="00D4AA"/>
-                </a:solidFill>
-              </a:defRPr>
-            </a:pPr>
-            <a:r>
-              <a:t>"</a:t>
-            </a:r>
-          </a:p>
-        </p:txBody>
-      </p:sp>
-      <p:sp>
-        <p:nvSpPr>
-          <p:cNvPr id="3" name="TextBox 2"/>
-          <p:cNvSpPr txBox="1"/>
-          <p:nvPr/>
-        </p:nvSpPr>
-        <p:spPr>
-          <a:xfrm>
-            <a:off x="1371600" y="2286000"/>
-            <a:ext cx="9448495" cy="2286000"/>
-          </a:xfrm>
-          <a:prstGeom prst="rect">
-            <a:avLst/>
-          </a:prstGeom>
-          <a:noFill/>
-        </p:spPr>
-        <p:txBody>
-          <a:bodyPr wrap="square">
-            <a:spAutoFit/>
-          </a:bodyPr>
-          <a:lstStyle/>
-          <a:p>
-            <a:pPr algn="ctr">
-              <a:defRPr sz="3600" i="1">
+              <a:defRPr sz="4000" b="1">
                 <a:solidFill>
                   <a:srgbClr val="FFFFFF"/>
                 </a:solidFill>
               </a:defRPr>
             </a:pPr>
             <a:r>
-              <a:t>Break</a:t>
-            </a:r>
+              <a:t>Clarity and Concision Techniques</a:t>
+            </a:r>
+          </a:p>
+        </p:txBody>
+      </p:sp>
+      <p:sp>
+        <p:nvSpPr>
+          <p:cNvPr id="3" name="Rectangle 2"/>
+          <p:cNvSpPr/>
+          <p:nvPr/>
+        </p:nvSpPr>
+        <p:spPr>
+          <a:xfrm>
+            <a:off x="457200" y="1234440"/>
+            <a:ext cx="1828800" cy="36576"/>
+          </a:xfrm>
+          <a:prstGeom prst="rect">
+            <a:avLst/>
+          </a:prstGeom>
+          <a:solidFill>
+            <a:srgbClr val="00D4AA"/>
+          </a:solidFill>
+          <a:ln>
+            <a:noFill/>
+          </a:ln>
+        </p:spPr>
+        <p:style>
+          <a:lnRef idx="1">
+            <a:schemeClr val="accent1"/>
+          </a:lnRef>
+          <a:fillRef idx="3">
+            <a:schemeClr val="accent1"/>
+          </a:fillRef>
+          <a:effectRef idx="2">
+            <a:schemeClr val="accent1"/>
+          </a:effectRef>
+          <a:fontRef idx="minor">
+            <a:schemeClr val="lt1"/>
+          </a:fontRef>
+        </p:style>
+        <p:txBody>
+          <a:bodyPr rtlCol="0" anchor="ctr"/>
+          <a:lstStyle/>
+          <a:p>
+            <a:pPr algn="ctr"/>
           </a:p>
         </p:txBody>
       </p:sp>
@@ -14875,14 +16883,49 @@
       <p:grpSpPr/>
       <p:sp>
         <p:nvSpPr>
-          <p:cNvPr id="2" name="Rectangle 1"/>
+          <p:cNvPr id="2" name="TextBox 1"/>
+          <p:cNvSpPr txBox="1"/>
+          <p:nvPr/>
+        </p:nvSpPr>
+        <p:spPr>
+          <a:xfrm>
+            <a:off x="457200" y="457200"/>
+            <a:ext cx="11277295" cy="731520"/>
+          </a:xfrm>
+          <a:prstGeom prst="rect">
+            <a:avLst/>
+          </a:prstGeom>
+          <a:noFill/>
+        </p:spPr>
+        <p:txBody>
+          <a:bodyPr wrap="none">
+            <a:spAutoFit/>
+          </a:bodyPr>
+          <a:lstStyle/>
+          <a:p>
+            <a:pPr algn="ctr">
+              <a:defRPr sz="3600" b="1">
+                <a:solidFill>
+                  <a:srgbClr val="FFFFFF"/>
+                </a:solidFill>
+              </a:defRPr>
+            </a:pPr>
+            <a:r>
+              <a:t>Tone Calibration with Claude</a:t>
+            </a:r>
+          </a:p>
+        </p:txBody>
+      </p:sp>
+      <p:sp>
+        <p:nvSpPr>
+          <p:cNvPr id="3" name="Rectangle 2"/>
           <p:cNvSpPr/>
           <p:nvPr/>
         </p:nvSpPr>
         <p:spPr>
           <a:xfrm>
-            <a:off x="0" y="1828800"/>
-            <a:ext cx="137160" cy="3200400"/>
+            <a:off x="6077559" y="1371600"/>
+            <a:ext cx="36576" cy="4572000"/>
           </a:xfrm>
           <a:prstGeom prst="rect">
             <a:avLst/>
@@ -14918,14 +16961,14 @@
       </p:sp>
       <p:sp>
         <p:nvSpPr>
-          <p:cNvPr id="3" name="TextBox 2"/>
+          <p:cNvPr id="4" name="TextBox 3"/>
           <p:cNvSpPr txBox="1"/>
           <p:nvPr/>
         </p:nvSpPr>
         <p:spPr>
           <a:xfrm>
-            <a:off x="457200" y="2286000"/>
-            <a:ext cx="11277295" cy="1371600"/>
+            <a:off x="457200" y="1463040"/>
+            <a:ext cx="5364327" cy="731520"/>
           </a:xfrm>
           <a:prstGeom prst="rect">
             <a:avLst/>
@@ -14933,34 +16976,34 @@
           <a:noFill/>
         </p:spPr>
         <p:txBody>
-          <a:bodyPr wrap="square">
+          <a:bodyPr wrap="none">
             <a:spAutoFit/>
           </a:bodyPr>
           <a:lstStyle/>
           <a:p>
-            <a:pPr>
-              <a:defRPr sz="5600" b="1">
+            <a:pPr algn="ctr">
+              <a:defRPr sz="2800" b="1">
                 <a:solidFill>
-                  <a:srgbClr val="FFFFFF"/>
+                  <a:srgbClr val="E86B4A"/>
                 </a:solidFill>
               </a:defRPr>
             </a:pPr>
             <a:r>
-              <a:t>Applied Deck Lab</a:t>
-            </a:r>
-          </a:p>
-        </p:txBody>
-      </p:sp>
-      <p:sp>
-        <p:nvSpPr>
-          <p:cNvPr id="4" name="TextBox 3"/>
+              <a:t>Tone Dimensions</a:t>
+            </a:r>
+          </a:p>
+        </p:txBody>
+      </p:sp>
+      <p:sp>
+        <p:nvSpPr>
+          <p:cNvPr id="5" name="TextBox 4"/>
           <p:cNvSpPr txBox="1"/>
           <p:nvPr/>
         </p:nvSpPr>
         <p:spPr>
           <a:xfrm>
-            <a:off x="457200" y="3840480"/>
-            <a:ext cx="11277295" cy="914400"/>
+            <a:off x="6370167" y="1463040"/>
+            <a:ext cx="5364327" cy="731520"/>
           </a:xfrm>
           <a:prstGeom prst="rect">
             <a:avLst/>
@@ -14968,20 +17011,20 @@
           <a:noFill/>
         </p:spPr>
         <p:txBody>
-          <a:bodyPr wrap="square">
+          <a:bodyPr wrap="none">
             <a:spAutoFit/>
           </a:bodyPr>
           <a:lstStyle/>
           <a:p>
-            <a:pPr>
-              <a:defRPr sz="2400">
+            <a:pPr algn="ctr">
+              <a:defRPr sz="2800" b="1">
                 <a:solidFill>
-                  <a:srgbClr val="8B95A5"/>
+                  <a:srgbClr val="00D4AA"/>
                 </a:solidFill>
               </a:defRPr>
             </a:pPr>
             <a:r>
-              <a:t>Build an Executive Summary Deck from Brief to Final Slides</a:t>
+              <a:t>Claude Tone Prompts</a:t>
             </a:r>
           </a:p>
         </p:txBody>
@@ -15014,16 +17057,51 @@
       <p:grpSpPr/>
       <p:sp>
         <p:nvSpPr>
-          <p:cNvPr id="2" name="Rounded Rectangle 1"/>
+          <p:cNvPr id="2" name="TextBox 1"/>
+          <p:cNvSpPr txBox="1"/>
+          <p:nvPr/>
+        </p:nvSpPr>
+        <p:spPr>
+          <a:xfrm>
+            <a:off x="457200" y="1828800"/>
+            <a:ext cx="11277295" cy="1371600"/>
+          </a:xfrm>
+          <a:prstGeom prst="rect">
+            <a:avLst/>
+          </a:prstGeom>
+          <a:noFill/>
+        </p:spPr>
+        <p:txBody>
+          <a:bodyPr wrap="none">
+            <a:spAutoFit/>
+          </a:bodyPr>
+          <a:lstStyle/>
+          <a:p>
+            <a:pPr algn="ctr">
+              <a:defRPr sz="9600" b="1">
+                <a:solidFill>
+                  <a:srgbClr val="00D4AA"/>
+                </a:solidFill>
+              </a:defRPr>
+            </a:pPr>
+            <a:r>
+              <a:t>DEMO</a:t>
+            </a:r>
+          </a:p>
+        </p:txBody>
+      </p:sp>
+      <p:sp>
+        <p:nvSpPr>
+          <p:cNvPr id="3" name="Rectangle 2"/>
           <p:cNvSpPr/>
           <p:nvPr/>
         </p:nvSpPr>
         <p:spPr>
           <a:xfrm>
-            <a:off x="457200" y="365760"/>
-            <a:ext cx="1097280" cy="457200"/>
-          </a:xfrm>
-          <a:prstGeom prst="roundRect">
+            <a:off x="4724247" y="3474720"/>
+            <a:ext cx="2743200" cy="54864"/>
+          </a:xfrm>
+          <a:prstGeom prst="rect">
             <a:avLst/>
           </a:prstGeom>
           <a:solidFill>
@@ -15057,14 +17135,14 @@
       </p:sp>
       <p:sp>
         <p:nvSpPr>
-          <p:cNvPr id="3" name="TextBox 2"/>
+          <p:cNvPr id="4" name="TextBox 3"/>
           <p:cNvSpPr txBox="1"/>
           <p:nvPr/>
         </p:nvSpPr>
         <p:spPr>
           <a:xfrm>
-            <a:off x="457200" y="429768"/>
-            <a:ext cx="1097280" cy="365760"/>
+            <a:off x="457200" y="3840480"/>
+            <a:ext cx="11277295" cy="914400"/>
           </a:xfrm>
           <a:prstGeom prst="rect">
             <a:avLst/>
@@ -15072,127 +17150,12 @@
           <a:noFill/>
         </p:spPr>
         <p:txBody>
-          <a:bodyPr wrap="none">
+          <a:bodyPr wrap="square">
             <a:spAutoFit/>
           </a:bodyPr>
           <a:lstStyle/>
           <a:p>
             <a:pPr algn="ctr">
-              <a:defRPr sz="1800" b="1">
-                <a:solidFill>
-                  <a:srgbClr val="0B0F1A"/>
-                </a:solidFill>
-              </a:defRPr>
-            </a:pPr>
-            <a:r>
-              <a:t>LAB</a:t>
-            </a:r>
-          </a:p>
-        </p:txBody>
-      </p:sp>
-      <p:sp>
-        <p:nvSpPr>
-          <p:cNvPr id="4" name="Rounded Rectangle 3"/>
-          <p:cNvSpPr/>
-          <p:nvPr/>
-        </p:nvSpPr>
-        <p:spPr>
-          <a:xfrm>
-            <a:off x="10362895" y="365760"/>
-            <a:ext cx="1371600" cy="457200"/>
-          </a:xfrm>
-          <a:prstGeom prst="roundRect">
-            <a:avLst/>
-          </a:prstGeom>
-          <a:solidFill>
-            <a:srgbClr val="141A26"/>
-          </a:solidFill>
-          <a:ln>
-            <a:solidFill>
-              <a:srgbClr val="00D4AA"/>
-            </a:solidFill>
-          </a:ln>
-        </p:spPr>
-        <p:style>
-          <a:lnRef idx="1">
-            <a:schemeClr val="accent1"/>
-          </a:lnRef>
-          <a:fillRef idx="3">
-            <a:schemeClr val="accent1"/>
-          </a:fillRef>
-          <a:effectRef idx="2">
-            <a:schemeClr val="accent1"/>
-          </a:effectRef>
-          <a:fontRef idx="minor">
-            <a:schemeClr val="lt1"/>
-          </a:fontRef>
-        </p:style>
-        <p:txBody>
-          <a:bodyPr rtlCol="0" anchor="ctr"/>
-          <a:lstStyle/>
-          <a:p>
-            <a:pPr algn="ctr"/>
-          </a:p>
-        </p:txBody>
-      </p:sp>
-      <p:sp>
-        <p:nvSpPr>
-          <p:cNvPr id="5" name="TextBox 4"/>
-          <p:cNvSpPr txBox="1"/>
-          <p:nvPr/>
-        </p:nvSpPr>
-        <p:spPr>
-          <a:xfrm>
-            <a:off x="10362895" y="429768"/>
-            <a:ext cx="1371600" cy="365760"/>
-          </a:xfrm>
-          <a:prstGeom prst="rect">
-            <a:avLst/>
-          </a:prstGeom>
-          <a:noFill/>
-        </p:spPr>
-        <p:txBody>
-          <a:bodyPr wrap="none">
-            <a:spAutoFit/>
-          </a:bodyPr>
-          <a:lstStyle/>
-          <a:p>
-            <a:pPr algn="ctr">
-              <a:defRPr sz="1400" b="1">
-                <a:solidFill>
-                  <a:srgbClr val="00D4AA"/>
-                </a:solidFill>
-              </a:defRPr>
-            </a:pPr>
-            <a:r>
-              <a:t>5 minutes</a:t>
-            </a:r>
-          </a:p>
-        </p:txBody>
-      </p:sp>
-      <p:sp>
-        <p:nvSpPr>
-          <p:cNvPr id="6" name="TextBox 5"/>
-          <p:cNvSpPr txBox="1"/>
-          <p:nvPr/>
-        </p:nvSpPr>
-        <p:spPr>
-          <a:xfrm>
-            <a:off x="457200" y="1005840"/>
-            <a:ext cx="11277295" cy="731520"/>
-          </a:xfrm>
-          <a:prstGeom prst="rect">
-            <a:avLst/>
-          </a:prstGeom>
-          <a:noFill/>
-        </p:spPr>
-        <p:txBody>
-          <a:bodyPr wrap="none">
-            <a:spAutoFit/>
-          </a:bodyPr>
-          <a:lstStyle/>
-          <a:p>
-            <a:pPr>
               <a:defRPr sz="3200" b="1">
                 <a:solidFill>
                   <a:srgbClr val="FFFFFF"/>
@@ -15200,51 +17163,8 @@
               </a:defRPr>
             </a:pPr>
             <a:r>
-              <a:t>Applied Deck Lab: Executive Summary Deck</a:t>
-            </a:r>
-          </a:p>
-        </p:txBody>
-      </p:sp>
-      <p:sp>
-        <p:nvSpPr>
-          <p:cNvPr id="7" name="Rectangle 6"/>
-          <p:cNvSpPr/>
-          <p:nvPr/>
-        </p:nvSpPr>
-        <p:spPr>
-          <a:xfrm>
-            <a:off x="457200" y="1737360"/>
-            <a:ext cx="2743200" cy="36576"/>
-          </a:xfrm>
-          <a:prstGeom prst="rect">
-            <a:avLst/>
-          </a:prstGeom>
-          <a:solidFill>
-            <a:srgbClr val="00D4AA"/>
-          </a:solidFill>
-          <a:ln>
-            <a:noFill/>
-          </a:ln>
-        </p:spPr>
-        <p:style>
-          <a:lnRef idx="1">
-            <a:schemeClr val="accent1"/>
-          </a:lnRef>
-          <a:fillRef idx="3">
-            <a:schemeClr val="accent1"/>
-          </a:fillRef>
-          <a:effectRef idx="2">
-            <a:schemeClr val="accent1"/>
-          </a:effectRef>
-          <a:fontRef idx="minor">
-            <a:schemeClr val="lt1"/>
-          </a:fontRef>
-        </p:style>
-        <p:txBody>
-          <a:bodyPr rtlCol="0" anchor="ctr"/>
-          <a:lstStyle/>
-          <a:p>
-            <a:pPr algn="ctr"/>
+              <a:t>Demo: Refining a Draft Deck</a:t>
+            </a:r>
           </a:p>
         </p:txBody>
       </p:sp>
@@ -15282,8 +17202,8 @@
         </p:nvSpPr>
         <p:spPr>
           <a:xfrm>
-            <a:off x="457200" y="365760"/>
-            <a:ext cx="11277295" cy="822960"/>
+            <a:off x="914400" y="1371600"/>
+            <a:ext cx="914400" cy="914400"/>
           </a:xfrm>
           <a:prstGeom prst="rect">
             <a:avLst/>
@@ -15297,58 +17217,50 @@
           <a:lstStyle/>
           <a:p>
             <a:pPr>
-              <a:defRPr sz="4000" b="1">
+              <a:defRPr sz="12000">
+                <a:solidFill>
+                  <a:srgbClr val="00D4AA"/>
+                </a:solidFill>
+              </a:defRPr>
+            </a:pPr>
+            <a:r>
+              <a:t>"</a:t>
+            </a:r>
+          </a:p>
+        </p:txBody>
+      </p:sp>
+      <p:sp>
+        <p:nvSpPr>
+          <p:cNvPr id="3" name="TextBox 2"/>
+          <p:cNvSpPr txBox="1"/>
+          <p:nvPr/>
+        </p:nvSpPr>
+        <p:spPr>
+          <a:xfrm>
+            <a:off x="1371600" y="2286000"/>
+            <a:ext cx="9448495" cy="2286000"/>
+          </a:xfrm>
+          <a:prstGeom prst="rect">
+            <a:avLst/>
+          </a:prstGeom>
+          <a:noFill/>
+        </p:spPr>
+        <p:txBody>
+          <a:bodyPr wrap="square">
+            <a:spAutoFit/>
+          </a:bodyPr>
+          <a:lstStyle/>
+          <a:p>
+            <a:pPr algn="ctr">
+              <a:defRPr sz="3600" i="1">
                 <a:solidFill>
                   <a:srgbClr val="FFFFFF"/>
                 </a:solidFill>
               </a:defRPr>
             </a:pPr>
             <a:r>
-              <a:t>Lab Reference: Prompt Templates</a:t>
-            </a:r>
-          </a:p>
-        </p:txBody>
-      </p:sp>
-      <p:sp>
-        <p:nvSpPr>
-          <p:cNvPr id="3" name="Rectangle 2"/>
-          <p:cNvSpPr/>
-          <p:nvPr/>
-        </p:nvSpPr>
-        <p:spPr>
-          <a:xfrm>
-            <a:off x="457200" y="1234440"/>
-            <a:ext cx="1828800" cy="36576"/>
-          </a:xfrm>
-          <a:prstGeom prst="rect">
-            <a:avLst/>
-          </a:prstGeom>
-          <a:solidFill>
-            <a:srgbClr val="00D4AA"/>
-          </a:solidFill>
-          <a:ln>
-            <a:noFill/>
-          </a:ln>
-        </p:spPr>
-        <p:style>
-          <a:lnRef idx="1">
-            <a:schemeClr val="accent1"/>
-          </a:lnRef>
-          <a:fillRef idx="3">
-            <a:schemeClr val="accent1"/>
-          </a:fillRef>
-          <a:effectRef idx="2">
-            <a:schemeClr val="accent1"/>
-          </a:effectRef>
-          <a:fontRef idx="minor">
-            <a:schemeClr val="lt1"/>
-          </a:fontRef>
-        </p:style>
-        <p:txBody>
-          <a:bodyPr rtlCol="0" anchor="ctr"/>
-          <a:lstStyle/>
-          <a:p>
-            <a:pPr algn="ctr"/>
+              <a:t>Break</a:t>
+            </a:r>
           </a:p>
         </p:txBody>
       </p:sp>
@@ -15451,7 +17363,7 @@
               </a:defRPr>
             </a:pPr>
             <a:r>
-              <a:t>Review &amp; Key Takeaways</a:t>
+              <a:t>Applied Deck Lab</a:t>
             </a:r>
           </a:p>
         </p:txBody>
@@ -15486,7 +17398,7 @@
               </a:defRPr>
             </a:pPr>
             <a:r>
-              <a:t>What You Learned and What to Do Next</a:t>
+              <a:t>Build an Executive Summary Deck from Brief to Final Slides</a:t>
             </a:r>
           </a:p>
         </p:txBody>
@@ -15519,16 +17431,16 @@
       <p:grpSpPr/>
       <p:sp>
         <p:nvSpPr>
-          <p:cNvPr id="2" name="Rectangle 1"/>
+          <p:cNvPr id="2" name="Rounded Rectangle 1"/>
           <p:cNvSpPr/>
           <p:nvPr/>
         </p:nvSpPr>
         <p:spPr>
           <a:xfrm>
-            <a:off x="0" y="1188720"/>
-            <a:ext cx="91440" cy="5029200"/>
-          </a:xfrm>
-          <a:prstGeom prst="rect">
+            <a:off x="457200" y="365760"/>
+            <a:ext cx="1097280" cy="457200"/>
+          </a:xfrm>
+          <a:prstGeom prst="roundRect">
             <a:avLst/>
           </a:prstGeom>
           <a:solidFill>
@@ -15568,8 +17480,8 @@
         </p:nvSpPr>
         <p:spPr>
           <a:xfrm>
-            <a:off x="457200" y="365760"/>
-            <a:ext cx="11277295" cy="822960"/>
+            <a:off x="457200" y="429768"/>
+            <a:ext cx="1097280" cy="365760"/>
           </a:xfrm>
           <a:prstGeom prst="rect">
             <a:avLst/>
@@ -15582,16 +17494,174 @@
           </a:bodyPr>
           <a:lstStyle/>
           <a:p>
+            <a:pPr algn="ctr">
+              <a:defRPr sz="1800" b="1">
+                <a:solidFill>
+                  <a:srgbClr val="0B0F1A"/>
+                </a:solidFill>
+              </a:defRPr>
+            </a:pPr>
+            <a:r>
+              <a:t>LAB</a:t>
+            </a:r>
+          </a:p>
+        </p:txBody>
+      </p:sp>
+      <p:sp>
+        <p:nvSpPr>
+          <p:cNvPr id="4" name="Rounded Rectangle 3"/>
+          <p:cNvSpPr/>
+          <p:nvPr/>
+        </p:nvSpPr>
+        <p:spPr>
+          <a:xfrm>
+            <a:off x="10362895" y="365760"/>
+            <a:ext cx="1371600" cy="457200"/>
+          </a:xfrm>
+          <a:prstGeom prst="roundRect">
+            <a:avLst/>
+          </a:prstGeom>
+          <a:solidFill>
+            <a:srgbClr val="141A26"/>
+          </a:solidFill>
+          <a:ln>
+            <a:solidFill>
+              <a:srgbClr val="00D4AA"/>
+            </a:solidFill>
+          </a:ln>
+        </p:spPr>
+        <p:style>
+          <a:lnRef idx="1">
+            <a:schemeClr val="accent1"/>
+          </a:lnRef>
+          <a:fillRef idx="3">
+            <a:schemeClr val="accent1"/>
+          </a:fillRef>
+          <a:effectRef idx="2">
+            <a:schemeClr val="accent1"/>
+          </a:effectRef>
+          <a:fontRef idx="minor">
+            <a:schemeClr val="lt1"/>
+          </a:fontRef>
+        </p:style>
+        <p:txBody>
+          <a:bodyPr rtlCol="0" anchor="ctr"/>
+          <a:lstStyle/>
+          <a:p>
+            <a:pPr algn="ctr"/>
+          </a:p>
+        </p:txBody>
+      </p:sp>
+      <p:sp>
+        <p:nvSpPr>
+          <p:cNvPr id="5" name="TextBox 4"/>
+          <p:cNvSpPr txBox="1"/>
+          <p:nvPr/>
+        </p:nvSpPr>
+        <p:spPr>
+          <a:xfrm>
+            <a:off x="10362895" y="429768"/>
+            <a:ext cx="1371600" cy="365760"/>
+          </a:xfrm>
+          <a:prstGeom prst="rect">
+            <a:avLst/>
+          </a:prstGeom>
+          <a:noFill/>
+        </p:spPr>
+        <p:txBody>
+          <a:bodyPr wrap="none">
+            <a:spAutoFit/>
+          </a:bodyPr>
+          <a:lstStyle/>
+          <a:p>
+            <a:pPr algn="ctr">
+              <a:defRPr sz="1400" b="1">
+                <a:solidFill>
+                  <a:srgbClr val="00D4AA"/>
+                </a:solidFill>
+              </a:defRPr>
+            </a:pPr>
+            <a:r>
+              <a:t>5 minutes</a:t>
+            </a:r>
+          </a:p>
+        </p:txBody>
+      </p:sp>
+      <p:sp>
+        <p:nvSpPr>
+          <p:cNvPr id="6" name="TextBox 5"/>
+          <p:cNvSpPr txBox="1"/>
+          <p:nvPr/>
+        </p:nvSpPr>
+        <p:spPr>
+          <a:xfrm>
+            <a:off x="457200" y="1005840"/>
+            <a:ext cx="11277295" cy="731520"/>
+          </a:xfrm>
+          <a:prstGeom prst="rect">
+            <a:avLst/>
+          </a:prstGeom>
+          <a:noFill/>
+        </p:spPr>
+        <p:txBody>
+          <a:bodyPr wrap="none">
+            <a:spAutoFit/>
+          </a:bodyPr>
+          <a:lstStyle/>
+          <a:p>
             <a:pPr>
-              <a:defRPr sz="4000" b="1">
+              <a:defRPr sz="3200" b="1">
                 <a:solidFill>
                   <a:srgbClr val="FFFFFF"/>
                 </a:solidFill>
               </a:defRPr>
             </a:pPr>
             <a:r>
-              <a:t>Your Executive Communication Toolkit</a:t>
-            </a:r>
+              <a:t>Applied Deck Lab: Executive Summary Deck</a:t>
+            </a:r>
+          </a:p>
+        </p:txBody>
+      </p:sp>
+      <p:sp>
+        <p:nvSpPr>
+          <p:cNvPr id="7" name="Rectangle 6"/>
+          <p:cNvSpPr/>
+          <p:nvPr/>
+        </p:nvSpPr>
+        <p:spPr>
+          <a:xfrm>
+            <a:off x="457200" y="1737360"/>
+            <a:ext cx="2743200" cy="36576"/>
+          </a:xfrm>
+          <a:prstGeom prst="rect">
+            <a:avLst/>
+          </a:prstGeom>
+          <a:solidFill>
+            <a:srgbClr val="00D4AA"/>
+          </a:solidFill>
+          <a:ln>
+            <a:noFill/>
+          </a:ln>
+        </p:spPr>
+        <p:style>
+          <a:lnRef idx="1">
+            <a:schemeClr val="accent1"/>
+          </a:lnRef>
+          <a:fillRef idx="3">
+            <a:schemeClr val="accent1"/>
+          </a:fillRef>
+          <a:effectRef idx="2">
+            <a:schemeClr val="accent1"/>
+          </a:effectRef>
+          <a:fontRef idx="minor">
+            <a:schemeClr val="lt1"/>
+          </a:fontRef>
+        </p:style>
+        <p:txBody>
+          <a:bodyPr rtlCol="0" anchor="ctr"/>
+          <a:lstStyle/>
+          <a:p>
+            <a:pPr algn="ctr"/>
           </a:p>
         </p:txBody>
       </p:sp>
@@ -15629,8 +17699,8 @@
         </p:nvSpPr>
         <p:spPr>
           <a:xfrm>
-            <a:off x="457200" y="731520"/>
-            <a:ext cx="11277295" cy="914400"/>
+            <a:off x="457200" y="365760"/>
+            <a:ext cx="11277295" cy="822960"/>
           </a:xfrm>
           <a:prstGeom prst="rect">
             <a:avLst/>
@@ -15643,7 +17713,7 @@
           </a:bodyPr>
           <a:lstStyle/>
           <a:p>
-            <a:pPr algn="ctr">
+            <a:pPr>
               <a:defRPr sz="4000" b="1">
                 <a:solidFill>
                   <a:srgbClr val="FFFFFF"/>
@@ -15651,68 +17721,23 @@
               </a:defRPr>
             </a:pPr>
             <a:r>
-              <a:t>After Today: Your Action Plan</a:t>
-            </a:r>
-          </a:p>
-        </p:txBody>
-      </p:sp>
-      <p:sp>
-        <p:nvSpPr>
-          <p:cNvPr id="3" name="Rounded Rectangle 2"/>
+              <a:t>Lab Reference: Prompt Templates</a:t>
+            </a:r>
+          </a:p>
+        </p:txBody>
+      </p:sp>
+      <p:sp>
+        <p:nvSpPr>
+          <p:cNvPr id="3" name="Rectangle 2"/>
           <p:cNvSpPr/>
           <p:nvPr/>
         </p:nvSpPr>
         <p:spPr>
           <a:xfrm>
-            <a:off x="2301087" y="2011680"/>
-            <a:ext cx="2286000" cy="3200400"/>
-          </a:xfrm>
-          <a:prstGeom prst="roundRect">
-            <a:avLst/>
-          </a:prstGeom>
-          <a:solidFill>
-            <a:srgbClr val="141A26"/>
-          </a:solidFill>
-          <a:ln w="25400">
-            <a:solidFill>
-              <a:srgbClr val="00D4AA"/>
-            </a:solidFill>
-          </a:ln>
-        </p:spPr>
-        <p:style>
-          <a:lnRef idx="1">
-            <a:schemeClr val="accent1"/>
-          </a:lnRef>
-          <a:fillRef idx="3">
-            <a:schemeClr val="accent1"/>
-          </a:fillRef>
-          <a:effectRef idx="2">
-            <a:schemeClr val="accent1"/>
-          </a:effectRef>
-          <a:fontRef idx="minor">
-            <a:schemeClr val="lt1"/>
-          </a:fontRef>
-        </p:style>
-        <p:txBody>
-          <a:bodyPr rtlCol="0" anchor="ctr"/>
-          <a:lstStyle/>
-          <a:p>
-            <a:pPr algn="ctr"/>
-          </a:p>
-        </p:txBody>
-      </p:sp>
-      <p:sp>
-        <p:nvSpPr>
-          <p:cNvPr id="4" name="Oval 3"/>
-          <p:cNvSpPr/>
-          <p:nvPr/>
-        </p:nvSpPr>
-        <p:spPr>
-          <a:xfrm>
-            <a:off x="2986887" y="2468880"/>
-            <a:ext cx="914400" cy="914400"/>
-          </a:xfrm>
-          <a:prstGeom prst="ellipse">
+            <a:off x="457200" y="1234440"/>
+            <a:ext cx="1828800" cy="36576"/>
+          </a:xfrm>
+          <a:prstGeom prst="rect">
             <a:avLst/>
           </a:prstGeom>
           <a:solidFill>
@@ -15741,383 +17766,6 @@
           <a:lstStyle/>
           <a:p>
             <a:pPr algn="ctr"/>
-          </a:p>
-        </p:txBody>
-      </p:sp>
-      <p:sp>
-        <p:nvSpPr>
-          <p:cNvPr id="5" name="TextBox 4"/>
-          <p:cNvSpPr txBox="1"/>
-          <p:nvPr/>
-        </p:nvSpPr>
-        <p:spPr>
-          <a:xfrm>
-            <a:off x="2986887" y="2468880"/>
-            <a:ext cx="914400" cy="914400"/>
-          </a:xfrm>
-          <a:prstGeom prst="rect">
-            <a:avLst/>
-          </a:prstGeom>
-          <a:noFill/>
-        </p:spPr>
-        <p:txBody>
-          <a:bodyPr wrap="none" anchor="ctr">
-            <a:spAutoFit/>
-          </a:bodyPr>
-          <a:lstStyle/>
-          <a:p>
-            <a:pPr algn="ctr">
-              <a:defRPr sz="3600" b="1">
-                <a:solidFill>
-                  <a:srgbClr val="0B0F1A"/>
-                </a:solidFill>
-              </a:defRPr>
-            </a:pPr>
-            <a:r>
-              <a:t>📅</a:t>
-            </a:r>
-          </a:p>
-        </p:txBody>
-      </p:sp>
-      <p:sp>
-        <p:nvSpPr>
-          <p:cNvPr id="6" name="TextBox 5"/>
-          <p:cNvSpPr txBox="1"/>
-          <p:nvPr/>
-        </p:nvSpPr>
-        <p:spPr>
-          <a:xfrm>
-            <a:off x="2392527" y="3657600"/>
-            <a:ext cx="2103120" cy="1371600"/>
-          </a:xfrm>
-          <a:prstGeom prst="rect">
-            <a:avLst/>
-          </a:prstGeom>
-          <a:noFill/>
-        </p:spPr>
-        <p:txBody>
-          <a:bodyPr wrap="square">
-            <a:normAutofit/>
-          </a:bodyPr>
-          <a:lstStyle/>
-          <a:p>
-            <a:pPr algn="ctr">
-              <a:defRPr sz="2000" b="1">
-                <a:solidFill>
-                  <a:srgbClr val="FFFFFF"/>
-                </a:solidFill>
-              </a:defRPr>
-            </a:pPr>
-          </a:p>
-        </p:txBody>
-      </p:sp>
-      <p:sp>
-        <p:nvSpPr>
-          <p:cNvPr id="7" name="Rounded Rectangle 6"/>
-          <p:cNvSpPr/>
-          <p:nvPr/>
-        </p:nvSpPr>
-        <p:spPr>
-          <a:xfrm>
-            <a:off x="4952847" y="2011680"/>
-            <a:ext cx="2286000" cy="3200400"/>
-          </a:xfrm>
-          <a:prstGeom prst="roundRect">
-            <a:avLst/>
-          </a:prstGeom>
-          <a:solidFill>
-            <a:srgbClr val="141A26"/>
-          </a:solidFill>
-          <a:ln w="25400">
-            <a:solidFill>
-              <a:srgbClr val="E86B4A"/>
-            </a:solidFill>
-          </a:ln>
-        </p:spPr>
-        <p:style>
-          <a:lnRef idx="1">
-            <a:schemeClr val="accent1"/>
-          </a:lnRef>
-          <a:fillRef idx="3">
-            <a:schemeClr val="accent1"/>
-          </a:fillRef>
-          <a:effectRef idx="2">
-            <a:schemeClr val="accent1"/>
-          </a:effectRef>
-          <a:fontRef idx="minor">
-            <a:schemeClr val="lt1"/>
-          </a:fontRef>
-        </p:style>
-        <p:txBody>
-          <a:bodyPr rtlCol="0" anchor="ctr"/>
-          <a:lstStyle/>
-          <a:p>
-            <a:pPr algn="ctr"/>
-          </a:p>
-        </p:txBody>
-      </p:sp>
-      <p:sp>
-        <p:nvSpPr>
-          <p:cNvPr id="8" name="Oval 7"/>
-          <p:cNvSpPr/>
-          <p:nvPr/>
-        </p:nvSpPr>
-        <p:spPr>
-          <a:xfrm>
-            <a:off x="5638647" y="2468880"/>
-            <a:ext cx="914400" cy="914400"/>
-          </a:xfrm>
-          <a:prstGeom prst="ellipse">
-            <a:avLst/>
-          </a:prstGeom>
-          <a:solidFill>
-            <a:srgbClr val="E86B4A"/>
-          </a:solidFill>
-          <a:ln>
-            <a:noFill/>
-          </a:ln>
-        </p:spPr>
-        <p:style>
-          <a:lnRef idx="1">
-            <a:schemeClr val="accent1"/>
-          </a:lnRef>
-          <a:fillRef idx="3">
-            <a:schemeClr val="accent1"/>
-          </a:fillRef>
-          <a:effectRef idx="2">
-            <a:schemeClr val="accent1"/>
-          </a:effectRef>
-          <a:fontRef idx="minor">
-            <a:schemeClr val="lt1"/>
-          </a:fontRef>
-        </p:style>
-        <p:txBody>
-          <a:bodyPr rtlCol="0" anchor="ctr"/>
-          <a:lstStyle/>
-          <a:p>
-            <a:pPr algn="ctr"/>
-          </a:p>
-        </p:txBody>
-      </p:sp>
-      <p:sp>
-        <p:nvSpPr>
-          <p:cNvPr id="9" name="TextBox 8"/>
-          <p:cNvSpPr txBox="1"/>
-          <p:nvPr/>
-        </p:nvSpPr>
-        <p:spPr>
-          <a:xfrm>
-            <a:off x="5638647" y="2468880"/>
-            <a:ext cx="914400" cy="914400"/>
-          </a:xfrm>
-          <a:prstGeom prst="rect">
-            <a:avLst/>
-          </a:prstGeom>
-          <a:noFill/>
-        </p:spPr>
-        <p:txBody>
-          <a:bodyPr wrap="none" anchor="ctr">
-            <a:spAutoFit/>
-          </a:bodyPr>
-          <a:lstStyle/>
-          <a:p>
-            <a:pPr algn="ctr">
-              <a:defRPr sz="3600" b="1">
-                <a:solidFill>
-                  <a:srgbClr val="0B0F1A"/>
-                </a:solidFill>
-              </a:defRPr>
-            </a:pPr>
-            <a:r>
-              <a:t>📈</a:t>
-            </a:r>
-          </a:p>
-        </p:txBody>
-      </p:sp>
-      <p:sp>
-        <p:nvSpPr>
-          <p:cNvPr id="10" name="TextBox 9"/>
-          <p:cNvSpPr txBox="1"/>
-          <p:nvPr/>
-        </p:nvSpPr>
-        <p:spPr>
-          <a:xfrm>
-            <a:off x="5044287" y="3657600"/>
-            <a:ext cx="2103120" cy="1371600"/>
-          </a:xfrm>
-          <a:prstGeom prst="rect">
-            <a:avLst/>
-          </a:prstGeom>
-          <a:noFill/>
-        </p:spPr>
-        <p:txBody>
-          <a:bodyPr wrap="square">
-            <a:normAutofit/>
-          </a:bodyPr>
-          <a:lstStyle/>
-          <a:p>
-            <a:pPr algn="ctr">
-              <a:defRPr sz="2000" b="1">
-                <a:solidFill>
-                  <a:srgbClr val="FFFFFF"/>
-                </a:solidFill>
-              </a:defRPr>
-            </a:pPr>
-          </a:p>
-        </p:txBody>
-      </p:sp>
-      <p:sp>
-        <p:nvSpPr>
-          <p:cNvPr id="11" name="Rounded Rectangle 10"/>
-          <p:cNvSpPr/>
-          <p:nvPr/>
-        </p:nvSpPr>
-        <p:spPr>
-          <a:xfrm>
-            <a:off x="7604607" y="2011680"/>
-            <a:ext cx="2286000" cy="3200400"/>
-          </a:xfrm>
-          <a:prstGeom prst="roundRect">
-            <a:avLst/>
-          </a:prstGeom>
-          <a:solidFill>
-            <a:srgbClr val="141A26"/>
-          </a:solidFill>
-          <a:ln w="25400">
-            <a:solidFill>
-              <a:srgbClr val="F59E0B"/>
-            </a:solidFill>
-          </a:ln>
-        </p:spPr>
-        <p:style>
-          <a:lnRef idx="1">
-            <a:schemeClr val="accent1"/>
-          </a:lnRef>
-          <a:fillRef idx="3">
-            <a:schemeClr val="accent1"/>
-          </a:fillRef>
-          <a:effectRef idx="2">
-            <a:schemeClr val="accent1"/>
-          </a:effectRef>
-          <a:fontRef idx="minor">
-            <a:schemeClr val="lt1"/>
-          </a:fontRef>
-        </p:style>
-        <p:txBody>
-          <a:bodyPr rtlCol="0" anchor="ctr"/>
-          <a:lstStyle/>
-          <a:p>
-            <a:pPr algn="ctr"/>
-          </a:p>
-        </p:txBody>
-      </p:sp>
-      <p:sp>
-        <p:nvSpPr>
-          <p:cNvPr id="12" name="Oval 11"/>
-          <p:cNvSpPr/>
-          <p:nvPr/>
-        </p:nvSpPr>
-        <p:spPr>
-          <a:xfrm>
-            <a:off x="8290407" y="2468880"/>
-            <a:ext cx="914400" cy="914400"/>
-          </a:xfrm>
-          <a:prstGeom prst="ellipse">
-            <a:avLst/>
-          </a:prstGeom>
-          <a:solidFill>
-            <a:srgbClr val="F59E0B"/>
-          </a:solidFill>
-          <a:ln>
-            <a:noFill/>
-          </a:ln>
-        </p:spPr>
-        <p:style>
-          <a:lnRef idx="1">
-            <a:schemeClr val="accent1"/>
-          </a:lnRef>
-          <a:fillRef idx="3">
-            <a:schemeClr val="accent1"/>
-          </a:fillRef>
-          <a:effectRef idx="2">
-            <a:schemeClr val="accent1"/>
-          </a:effectRef>
-          <a:fontRef idx="minor">
-            <a:schemeClr val="lt1"/>
-          </a:fontRef>
-        </p:style>
-        <p:txBody>
-          <a:bodyPr rtlCol="0" anchor="ctr"/>
-          <a:lstStyle/>
-          <a:p>
-            <a:pPr algn="ctr"/>
-          </a:p>
-        </p:txBody>
-      </p:sp>
-      <p:sp>
-        <p:nvSpPr>
-          <p:cNvPr id="13" name="TextBox 12"/>
-          <p:cNvSpPr txBox="1"/>
-          <p:nvPr/>
-        </p:nvSpPr>
-        <p:spPr>
-          <a:xfrm>
-            <a:off x="8290407" y="2468880"/>
-            <a:ext cx="914400" cy="914400"/>
-          </a:xfrm>
-          <a:prstGeom prst="rect">
-            <a:avLst/>
-          </a:prstGeom>
-          <a:noFill/>
-        </p:spPr>
-        <p:txBody>
-          <a:bodyPr wrap="none" anchor="ctr">
-            <a:spAutoFit/>
-          </a:bodyPr>
-          <a:lstStyle/>
-          <a:p>
-            <a:pPr algn="ctr">
-              <a:defRPr sz="3600" b="1">
-                <a:solidFill>
-                  <a:srgbClr val="0B0F1A"/>
-                </a:solidFill>
-              </a:defRPr>
-            </a:pPr>
-            <a:r>
-              <a:t>🚀</a:t>
-            </a:r>
-          </a:p>
-        </p:txBody>
-      </p:sp>
-      <p:sp>
-        <p:nvSpPr>
-          <p:cNvPr id="14" name="TextBox 13"/>
-          <p:cNvSpPr txBox="1"/>
-          <p:nvPr/>
-        </p:nvSpPr>
-        <p:spPr>
-          <a:xfrm>
-            <a:off x="7696047" y="3657600"/>
-            <a:ext cx="2103120" cy="1371600"/>
-          </a:xfrm>
-          <a:prstGeom prst="rect">
-            <a:avLst/>
-          </a:prstGeom>
-          <a:noFill/>
-        </p:spPr>
-        <p:txBody>
-          <a:bodyPr wrap="square">
-            <a:normAutofit/>
-          </a:bodyPr>
-          <a:lstStyle/>
-          <a:p>
-            <a:pPr algn="ctr">
-              <a:defRPr sz="2000" b="1">
-                <a:solidFill>
-                  <a:srgbClr val="FFFFFF"/>
-                </a:solidFill>
-              </a:defRPr>
-            </a:pPr>
           </a:p>
         </p:txBody>
       </p:sp>
@@ -16155,8 +17803,8 @@
         </p:nvSpPr>
         <p:spPr>
           <a:xfrm>
-            <a:off x="731520" y="2286000"/>
-            <a:ext cx="10728655" cy="1371600"/>
+            <a:off x="457200" y="457200"/>
+            <a:ext cx="11277295" cy="731520"/>
           </a:xfrm>
           <a:prstGeom prst="rect">
             <a:avLst/>
@@ -16164,38 +17812,77 @@
           <a:noFill/>
         </p:spPr>
         <p:txBody>
-          <a:bodyPr wrap="square">
+          <a:bodyPr wrap="none">
             <a:spAutoFit/>
           </a:bodyPr>
           <a:lstStyle/>
           <a:p>
             <a:pPr algn="ctr">
-              <a:defRPr sz="5200" b="1">
+              <a:defRPr sz="3600" b="1">
                 <a:solidFill>
                   <a:srgbClr val="FFFFFF"/>
                 </a:solidFill>
               </a:defRPr>
             </a:pPr>
             <a:r>
-              <a:t>Great presentations aren't about great slides.</a:t>
-            </a:r>
-            <a:br/>
-            <a:r>
-              <a:t>They're about great thinking made visible.</a:t>
-            </a:r>
-          </a:p>
-        </p:txBody>
-      </p:sp>
-      <p:sp>
-        <p:nvSpPr>
-          <p:cNvPr id="3" name="TextBox 2"/>
+              <a:t>The Real ROI: Beyond Time Savings</a:t>
+            </a:r>
+          </a:p>
+        </p:txBody>
+      </p:sp>
+      <p:sp>
+        <p:nvSpPr>
+          <p:cNvPr id="3" name="Rectangle 2"/>
+          <p:cNvSpPr/>
+          <p:nvPr/>
+        </p:nvSpPr>
+        <p:spPr>
+          <a:xfrm>
+            <a:off x="6077559" y="1371600"/>
+            <a:ext cx="36576" cy="4572000"/>
+          </a:xfrm>
+          <a:prstGeom prst="rect">
+            <a:avLst/>
+          </a:prstGeom>
+          <a:solidFill>
+            <a:srgbClr val="00D4AA"/>
+          </a:solidFill>
+          <a:ln>
+            <a:noFill/>
+          </a:ln>
+        </p:spPr>
+        <p:style>
+          <a:lnRef idx="1">
+            <a:schemeClr val="accent1"/>
+          </a:lnRef>
+          <a:fillRef idx="3">
+            <a:schemeClr val="accent1"/>
+          </a:fillRef>
+          <a:effectRef idx="2">
+            <a:schemeClr val="accent1"/>
+          </a:effectRef>
+          <a:fontRef idx="minor">
+            <a:schemeClr val="lt1"/>
+          </a:fontRef>
+        </p:style>
+        <p:txBody>
+          <a:bodyPr rtlCol="0" anchor="ctr"/>
+          <a:lstStyle/>
+          <a:p>
+            <a:pPr algn="ctr"/>
+          </a:p>
+        </p:txBody>
+      </p:sp>
+      <p:sp>
+        <p:nvSpPr>
+          <p:cNvPr id="4" name="TextBox 3"/>
           <p:cNvSpPr txBox="1"/>
           <p:nvPr/>
         </p:nvSpPr>
         <p:spPr>
           <a:xfrm>
-            <a:off x="914400" y="3840480"/>
-            <a:ext cx="10362895" cy="914400"/>
+            <a:off x="457200" y="1463040"/>
+            <a:ext cx="5364327" cy="731520"/>
           </a:xfrm>
           <a:prstGeom prst="rect">
             <a:avLst/>
@@ -16203,20 +17890,55 @@
           <a:noFill/>
         </p:spPr>
         <p:txBody>
-          <a:bodyPr wrap="square">
+          <a:bodyPr wrap="none">
             <a:spAutoFit/>
           </a:bodyPr>
           <a:lstStyle/>
           <a:p>
             <a:pPr algn="ctr">
-              <a:defRPr sz="2400">
+              <a:defRPr sz="2800" b="1">
                 <a:solidFill>
-                  <a:srgbClr val="8B95A5"/>
+                  <a:srgbClr val="E86B4A"/>
                 </a:solidFill>
               </a:defRPr>
             </a:pPr>
             <a:r>
-              <a:t>Claude accelerates the visibility. The thinking is still yours.</a:t>
+              <a:t>The Numbers</a:t>
+            </a:r>
+          </a:p>
+        </p:txBody>
+      </p:sp>
+      <p:sp>
+        <p:nvSpPr>
+          <p:cNvPr id="5" name="TextBox 4"/>
+          <p:cNvSpPr txBox="1"/>
+          <p:nvPr/>
+        </p:nvSpPr>
+        <p:spPr>
+          <a:xfrm>
+            <a:off x="6370167" y="1463040"/>
+            <a:ext cx="5364327" cy="731520"/>
+          </a:xfrm>
+          <a:prstGeom prst="rect">
+            <a:avLst/>
+          </a:prstGeom>
+          <a:noFill/>
+        </p:spPr>
+        <p:txBody>
+          <a:bodyPr wrap="none">
+            <a:spAutoFit/>
+          </a:bodyPr>
+          <a:lstStyle/>
+          <a:p>
+            <a:pPr algn="ctr">
+              <a:defRPr sz="2800" b="1">
+                <a:solidFill>
+                  <a:srgbClr val="00D4AA"/>
+                </a:solidFill>
+              </a:defRPr>
+            </a:pPr>
+            <a:r>
+              <a:t>The Hidden Value</a:t>
             </a:r>
           </a:p>
         </p:txBody>
@@ -16249,49 +17971,14 @@
       <p:grpSpPr/>
       <p:sp>
         <p:nvSpPr>
-          <p:cNvPr id="2" name="TextBox 1"/>
-          <p:cNvSpPr txBox="1"/>
-          <p:nvPr/>
-        </p:nvSpPr>
-        <p:spPr>
-          <a:xfrm>
-            <a:off x="457200" y="2286000"/>
-            <a:ext cx="11277295" cy="2286000"/>
-          </a:xfrm>
-          <a:prstGeom prst="rect">
-            <a:avLst/>
-          </a:prstGeom>
-          <a:noFill/>
-        </p:spPr>
-        <p:txBody>
-          <a:bodyPr wrap="square">
-            <a:spAutoFit/>
-          </a:bodyPr>
-          <a:lstStyle/>
-          <a:p>
-            <a:pPr algn="ctr">
-              <a:defRPr sz="8000" b="1">
-                <a:solidFill>
-                  <a:srgbClr val="00D4AA"/>
-                </a:solidFill>
-              </a:defRPr>
-            </a:pPr>
-            <a:r>
-              <a:t>Session 3 Complete</a:t>
-            </a:r>
-          </a:p>
-        </p:txBody>
-      </p:sp>
-      <p:sp>
-        <p:nvSpPr>
-          <p:cNvPr id="3" name="Rectangle 2"/>
+          <p:cNvPr id="2" name="Rectangle 1"/>
           <p:cNvSpPr/>
           <p:nvPr/>
         </p:nvSpPr>
         <p:spPr>
           <a:xfrm>
-            <a:off x="0" y="4754880"/>
-            <a:ext cx="12191695" cy="36576"/>
+            <a:off x="0" y="1828800"/>
+            <a:ext cx="137160" cy="3200400"/>
           </a:xfrm>
           <a:prstGeom prst="rect">
             <a:avLst/>
@@ -16327,14 +18014,49 @@
       </p:sp>
       <p:sp>
         <p:nvSpPr>
+          <p:cNvPr id="3" name="TextBox 2"/>
+          <p:cNvSpPr txBox="1"/>
+          <p:nvPr/>
+        </p:nvSpPr>
+        <p:spPr>
+          <a:xfrm>
+            <a:off x="457200" y="2286000"/>
+            <a:ext cx="11277295" cy="1371600"/>
+          </a:xfrm>
+          <a:prstGeom prst="rect">
+            <a:avLst/>
+          </a:prstGeom>
+          <a:noFill/>
+        </p:spPr>
+        <p:txBody>
+          <a:bodyPr wrap="square">
+            <a:spAutoFit/>
+          </a:bodyPr>
+          <a:lstStyle/>
+          <a:p>
+            <a:pPr>
+              <a:defRPr sz="5600" b="1">
+                <a:solidFill>
+                  <a:srgbClr val="FFFFFF"/>
+                </a:solidFill>
+              </a:defRPr>
+            </a:pPr>
+            <a:r>
+              <a:t>Review &amp; Key Takeaways</a:t>
+            </a:r>
+          </a:p>
+        </p:txBody>
+      </p:sp>
+      <p:sp>
+        <p:nvSpPr>
           <p:cNvPr id="4" name="TextBox 3"/>
           <p:cNvSpPr txBox="1"/>
           <p:nvPr/>
         </p:nvSpPr>
         <p:spPr>
           <a:xfrm>
-            <a:off x="457200" y="5029200"/>
-            <a:ext cx="11277295" cy="457200"/>
+            <a:off x="457200" y="3840480"/>
+            <a:ext cx="11277295" cy="914400"/>
           </a:xfrm>
           <a:prstGeom prst="rect">
             <a:avLst/>
@@ -16342,21 +18064,651 @@
           <a:noFill/>
         </p:spPr>
         <p:txBody>
-          <a:bodyPr wrap="none">
+          <a:bodyPr wrap="square">
             <a:spAutoFit/>
           </a:bodyPr>
           <a:lstStyle/>
           <a:p>
-            <a:pPr algn="r">
-              <a:defRPr sz="2000">
+            <a:pPr>
+              <a:defRPr sz="2400">
                 <a:solidFill>
                   <a:srgbClr val="8B95A5"/>
                 </a:solidFill>
               </a:defRPr>
             </a:pPr>
             <a:r>
-              <a:t>- © 2026 AIA Copilot</a:t>
-            </a:r>
+              <a:t>What You Learned and What to Do Next</a:t>
+            </a:r>
+          </a:p>
+        </p:txBody>
+      </p:sp>
+    </p:spTree>
+  </p:cSld>
+  <p:clrMapOvr>
+    <a:masterClrMapping/>
+  </p:clrMapOvr>
+</p:sld>
+</file>
+
+<file path=ppt/slides/slide38.xml><?xml version="1.0" encoding="utf-8"?>
+<p:sld xmlns:a="http://schemas.openxmlformats.org/drawingml/2006/main" xmlns:p="http://schemas.openxmlformats.org/presentationml/2006/main" xmlns:r="http://schemas.openxmlformats.org/officeDocument/2006/relationships">
+  <p:cSld>
+    <p:bg>
+      <p:bgPr>
+        <a:solidFill>
+          <a:srgbClr val="0B0F1A"/>
+        </a:solidFill>
+        <a:effectLst/>
+      </p:bgPr>
+    </p:bg>
+    <p:spTree>
+      <p:nvGrpSpPr>
+        <p:cNvPr id="1" name=""/>
+        <p:cNvGrpSpPr/>
+        <p:nvPr/>
+      </p:nvGrpSpPr>
+      <p:grpSpPr/>
+      <p:sp>
+        <p:nvSpPr>
+          <p:cNvPr id="2" name="Rectangle 1"/>
+          <p:cNvSpPr/>
+          <p:nvPr/>
+        </p:nvSpPr>
+        <p:spPr>
+          <a:xfrm>
+            <a:off x="0" y="1188720"/>
+            <a:ext cx="91440" cy="5029200"/>
+          </a:xfrm>
+          <a:prstGeom prst="rect">
+            <a:avLst/>
+          </a:prstGeom>
+          <a:solidFill>
+            <a:srgbClr val="00D4AA"/>
+          </a:solidFill>
+          <a:ln>
+            <a:noFill/>
+          </a:ln>
+        </p:spPr>
+        <p:style>
+          <a:lnRef idx="1">
+            <a:schemeClr val="accent1"/>
+          </a:lnRef>
+          <a:fillRef idx="3">
+            <a:schemeClr val="accent1"/>
+          </a:fillRef>
+          <a:effectRef idx="2">
+            <a:schemeClr val="accent1"/>
+          </a:effectRef>
+          <a:fontRef idx="minor">
+            <a:schemeClr val="lt1"/>
+          </a:fontRef>
+        </p:style>
+        <p:txBody>
+          <a:bodyPr rtlCol="0" anchor="ctr"/>
+          <a:lstStyle/>
+          <a:p>
+            <a:pPr algn="ctr"/>
+          </a:p>
+        </p:txBody>
+      </p:sp>
+      <p:sp>
+        <p:nvSpPr>
+          <p:cNvPr id="3" name="TextBox 2"/>
+          <p:cNvSpPr txBox="1"/>
+          <p:nvPr/>
+        </p:nvSpPr>
+        <p:spPr>
+          <a:xfrm>
+            <a:off x="457200" y="365760"/>
+            <a:ext cx="11277295" cy="822960"/>
+          </a:xfrm>
+          <a:prstGeom prst="rect">
+            <a:avLst/>
+          </a:prstGeom>
+          <a:noFill/>
+        </p:spPr>
+        <p:txBody>
+          <a:bodyPr wrap="none">
+            <a:spAutoFit/>
+          </a:bodyPr>
+          <a:lstStyle/>
+          <a:p>
+            <a:pPr>
+              <a:defRPr sz="4000" b="1">
+                <a:solidFill>
+                  <a:srgbClr val="FFFFFF"/>
+                </a:solidFill>
+              </a:defRPr>
+            </a:pPr>
+            <a:r>
+              <a:t>Your Executive Communication Toolkit</a:t>
+            </a:r>
+          </a:p>
+        </p:txBody>
+      </p:sp>
+    </p:spTree>
+  </p:cSld>
+  <p:clrMapOvr>
+    <a:masterClrMapping/>
+  </p:clrMapOvr>
+</p:sld>
+</file>
+
+<file path=ppt/slides/slide39.xml><?xml version="1.0" encoding="utf-8"?>
+<p:sld xmlns:a="http://schemas.openxmlformats.org/drawingml/2006/main" xmlns:p="http://schemas.openxmlformats.org/presentationml/2006/main" xmlns:r="http://schemas.openxmlformats.org/officeDocument/2006/relationships">
+  <p:cSld>
+    <p:bg>
+      <p:bgPr>
+        <a:solidFill>
+          <a:srgbClr val="0B0F1A"/>
+        </a:solidFill>
+        <a:effectLst/>
+      </p:bgPr>
+    </p:bg>
+    <p:spTree>
+      <p:nvGrpSpPr>
+        <p:cNvPr id="1" name=""/>
+        <p:cNvGrpSpPr/>
+        <p:nvPr/>
+      </p:nvGrpSpPr>
+      <p:grpSpPr/>
+      <p:sp>
+        <p:nvSpPr>
+          <p:cNvPr id="2" name="TextBox 1"/>
+          <p:cNvSpPr txBox="1"/>
+          <p:nvPr/>
+        </p:nvSpPr>
+        <p:spPr>
+          <a:xfrm>
+            <a:off x="457200" y="731520"/>
+            <a:ext cx="11277295" cy="914400"/>
+          </a:xfrm>
+          <a:prstGeom prst="rect">
+            <a:avLst/>
+          </a:prstGeom>
+          <a:noFill/>
+        </p:spPr>
+        <p:txBody>
+          <a:bodyPr wrap="none">
+            <a:spAutoFit/>
+          </a:bodyPr>
+          <a:lstStyle/>
+          <a:p>
+            <a:pPr algn="ctr">
+              <a:defRPr sz="4000" b="1">
+                <a:solidFill>
+                  <a:srgbClr val="FFFFFF"/>
+                </a:solidFill>
+              </a:defRPr>
+            </a:pPr>
+            <a:r>
+              <a:t>After Today: Your Action Plan</a:t>
+            </a:r>
+          </a:p>
+        </p:txBody>
+      </p:sp>
+      <p:sp>
+        <p:nvSpPr>
+          <p:cNvPr id="3" name="Rounded Rectangle 2"/>
+          <p:cNvSpPr/>
+          <p:nvPr/>
+        </p:nvSpPr>
+        <p:spPr>
+          <a:xfrm>
+            <a:off x="2301087" y="2011680"/>
+            <a:ext cx="2286000" cy="3200400"/>
+          </a:xfrm>
+          <a:prstGeom prst="roundRect">
+            <a:avLst/>
+          </a:prstGeom>
+          <a:solidFill>
+            <a:srgbClr val="141A26"/>
+          </a:solidFill>
+          <a:ln w="25400">
+            <a:solidFill>
+              <a:srgbClr val="00D4AA"/>
+            </a:solidFill>
+          </a:ln>
+        </p:spPr>
+        <p:style>
+          <a:lnRef idx="1">
+            <a:schemeClr val="accent1"/>
+          </a:lnRef>
+          <a:fillRef idx="3">
+            <a:schemeClr val="accent1"/>
+          </a:fillRef>
+          <a:effectRef idx="2">
+            <a:schemeClr val="accent1"/>
+          </a:effectRef>
+          <a:fontRef idx="minor">
+            <a:schemeClr val="lt1"/>
+          </a:fontRef>
+        </p:style>
+        <p:txBody>
+          <a:bodyPr rtlCol="0" anchor="ctr"/>
+          <a:lstStyle/>
+          <a:p>
+            <a:pPr algn="ctr"/>
+          </a:p>
+        </p:txBody>
+      </p:sp>
+      <p:sp>
+        <p:nvSpPr>
+          <p:cNvPr id="4" name="Oval 3"/>
+          <p:cNvSpPr/>
+          <p:nvPr/>
+        </p:nvSpPr>
+        <p:spPr>
+          <a:xfrm>
+            <a:off x="2986887" y="2468880"/>
+            <a:ext cx="914400" cy="914400"/>
+          </a:xfrm>
+          <a:prstGeom prst="ellipse">
+            <a:avLst/>
+          </a:prstGeom>
+          <a:solidFill>
+            <a:srgbClr val="00D4AA"/>
+          </a:solidFill>
+          <a:ln>
+            <a:noFill/>
+          </a:ln>
+        </p:spPr>
+        <p:style>
+          <a:lnRef idx="1">
+            <a:schemeClr val="accent1"/>
+          </a:lnRef>
+          <a:fillRef idx="3">
+            <a:schemeClr val="accent1"/>
+          </a:fillRef>
+          <a:effectRef idx="2">
+            <a:schemeClr val="accent1"/>
+          </a:effectRef>
+          <a:fontRef idx="minor">
+            <a:schemeClr val="lt1"/>
+          </a:fontRef>
+        </p:style>
+        <p:txBody>
+          <a:bodyPr rtlCol="0" anchor="ctr"/>
+          <a:lstStyle/>
+          <a:p>
+            <a:pPr algn="ctr"/>
+          </a:p>
+        </p:txBody>
+      </p:sp>
+      <p:sp>
+        <p:nvSpPr>
+          <p:cNvPr id="5" name="TextBox 4"/>
+          <p:cNvSpPr txBox="1"/>
+          <p:nvPr/>
+        </p:nvSpPr>
+        <p:spPr>
+          <a:xfrm>
+            <a:off x="2986887" y="2468880"/>
+            <a:ext cx="914400" cy="914400"/>
+          </a:xfrm>
+          <a:prstGeom prst="rect">
+            <a:avLst/>
+          </a:prstGeom>
+          <a:noFill/>
+        </p:spPr>
+        <p:txBody>
+          <a:bodyPr wrap="none" anchor="ctr">
+            <a:spAutoFit/>
+          </a:bodyPr>
+          <a:lstStyle/>
+          <a:p>
+            <a:pPr algn="ctr">
+              <a:defRPr sz="3600" b="1">
+                <a:solidFill>
+                  <a:srgbClr val="0B0F1A"/>
+                </a:solidFill>
+              </a:defRPr>
+            </a:pPr>
+            <a:r>
+              <a:t>📅</a:t>
+            </a:r>
+          </a:p>
+        </p:txBody>
+      </p:sp>
+      <p:sp>
+        <p:nvSpPr>
+          <p:cNvPr id="6" name="TextBox 5"/>
+          <p:cNvSpPr txBox="1"/>
+          <p:nvPr/>
+        </p:nvSpPr>
+        <p:spPr>
+          <a:xfrm>
+            <a:off x="2392527" y="3657600"/>
+            <a:ext cx="2103120" cy="1371600"/>
+          </a:xfrm>
+          <a:prstGeom prst="rect">
+            <a:avLst/>
+          </a:prstGeom>
+          <a:noFill/>
+        </p:spPr>
+        <p:txBody>
+          <a:bodyPr wrap="square">
+            <a:normAutofit/>
+          </a:bodyPr>
+          <a:lstStyle/>
+          <a:p>
+            <a:pPr algn="ctr">
+              <a:defRPr sz="2000" b="1">
+                <a:solidFill>
+                  <a:srgbClr val="FFFFFF"/>
+                </a:solidFill>
+              </a:defRPr>
+            </a:pPr>
+          </a:p>
+        </p:txBody>
+      </p:sp>
+      <p:sp>
+        <p:nvSpPr>
+          <p:cNvPr id="7" name="Rounded Rectangle 6"/>
+          <p:cNvSpPr/>
+          <p:nvPr/>
+        </p:nvSpPr>
+        <p:spPr>
+          <a:xfrm>
+            <a:off x="4952847" y="2011680"/>
+            <a:ext cx="2286000" cy="3200400"/>
+          </a:xfrm>
+          <a:prstGeom prst="roundRect">
+            <a:avLst/>
+          </a:prstGeom>
+          <a:solidFill>
+            <a:srgbClr val="141A26"/>
+          </a:solidFill>
+          <a:ln w="25400">
+            <a:solidFill>
+              <a:srgbClr val="E86B4A"/>
+            </a:solidFill>
+          </a:ln>
+        </p:spPr>
+        <p:style>
+          <a:lnRef idx="1">
+            <a:schemeClr val="accent1"/>
+          </a:lnRef>
+          <a:fillRef idx="3">
+            <a:schemeClr val="accent1"/>
+          </a:fillRef>
+          <a:effectRef idx="2">
+            <a:schemeClr val="accent1"/>
+          </a:effectRef>
+          <a:fontRef idx="minor">
+            <a:schemeClr val="lt1"/>
+          </a:fontRef>
+        </p:style>
+        <p:txBody>
+          <a:bodyPr rtlCol="0" anchor="ctr"/>
+          <a:lstStyle/>
+          <a:p>
+            <a:pPr algn="ctr"/>
+          </a:p>
+        </p:txBody>
+      </p:sp>
+      <p:sp>
+        <p:nvSpPr>
+          <p:cNvPr id="8" name="Oval 7"/>
+          <p:cNvSpPr/>
+          <p:nvPr/>
+        </p:nvSpPr>
+        <p:spPr>
+          <a:xfrm>
+            <a:off x="5638647" y="2468880"/>
+            <a:ext cx="914400" cy="914400"/>
+          </a:xfrm>
+          <a:prstGeom prst="ellipse">
+            <a:avLst/>
+          </a:prstGeom>
+          <a:solidFill>
+            <a:srgbClr val="E86B4A"/>
+          </a:solidFill>
+          <a:ln>
+            <a:noFill/>
+          </a:ln>
+        </p:spPr>
+        <p:style>
+          <a:lnRef idx="1">
+            <a:schemeClr val="accent1"/>
+          </a:lnRef>
+          <a:fillRef idx="3">
+            <a:schemeClr val="accent1"/>
+          </a:fillRef>
+          <a:effectRef idx="2">
+            <a:schemeClr val="accent1"/>
+          </a:effectRef>
+          <a:fontRef idx="minor">
+            <a:schemeClr val="lt1"/>
+          </a:fontRef>
+        </p:style>
+        <p:txBody>
+          <a:bodyPr rtlCol="0" anchor="ctr"/>
+          <a:lstStyle/>
+          <a:p>
+            <a:pPr algn="ctr"/>
+          </a:p>
+        </p:txBody>
+      </p:sp>
+      <p:sp>
+        <p:nvSpPr>
+          <p:cNvPr id="9" name="TextBox 8"/>
+          <p:cNvSpPr txBox="1"/>
+          <p:nvPr/>
+        </p:nvSpPr>
+        <p:spPr>
+          <a:xfrm>
+            <a:off x="5638647" y="2468880"/>
+            <a:ext cx="914400" cy="914400"/>
+          </a:xfrm>
+          <a:prstGeom prst="rect">
+            <a:avLst/>
+          </a:prstGeom>
+          <a:noFill/>
+        </p:spPr>
+        <p:txBody>
+          <a:bodyPr wrap="none" anchor="ctr">
+            <a:spAutoFit/>
+          </a:bodyPr>
+          <a:lstStyle/>
+          <a:p>
+            <a:pPr algn="ctr">
+              <a:defRPr sz="3600" b="1">
+                <a:solidFill>
+                  <a:srgbClr val="0B0F1A"/>
+                </a:solidFill>
+              </a:defRPr>
+            </a:pPr>
+            <a:r>
+              <a:t>📈</a:t>
+            </a:r>
+          </a:p>
+        </p:txBody>
+      </p:sp>
+      <p:sp>
+        <p:nvSpPr>
+          <p:cNvPr id="10" name="TextBox 9"/>
+          <p:cNvSpPr txBox="1"/>
+          <p:nvPr/>
+        </p:nvSpPr>
+        <p:spPr>
+          <a:xfrm>
+            <a:off x="5044287" y="3657600"/>
+            <a:ext cx="2103120" cy="1371600"/>
+          </a:xfrm>
+          <a:prstGeom prst="rect">
+            <a:avLst/>
+          </a:prstGeom>
+          <a:noFill/>
+        </p:spPr>
+        <p:txBody>
+          <a:bodyPr wrap="square">
+            <a:normAutofit/>
+          </a:bodyPr>
+          <a:lstStyle/>
+          <a:p>
+            <a:pPr algn="ctr">
+              <a:defRPr sz="2000" b="1">
+                <a:solidFill>
+                  <a:srgbClr val="FFFFFF"/>
+                </a:solidFill>
+              </a:defRPr>
+            </a:pPr>
+          </a:p>
+        </p:txBody>
+      </p:sp>
+      <p:sp>
+        <p:nvSpPr>
+          <p:cNvPr id="11" name="Rounded Rectangle 10"/>
+          <p:cNvSpPr/>
+          <p:nvPr/>
+        </p:nvSpPr>
+        <p:spPr>
+          <a:xfrm>
+            <a:off x="7604607" y="2011680"/>
+            <a:ext cx="2286000" cy="3200400"/>
+          </a:xfrm>
+          <a:prstGeom prst="roundRect">
+            <a:avLst/>
+          </a:prstGeom>
+          <a:solidFill>
+            <a:srgbClr val="141A26"/>
+          </a:solidFill>
+          <a:ln w="25400">
+            <a:solidFill>
+              <a:srgbClr val="F59E0B"/>
+            </a:solidFill>
+          </a:ln>
+        </p:spPr>
+        <p:style>
+          <a:lnRef idx="1">
+            <a:schemeClr val="accent1"/>
+          </a:lnRef>
+          <a:fillRef idx="3">
+            <a:schemeClr val="accent1"/>
+          </a:fillRef>
+          <a:effectRef idx="2">
+            <a:schemeClr val="accent1"/>
+          </a:effectRef>
+          <a:fontRef idx="minor">
+            <a:schemeClr val="lt1"/>
+          </a:fontRef>
+        </p:style>
+        <p:txBody>
+          <a:bodyPr rtlCol="0" anchor="ctr"/>
+          <a:lstStyle/>
+          <a:p>
+            <a:pPr algn="ctr"/>
+          </a:p>
+        </p:txBody>
+      </p:sp>
+      <p:sp>
+        <p:nvSpPr>
+          <p:cNvPr id="12" name="Oval 11"/>
+          <p:cNvSpPr/>
+          <p:nvPr/>
+        </p:nvSpPr>
+        <p:spPr>
+          <a:xfrm>
+            <a:off x="8290407" y="2468880"/>
+            <a:ext cx="914400" cy="914400"/>
+          </a:xfrm>
+          <a:prstGeom prst="ellipse">
+            <a:avLst/>
+          </a:prstGeom>
+          <a:solidFill>
+            <a:srgbClr val="F59E0B"/>
+          </a:solidFill>
+          <a:ln>
+            <a:noFill/>
+          </a:ln>
+        </p:spPr>
+        <p:style>
+          <a:lnRef idx="1">
+            <a:schemeClr val="accent1"/>
+          </a:lnRef>
+          <a:fillRef idx="3">
+            <a:schemeClr val="accent1"/>
+          </a:fillRef>
+          <a:effectRef idx="2">
+            <a:schemeClr val="accent1"/>
+          </a:effectRef>
+          <a:fontRef idx="minor">
+            <a:schemeClr val="lt1"/>
+          </a:fontRef>
+        </p:style>
+        <p:txBody>
+          <a:bodyPr rtlCol="0" anchor="ctr"/>
+          <a:lstStyle/>
+          <a:p>
+            <a:pPr algn="ctr"/>
+          </a:p>
+        </p:txBody>
+      </p:sp>
+      <p:sp>
+        <p:nvSpPr>
+          <p:cNvPr id="13" name="TextBox 12"/>
+          <p:cNvSpPr txBox="1"/>
+          <p:nvPr/>
+        </p:nvSpPr>
+        <p:spPr>
+          <a:xfrm>
+            <a:off x="8290407" y="2468880"/>
+            <a:ext cx="914400" cy="914400"/>
+          </a:xfrm>
+          <a:prstGeom prst="rect">
+            <a:avLst/>
+          </a:prstGeom>
+          <a:noFill/>
+        </p:spPr>
+        <p:txBody>
+          <a:bodyPr wrap="none" anchor="ctr">
+            <a:spAutoFit/>
+          </a:bodyPr>
+          <a:lstStyle/>
+          <a:p>
+            <a:pPr algn="ctr">
+              <a:defRPr sz="3600" b="1">
+                <a:solidFill>
+                  <a:srgbClr val="0B0F1A"/>
+                </a:solidFill>
+              </a:defRPr>
+            </a:pPr>
+            <a:r>
+              <a:t>🚀</a:t>
+            </a:r>
+          </a:p>
+        </p:txBody>
+      </p:sp>
+      <p:sp>
+        <p:nvSpPr>
+          <p:cNvPr id="14" name="TextBox 13"/>
+          <p:cNvSpPr txBox="1"/>
+          <p:nvPr/>
+        </p:nvSpPr>
+        <p:spPr>
+          <a:xfrm>
+            <a:off x="7696047" y="3657600"/>
+            <a:ext cx="2103120" cy="1371600"/>
+          </a:xfrm>
+          <a:prstGeom prst="rect">
+            <a:avLst/>
+          </a:prstGeom>
+          <a:noFill/>
+        </p:spPr>
+        <p:txBody>
+          <a:bodyPr wrap="square">
+            <a:normAutofit/>
+          </a:bodyPr>
+          <a:lstStyle/>
+          <a:p>
+            <a:pPr algn="ctr">
+              <a:defRPr sz="2000" b="1">
+                <a:solidFill>
+                  <a:srgbClr val="FFFFFF"/>
+                </a:solidFill>
+              </a:defRPr>
+            </a:pPr>
           </a:p>
         </p:txBody>
       </p:sp>
@@ -16507,6 +18859,245 @@
 </p:sld>
 </file>
 
+<file path=ppt/slides/slide40.xml><?xml version="1.0" encoding="utf-8"?>
+<p:sld xmlns:a="http://schemas.openxmlformats.org/drawingml/2006/main" xmlns:p="http://schemas.openxmlformats.org/presentationml/2006/main" xmlns:r="http://schemas.openxmlformats.org/officeDocument/2006/relationships">
+  <p:cSld>
+    <p:bg>
+      <p:bgPr>
+        <a:solidFill>
+          <a:srgbClr val="0B0F1A"/>
+        </a:solidFill>
+        <a:effectLst/>
+      </p:bgPr>
+    </p:bg>
+    <p:spTree>
+      <p:nvGrpSpPr>
+        <p:cNvPr id="1" name=""/>
+        <p:cNvGrpSpPr/>
+        <p:nvPr/>
+      </p:nvGrpSpPr>
+      <p:grpSpPr/>
+      <p:sp>
+        <p:nvSpPr>
+          <p:cNvPr id="2" name="TextBox 1"/>
+          <p:cNvSpPr txBox="1"/>
+          <p:nvPr/>
+        </p:nvSpPr>
+        <p:spPr>
+          <a:xfrm>
+            <a:off x="731520" y="2286000"/>
+            <a:ext cx="10728655" cy="1371600"/>
+          </a:xfrm>
+          <a:prstGeom prst="rect">
+            <a:avLst/>
+          </a:prstGeom>
+          <a:noFill/>
+        </p:spPr>
+        <p:txBody>
+          <a:bodyPr wrap="square">
+            <a:spAutoFit/>
+          </a:bodyPr>
+          <a:lstStyle/>
+          <a:p>
+            <a:pPr algn="ctr">
+              <a:defRPr sz="5200" b="1">
+                <a:solidFill>
+                  <a:srgbClr val="FFFFFF"/>
+                </a:solidFill>
+              </a:defRPr>
+            </a:pPr>
+            <a:r>
+              <a:t>Great presentations aren't about great slides.</a:t>
+            </a:r>
+            <a:br/>
+            <a:r>
+              <a:t>They're about great thinking made visible.</a:t>
+            </a:r>
+          </a:p>
+        </p:txBody>
+      </p:sp>
+      <p:sp>
+        <p:nvSpPr>
+          <p:cNvPr id="3" name="TextBox 2"/>
+          <p:cNvSpPr txBox="1"/>
+          <p:nvPr/>
+        </p:nvSpPr>
+        <p:spPr>
+          <a:xfrm>
+            <a:off x="914400" y="3840480"/>
+            <a:ext cx="10362895" cy="914400"/>
+          </a:xfrm>
+          <a:prstGeom prst="rect">
+            <a:avLst/>
+          </a:prstGeom>
+          <a:noFill/>
+        </p:spPr>
+        <p:txBody>
+          <a:bodyPr wrap="square">
+            <a:spAutoFit/>
+          </a:bodyPr>
+          <a:lstStyle/>
+          <a:p>
+            <a:pPr algn="ctr">
+              <a:defRPr sz="2400">
+                <a:solidFill>
+                  <a:srgbClr val="8B95A5"/>
+                </a:solidFill>
+              </a:defRPr>
+            </a:pPr>
+            <a:r>
+              <a:t>Claude accelerates the visibility. The thinking is still yours.</a:t>
+            </a:r>
+          </a:p>
+        </p:txBody>
+      </p:sp>
+    </p:spTree>
+  </p:cSld>
+  <p:clrMapOvr>
+    <a:masterClrMapping/>
+  </p:clrMapOvr>
+</p:sld>
+</file>
+
+<file path=ppt/slides/slide41.xml><?xml version="1.0" encoding="utf-8"?>
+<p:sld xmlns:a="http://schemas.openxmlformats.org/drawingml/2006/main" xmlns:p="http://schemas.openxmlformats.org/presentationml/2006/main" xmlns:r="http://schemas.openxmlformats.org/officeDocument/2006/relationships">
+  <p:cSld>
+    <p:bg>
+      <p:bgPr>
+        <a:solidFill>
+          <a:srgbClr val="0B0F1A"/>
+        </a:solidFill>
+        <a:effectLst/>
+      </p:bgPr>
+    </p:bg>
+    <p:spTree>
+      <p:nvGrpSpPr>
+        <p:cNvPr id="1" name=""/>
+        <p:cNvGrpSpPr/>
+        <p:nvPr/>
+      </p:nvGrpSpPr>
+      <p:grpSpPr/>
+      <p:sp>
+        <p:nvSpPr>
+          <p:cNvPr id="2" name="TextBox 1"/>
+          <p:cNvSpPr txBox="1"/>
+          <p:nvPr/>
+        </p:nvSpPr>
+        <p:spPr>
+          <a:xfrm>
+            <a:off x="457200" y="2286000"/>
+            <a:ext cx="11277295" cy="2286000"/>
+          </a:xfrm>
+          <a:prstGeom prst="rect">
+            <a:avLst/>
+          </a:prstGeom>
+          <a:noFill/>
+        </p:spPr>
+        <p:txBody>
+          <a:bodyPr wrap="square">
+            <a:spAutoFit/>
+          </a:bodyPr>
+          <a:lstStyle/>
+          <a:p>
+            <a:pPr algn="ctr">
+              <a:defRPr sz="8000" b="1">
+                <a:solidFill>
+                  <a:srgbClr val="00D4AA"/>
+                </a:solidFill>
+              </a:defRPr>
+            </a:pPr>
+            <a:r>
+              <a:t>Session 3 Complete</a:t>
+            </a:r>
+          </a:p>
+        </p:txBody>
+      </p:sp>
+      <p:sp>
+        <p:nvSpPr>
+          <p:cNvPr id="3" name="Rectangle 2"/>
+          <p:cNvSpPr/>
+          <p:nvPr/>
+        </p:nvSpPr>
+        <p:spPr>
+          <a:xfrm>
+            <a:off x="0" y="4754880"/>
+            <a:ext cx="12191695" cy="36576"/>
+          </a:xfrm>
+          <a:prstGeom prst="rect">
+            <a:avLst/>
+          </a:prstGeom>
+          <a:solidFill>
+            <a:srgbClr val="00D4AA"/>
+          </a:solidFill>
+          <a:ln>
+            <a:noFill/>
+          </a:ln>
+        </p:spPr>
+        <p:style>
+          <a:lnRef idx="1">
+            <a:schemeClr val="accent1"/>
+          </a:lnRef>
+          <a:fillRef idx="3">
+            <a:schemeClr val="accent1"/>
+          </a:fillRef>
+          <a:effectRef idx="2">
+            <a:schemeClr val="accent1"/>
+          </a:effectRef>
+          <a:fontRef idx="minor">
+            <a:schemeClr val="lt1"/>
+          </a:fontRef>
+        </p:style>
+        <p:txBody>
+          <a:bodyPr rtlCol="0" anchor="ctr"/>
+          <a:lstStyle/>
+          <a:p>
+            <a:pPr algn="ctr"/>
+          </a:p>
+        </p:txBody>
+      </p:sp>
+      <p:sp>
+        <p:nvSpPr>
+          <p:cNvPr id="4" name="TextBox 3"/>
+          <p:cNvSpPr txBox="1"/>
+          <p:nvPr/>
+        </p:nvSpPr>
+        <p:spPr>
+          <a:xfrm>
+            <a:off x="457200" y="5029200"/>
+            <a:ext cx="11277295" cy="457200"/>
+          </a:xfrm>
+          <a:prstGeom prst="rect">
+            <a:avLst/>
+          </a:prstGeom>
+          <a:noFill/>
+        </p:spPr>
+        <p:txBody>
+          <a:bodyPr wrap="none">
+            <a:spAutoFit/>
+          </a:bodyPr>
+          <a:lstStyle/>
+          <a:p>
+            <a:pPr algn="r">
+              <a:defRPr sz="2000">
+                <a:solidFill>
+                  <a:srgbClr val="8B95A5"/>
+                </a:solidFill>
+              </a:defRPr>
+            </a:pPr>
+            <a:r>
+              <a:t>- © 2026 AIA Copilot</a:t>
+            </a:r>
+          </a:p>
+        </p:txBody>
+      </p:sp>
+    </p:spTree>
+  </p:cSld>
+  <p:clrMapOvr>
+    <a:masterClrMapping/>
+  </p:clrMapOvr>
+</p:sld>
+</file>
+
 <file path=ppt/slides/slide5.xml><?xml version="1.0" encoding="utf-8"?>
 <p:sld xmlns:a="http://schemas.openxmlformats.org/drawingml/2006/main" xmlns:p="http://schemas.openxmlformats.org/presentationml/2006/main" xmlns:r="http://schemas.openxmlformats.org/officeDocument/2006/relationships">
   <p:cSld>
@@ -16555,7 +19146,7 @@
               </a:defRPr>
             </a:pPr>
             <a:r>
-              <a:t>Three Ways to Use Claude for Presentations</a:t>
+              <a:t>Three Workflows for AI-Powered Presentations</a:t>
             </a:r>
           </a:p>
         </p:txBody>
@@ -16569,161 +19160,6 @@
         <p:spPr>
           <a:xfrm>
             <a:off x="2301087" y="2011680"/>
-            <a:ext cx="2286000" cy="3200400"/>
-          </a:xfrm>
-          <a:prstGeom prst="roundRect">
-            <a:avLst/>
-          </a:prstGeom>
-          <a:solidFill>
-            <a:srgbClr val="141A26"/>
-          </a:solidFill>
-          <a:ln w="25400">
-            <a:solidFill>
-              <a:srgbClr val="E86B4A"/>
-            </a:solidFill>
-          </a:ln>
-        </p:spPr>
-        <p:style>
-          <a:lnRef idx="1">
-            <a:schemeClr val="accent1"/>
-          </a:lnRef>
-          <a:fillRef idx="3">
-            <a:schemeClr val="accent1"/>
-          </a:fillRef>
-          <a:effectRef idx="2">
-            <a:schemeClr val="accent1"/>
-          </a:effectRef>
-          <a:fontRef idx="minor">
-            <a:schemeClr val="lt1"/>
-          </a:fontRef>
-        </p:style>
-        <p:txBody>
-          <a:bodyPr rtlCol="0" anchor="ctr"/>
-          <a:lstStyle/>
-          <a:p>
-            <a:pPr algn="ctr"/>
-          </a:p>
-        </p:txBody>
-      </p:sp>
-      <p:sp>
-        <p:nvSpPr>
-          <p:cNvPr id="4" name="Oval 3"/>
-          <p:cNvSpPr/>
-          <p:nvPr/>
-        </p:nvSpPr>
-        <p:spPr>
-          <a:xfrm>
-            <a:off x="2986887" y="2468880"/>
-            <a:ext cx="914400" cy="914400"/>
-          </a:xfrm>
-          <a:prstGeom prst="ellipse">
-            <a:avLst/>
-          </a:prstGeom>
-          <a:solidFill>
-            <a:srgbClr val="E86B4A"/>
-          </a:solidFill>
-          <a:ln>
-            <a:noFill/>
-          </a:ln>
-        </p:spPr>
-        <p:style>
-          <a:lnRef idx="1">
-            <a:schemeClr val="accent1"/>
-          </a:lnRef>
-          <a:fillRef idx="3">
-            <a:schemeClr val="accent1"/>
-          </a:fillRef>
-          <a:effectRef idx="2">
-            <a:schemeClr val="accent1"/>
-          </a:effectRef>
-          <a:fontRef idx="minor">
-            <a:schemeClr val="lt1"/>
-          </a:fontRef>
-        </p:style>
-        <p:txBody>
-          <a:bodyPr rtlCol="0" anchor="ctr"/>
-          <a:lstStyle/>
-          <a:p>
-            <a:pPr algn="ctr"/>
-          </a:p>
-        </p:txBody>
-      </p:sp>
-      <p:sp>
-        <p:nvSpPr>
-          <p:cNvPr id="5" name="TextBox 4"/>
-          <p:cNvSpPr txBox="1"/>
-          <p:nvPr/>
-        </p:nvSpPr>
-        <p:spPr>
-          <a:xfrm>
-            <a:off x="2986887" y="2468880"/>
-            <a:ext cx="914400" cy="914400"/>
-          </a:xfrm>
-          <a:prstGeom prst="rect">
-            <a:avLst/>
-          </a:prstGeom>
-          <a:noFill/>
-        </p:spPr>
-        <p:txBody>
-          <a:bodyPr wrap="none" anchor="ctr">
-            <a:spAutoFit/>
-          </a:bodyPr>
-          <a:lstStyle/>
-          <a:p>
-            <a:pPr algn="ctr">
-              <a:defRPr sz="3600" b="1">
-                <a:solidFill>
-                  <a:srgbClr val="0B0F1A"/>
-                </a:solidFill>
-              </a:defRPr>
-            </a:pPr>
-            <a:r>
-              <a:t>🔌</a:t>
-            </a:r>
-          </a:p>
-        </p:txBody>
-      </p:sp>
-      <p:sp>
-        <p:nvSpPr>
-          <p:cNvPr id="6" name="TextBox 5"/>
-          <p:cNvSpPr txBox="1"/>
-          <p:nvPr/>
-        </p:nvSpPr>
-        <p:spPr>
-          <a:xfrm>
-            <a:off x="2392527" y="3657600"/>
-            <a:ext cx="2103120" cy="1371600"/>
-          </a:xfrm>
-          <a:prstGeom prst="rect">
-            <a:avLst/>
-          </a:prstGeom>
-          <a:noFill/>
-        </p:spPr>
-        <p:txBody>
-          <a:bodyPr wrap="square">
-            <a:normAutofit/>
-          </a:bodyPr>
-          <a:lstStyle/>
-          <a:p>
-            <a:pPr algn="ctr">
-              <a:defRPr sz="2000" b="1">
-                <a:solidFill>
-                  <a:srgbClr val="FFFFFF"/>
-                </a:solidFill>
-              </a:defRPr>
-            </a:pPr>
-          </a:p>
-        </p:txBody>
-      </p:sp>
-      <p:sp>
-        <p:nvSpPr>
-          <p:cNvPr id="7" name="Rounded Rectangle 6"/>
-          <p:cNvSpPr/>
-          <p:nvPr/>
-        </p:nvSpPr>
-        <p:spPr>
-          <a:xfrm>
-            <a:off x="4952847" y="2011680"/>
             <a:ext cx="2286000" cy="3200400"/>
           </a:xfrm>
           <a:prstGeom prst="roundRect">
@@ -16762,13 +19198,13 @@
       </p:sp>
       <p:sp>
         <p:nvSpPr>
-          <p:cNvPr id="8" name="Oval 7"/>
+          <p:cNvPr id="4" name="Oval 3"/>
           <p:cNvSpPr/>
           <p:nvPr/>
         </p:nvSpPr>
         <p:spPr>
           <a:xfrm>
-            <a:off x="5638647" y="2468880"/>
+            <a:off x="2986887" y="2468880"/>
             <a:ext cx="914400" cy="914400"/>
           </a:xfrm>
           <a:prstGeom prst="ellipse">
@@ -16805,13 +19241,13 @@
       </p:sp>
       <p:sp>
         <p:nvSpPr>
-          <p:cNvPr id="9" name="TextBox 8"/>
+          <p:cNvPr id="5" name="TextBox 4"/>
           <p:cNvSpPr txBox="1"/>
           <p:nvPr/>
         </p:nvSpPr>
         <p:spPr>
           <a:xfrm>
-            <a:off x="5638647" y="2468880"/>
+            <a:off x="2986887" y="2468880"/>
             <a:ext cx="914400" cy="914400"/>
           </a:xfrm>
           <a:prstGeom prst="rect">
@@ -16833,20 +19269,20 @@
               </a:defRPr>
             </a:pPr>
             <a:r>
-              <a:t>🎨</a:t>
-            </a:r>
-          </a:p>
-        </p:txBody>
-      </p:sp>
-      <p:sp>
-        <p:nvSpPr>
-          <p:cNvPr id="10" name="TextBox 9"/>
+              <a:t>⚡</a:t>
+            </a:r>
+          </a:p>
+        </p:txBody>
+      </p:sp>
+      <p:sp>
+        <p:nvSpPr>
+          <p:cNvPr id="6" name="TextBox 5"/>
           <p:cNvSpPr txBox="1"/>
           <p:nvPr/>
         </p:nvSpPr>
         <p:spPr>
           <a:xfrm>
-            <a:off x="5044287" y="3657600"/>
+            <a:off x="2392527" y="3657600"/>
             <a:ext cx="2103120" cy="1371600"/>
           </a:xfrm>
           <a:prstGeom prst="rect">
@@ -16872,13 +19308,13 @@
       </p:sp>
       <p:sp>
         <p:nvSpPr>
-          <p:cNvPr id="11" name="Rounded Rectangle 10"/>
+          <p:cNvPr id="7" name="Rounded Rectangle 6"/>
           <p:cNvSpPr/>
           <p:nvPr/>
         </p:nvSpPr>
         <p:spPr>
           <a:xfrm>
-            <a:off x="7604607" y="2011680"/>
+            <a:off x="4952847" y="2011680"/>
             <a:ext cx="2286000" cy="3200400"/>
           </a:xfrm>
           <a:prstGeom prst="roundRect">
@@ -16889,7 +19325,7 @@
           </a:solidFill>
           <a:ln w="25400">
             <a:solidFill>
-              <a:srgbClr val="F59E0B"/>
+              <a:srgbClr val="00D4AA"/>
             </a:solidFill>
           </a:ln>
         </p:spPr>
@@ -16917,20 +19353,20 @@
       </p:sp>
       <p:sp>
         <p:nvSpPr>
-          <p:cNvPr id="12" name="Oval 11"/>
+          <p:cNvPr id="8" name="Oval 7"/>
           <p:cNvSpPr/>
           <p:nvPr/>
         </p:nvSpPr>
         <p:spPr>
           <a:xfrm>
-            <a:off x="8290407" y="2468880"/>
+            <a:off x="5638647" y="2468880"/>
             <a:ext cx="914400" cy="914400"/>
           </a:xfrm>
           <a:prstGeom prst="ellipse">
             <a:avLst/>
           </a:prstGeom>
           <a:solidFill>
-            <a:srgbClr val="F59E0B"/>
+            <a:srgbClr val="00D4AA"/>
           </a:solidFill>
           <a:ln>
             <a:noFill/>
@@ -16960,13 +19396,13 @@
       </p:sp>
       <p:sp>
         <p:nvSpPr>
-          <p:cNvPr id="13" name="TextBox 12"/>
+          <p:cNvPr id="9" name="TextBox 8"/>
           <p:cNvSpPr txBox="1"/>
           <p:nvPr/>
         </p:nvSpPr>
         <p:spPr>
           <a:xfrm>
-            <a:off x="8290407" y="2468880"/>
+            <a:off x="5638647" y="2468880"/>
             <a:ext cx="914400" cy="914400"/>
           </a:xfrm>
           <a:prstGeom prst="rect">
@@ -16988,7 +19424,162 @@
               </a:defRPr>
             </a:pPr>
             <a:r>
-              <a:t>⚡</a:t>
+              <a:t>📄</a:t>
+            </a:r>
+          </a:p>
+        </p:txBody>
+      </p:sp>
+      <p:sp>
+        <p:nvSpPr>
+          <p:cNvPr id="10" name="TextBox 9"/>
+          <p:cNvSpPr txBox="1"/>
+          <p:nvPr/>
+        </p:nvSpPr>
+        <p:spPr>
+          <a:xfrm>
+            <a:off x="5044287" y="3657600"/>
+            <a:ext cx="2103120" cy="1371600"/>
+          </a:xfrm>
+          <a:prstGeom prst="rect">
+            <a:avLst/>
+          </a:prstGeom>
+          <a:noFill/>
+        </p:spPr>
+        <p:txBody>
+          <a:bodyPr wrap="square">
+            <a:normAutofit/>
+          </a:bodyPr>
+          <a:lstStyle/>
+          <a:p>
+            <a:pPr algn="ctr">
+              <a:defRPr sz="2000" b="1">
+                <a:solidFill>
+                  <a:srgbClr val="FFFFFF"/>
+                </a:solidFill>
+              </a:defRPr>
+            </a:pPr>
+          </a:p>
+        </p:txBody>
+      </p:sp>
+      <p:sp>
+        <p:nvSpPr>
+          <p:cNvPr id="11" name="Rounded Rectangle 10"/>
+          <p:cNvSpPr/>
+          <p:nvPr/>
+        </p:nvSpPr>
+        <p:spPr>
+          <a:xfrm>
+            <a:off x="7604607" y="2011680"/>
+            <a:ext cx="2286000" cy="3200400"/>
+          </a:xfrm>
+          <a:prstGeom prst="roundRect">
+            <a:avLst/>
+          </a:prstGeom>
+          <a:solidFill>
+            <a:srgbClr val="141A26"/>
+          </a:solidFill>
+          <a:ln w="25400">
+            <a:solidFill>
+              <a:srgbClr val="00D4AA"/>
+            </a:solidFill>
+          </a:ln>
+        </p:spPr>
+        <p:style>
+          <a:lnRef idx="1">
+            <a:schemeClr val="accent1"/>
+          </a:lnRef>
+          <a:fillRef idx="3">
+            <a:schemeClr val="accent1"/>
+          </a:fillRef>
+          <a:effectRef idx="2">
+            <a:schemeClr val="accent1"/>
+          </a:effectRef>
+          <a:fontRef idx="minor">
+            <a:schemeClr val="lt1"/>
+          </a:fontRef>
+        </p:style>
+        <p:txBody>
+          <a:bodyPr rtlCol="0" anchor="ctr"/>
+          <a:lstStyle/>
+          <a:p>
+            <a:pPr algn="ctr"/>
+          </a:p>
+        </p:txBody>
+      </p:sp>
+      <p:sp>
+        <p:nvSpPr>
+          <p:cNvPr id="12" name="Oval 11"/>
+          <p:cNvSpPr/>
+          <p:nvPr/>
+        </p:nvSpPr>
+        <p:spPr>
+          <a:xfrm>
+            <a:off x="8290407" y="2468880"/>
+            <a:ext cx="914400" cy="914400"/>
+          </a:xfrm>
+          <a:prstGeom prst="ellipse">
+            <a:avLst/>
+          </a:prstGeom>
+          <a:solidFill>
+            <a:srgbClr val="00D4AA"/>
+          </a:solidFill>
+          <a:ln>
+            <a:noFill/>
+          </a:ln>
+        </p:spPr>
+        <p:style>
+          <a:lnRef idx="1">
+            <a:schemeClr val="accent1"/>
+          </a:lnRef>
+          <a:fillRef idx="3">
+            <a:schemeClr val="accent1"/>
+          </a:fillRef>
+          <a:effectRef idx="2">
+            <a:schemeClr val="accent1"/>
+          </a:effectRef>
+          <a:fontRef idx="minor">
+            <a:schemeClr val="lt1"/>
+          </a:fontRef>
+        </p:style>
+        <p:txBody>
+          <a:bodyPr rtlCol="0" anchor="ctr"/>
+          <a:lstStyle/>
+          <a:p>
+            <a:pPr algn="ctr"/>
+          </a:p>
+        </p:txBody>
+      </p:sp>
+      <p:sp>
+        <p:nvSpPr>
+          <p:cNvPr id="13" name="TextBox 12"/>
+          <p:cNvSpPr txBox="1"/>
+          <p:nvPr/>
+        </p:nvSpPr>
+        <p:spPr>
+          <a:xfrm>
+            <a:off x="8290407" y="2468880"/>
+            <a:ext cx="914400" cy="914400"/>
+          </a:xfrm>
+          <a:prstGeom prst="rect">
+            <a:avLst/>
+          </a:prstGeom>
+          <a:noFill/>
+        </p:spPr>
+        <p:txBody>
+          <a:bodyPr wrap="none" anchor="ctr">
+            <a:spAutoFit/>
+          </a:bodyPr>
+          <a:lstStyle/>
+          <a:p>
+            <a:pPr algn="ctr">
+              <a:defRPr sz="3600" b="1">
+                <a:solidFill>
+                  <a:srgbClr val="0B0F1A"/>
+                </a:solidFill>
+              </a:defRPr>
+            </a:pPr>
+            <a:r>
+              <a:t>🎯</a:t>
             </a:r>
           </a:p>
         </p:txBody>

--- a/slides/Business Users/S3_PowerPoint_Executive.pptx
+++ b/slides/Business Users/S3_PowerPoint_Executive.pptx
@@ -2560,7 +2560,7 @@
           </a:p>
           <a:p>
             <a:r>
-              <a:t>   * Mistake two: not reviewing output. AI is brilliant at structure and mediocre at facts. A real example — a banking client's AI-generated slide confidently stated 'European fintech funding increased 43 percent in Q3.' Impressive. Also completely fabricated. The actual number was 12 percent. If they'd presented that to investors, their credibility would have been destroyed.</a:t>
+              <a:t>   * Mistake two: not reviewing output. AI is brilliant at structure and mediocre at facts. A real example — a banking client's AI-generated slide confidently stated 'European fintech funding increased 43 percent in Q3.' Impressive. Also completely fabricated. The actual number was 12 percent. If they'd presented that to investors, their credibility would have been destroyed. Watch for four specific patterns: inventing plausible-sounding statistics, generic recommendations that lack your business context, outdated information from training data lag, and overly optimistic phrasing that lacks nuance. A biotech client asked AI to explain their gene therapy mechanism — the structure was excellent, but the science was oversimplified to the point of inaccuracy. They kept the structure and replaced all the scientific content. That's the right approach.</a:t>
             </a:r>
           </a:p>
           <a:p>
@@ -4748,6 +4748,11 @@
               <a:t>   * The best presenters aren't the ones with the prettiest slides — they're the ones with the clearest thinking</a:t>
             </a:r>
           </a:p>
+          <a:p>
+            <a:r>
+              <a:t>   * One more thing to remember: AI doesn't replace expertise. It multiplies it. If you're mediocre at presentations, AI makes you mediocre faster. If you're skilled at presentations, AI gives you superpowers. The people who invest 2 to 3 hours learning these techniques save 3 to 4 hours per deck for the rest of their careers. That's not a trade-off — that's leverage.</a:t>
+            </a:r>
+          </a:p>
           <a:p/>
           <a:p>
             <a:r>
@@ -4861,6 +4866,11 @@
               <a:t>   * Questions? I'm available after the session for one-on-one help.</a:t>
             </a:r>
           </a:p>
+          <a:p>
+            <a:r>
+              <a:t>   * One more thing to remember: AI doesn't replace expertise. It multiplies it. If you're mediocre at presentations, AI makes you mediocre faster. If you're skilled at presentations, AI gives you superpowers. The people who invest 2 to 3 hours learning these techniques save 3 to 4 hours per deck for the rest of their careers. That's not a trade-off — that's leverage.</a:t>
+            </a:r>
+          </a:p>
         </p:txBody>
       </p:sp>
       <p:sp>
@@ -5113,6 +5123,11 @@
               <a:t>   * The Research Preview will improve rapidly — Microsoft and Anthropic are actively developing this</a:t>
             </a:r>
           </a:p>
+          <a:p>
+            <a:r>
+              <a:t>   * Quick note on security that your IT team will ask about: Claude does not train on your content. Your data stays private. That said, always verify your organization's data governance policies before using AI with sensitive presentations — especially investor materials, M&amp;A decks, or anything with material non-public information.</a:t>
+            </a:r>
+          </a:p>
           <a:p/>
           <a:p>
             <a:r>
@@ -5245,6 +5260,11 @@
           <a:p>
             <a:r>
               <a:t>   * Speaker notes generation alone saves 30-60 minutes per deck</a:t>
+            </a:r>
+          </a:p>
+          <a:p>
+            <a:r>
+              <a:t>   * Quick note on security that your IT team will ask about: Claude does not train on your content. Your data stays private. That said, always verify your organization's data governance policies before using AI with sensitive presentations — especially investor materials, M&amp;A decks, or anything with material non-public information.</a:t>
             </a:r>
           </a:p>
           <a:p/>
